--- a/docs/submission-ar/IsnadLens-Arabic-Presentation.pptx
+++ b/docs/submission-ar/IsnadLens-Arabic-Presentation.pptx
@@ -1218,7 +1218,7 @@
           <a:lstStyle xmlns:a="http://schemas.openxmlformats.org/drawingml/2006/main"/>
           <a:p xmlns:a="http://schemas.openxmlformats.org/drawingml/2006/main">
             <a:r>
-              <a:t>25 ثانية. حفظت كل إخفاق ضمن الحجم. لا تعني 425 نجاحاً ولا إعادة اختبار الجميع على النسخة الأخيرة. الآلاف تخص replay والتلاعب وأختام السلامة حول 150 سجلاً.</a:t>
+              <a:t>25 ثانية. حفظت جميع النتائج ضمن الحجم. لا تعني 425 نجاحاً ولا إعادة اختبار الجميع على النسخة الأخيرة. الآلاف تخص replay والتلاعب وأختام السلامة حول 150 سجلاً.</a:t>
             </a:r>
           </a:p>
           <a:p xmlns:a="http://schemas.openxmlformats.org/drawingml/2006/main">

--- a/docs/submission-ar/IsnadLens-Arabic-Presentation.pptx
+++ b/docs/submission-ar/IsnadLens-Arabic-Presentation.pptx
@@ -538,7 +538,7 @@
           <a:lstStyle xmlns:a="http://schemas.openxmlformats.org/drawingml/2006/main"/>
           <a:p xmlns:a="http://schemas.openxmlformats.org/drawingml/2006/main">
             <a:r>
-              <a:t>25 ثانية. 3.3256400625 / 30 * 100 = 11.085466875 SAR. 4.4639325 / 30 * 100 = 14.879775 SAR. يختلف مزيج الأسئلة، وطول الأدلة والمراجعات. لا أقدّم 5 SAR كتكلفة حالية.</a:t>
+              <a:t>15 ثانية. أذكر نطاق 11–15 ريالاً لكل مئة سؤال وأرصدة الاستضافة فقط؛ لا أقرأ الحسابات التفصيلية. يختلف مزيج الأسئلة، وطول الأدلة والمراجعات. لا أقدّم 5 SAR كتكلفة حالية.</a:t>
             </a:r>
           </a:p>
           <a:p xmlns:a="http://schemas.openxmlformats.org/drawingml/2006/main">
@@ -708,7 +708,7 @@
           <a:lstStyle xmlns:a="http://schemas.openxmlformats.org/drawingml/2006/main"/>
           <a:p xmlns:a="http://schemas.openxmlformats.org/drawingml/2006/main">
             <a:r>
-              <a:t>20 ثانية. أختم بالهدف وأفتح المجال للأسئلة. إجمالي الوقت المستهدف نحو خمس دقائق ويجب ضبطه بالبروفة. روابط الفيديو والمستودع العام والتسليم النهائي تُراجع قبل إرسال النموذج.</a:t>
+              <a:t>20 ثانية. أختم بالهدف وأفتح المجال للأسئلة. إجمالي وقت الحديث المستهدف أربع دقائق ونصف؛ أترك نصف دقيقة للتوقفات وتبديل الشرائح، وأضبط المدة بالبروفة. روابط الفيديو والمستودع العام والتسليم النهائي تُراجع قبل إرسال النموذج.</a:t>
             </a:r>
           </a:p>
           <a:p xmlns:a="http://schemas.openxmlformats.org/drawingml/2006/main">
@@ -1218,7 +1218,7 @@
           <a:lstStyle xmlns:a="http://schemas.openxmlformats.org/drawingml/2006/main"/>
           <a:p xmlns:a="http://schemas.openxmlformats.org/drawingml/2006/main">
             <a:r>
-              <a:t>25 ثانية. حفظت جميع النتائج ضمن الحجم. لا تعني 425 نجاحاً ولا إعادة اختبار الجميع على النسخة الأخيرة. الآلاف تخص replay والتلاعب وأختام السلامة حول 150 سجلاً.</a:t>
+              <a:t>15 ثانية. أذكر حجم التقييم والتمييز بين الأسئلة والفحوص البرمجية فقط؛ لا أقرأ كل رقم. لا تعني 425 نجاحاً ولا إعادة اختبار الجميع على النسخة الأخيرة. الآلاف تخص replay والتلاعب وأختام السلامة حول 150 سجلاً.</a:t>
             </a:r>
           </a:p>
           <a:p xmlns:a="http://schemas.openxmlformats.org/drawingml/2006/main">
@@ -1303,7 +1303,7 @@
           <a:lstStyle xmlns:a="http://schemas.openxmlformats.org/drawingml/2006/main"/>
           <a:p xmlns:a="http://schemas.openxmlformats.org/drawingml/2006/main">
             <a:r>
-              <a:t>25 ثانية. الجولة الثالثة أبرزت مشكلة السياق والشرح. الجولة الرابعة كشفت شارة تتعارض مع جواب صحيح. الرقم الإجمالي وحده لا يكفي للحكم على الأمان أو تجربة المستخدم.</a:t>
+              <a:t>15 ثانية. الجولة الثالثة أبرزت مشكلة السياق والشرح. الجولة الرابعة كشفت شارة تتعارض مع جواب صحيح. أكتفي بالدرس المستفاد ولا أشرح كل جولة.</a:t>
             </a:r>
           </a:p>
           <a:p xmlns:a="http://schemas.openxmlformats.org/drawingml/2006/main">
@@ -24898,2996 +24898,2996 @@
 </file>
 
 <file path=ppt/slides/slide7.xml><?xml version="1.0" encoding="utf-8"?>
-<p:sld xmlns:p="http://schemas.openxmlformats.org/presentationml/2006/main">
-  <p:cSld>
-    <p:bg>
-      <p:bgPr>
-        <a:solidFill xmlns:a="http://schemas.openxmlformats.org/drawingml/2006/main">
-          <a:srgbClr val="F2F4FF"/>
-        </a:solidFill>
-      </p:bgPr>
-    </p:bg>
-    <p:spTree>
-      <p:nvGrpSpPr>
-        <p:cNvPr id="1" name=""/>
-        <p:cNvGrpSpPr/>
-        <p:nvPr/>
-      </p:nvGrpSpPr>
-      <p:grpSpPr>
-        <a:xfrm xmlns:a="http://schemas.openxmlformats.org/drawingml/2006/main"/>
-      </p:grpSpPr>
-      <p:sp>
-        <p:nvSpPr>
-          <p:cNvPr id="53" name="">
-            <a:extLst xmlns:a="http://schemas.openxmlformats.org/drawingml/2006/main">
-              <a:ext uri="{FF2B5EF4-FFF2-40B4-BE49-F238E27FC236}">
-                <a16:creationId xmlns:a16="http://schemas.microsoft.com/office/drawing/2014/main" id="{327E8E01-61FA-414D-BE5A-59D7BD2F5EBA}"/>
-              </a:ext>
-            </a:extLst>
-          </p:cNvPr>
-          <p:cNvSpPr>
-            <a:spLocks xmlns:a="http://schemas.openxmlformats.org/drawingml/2006/main" noGrp="1"/>
-          </p:cNvSpPr>
-          <p:nvPr/>
-        </p:nvSpPr>
-        <p:spPr>
-          <a:xfrm xmlns:a="http://schemas.openxmlformats.org/drawingml/2006/main">
-            <a:off x="857250" y="9486900"/>
-            <a:ext cx="6191250" cy="333375"/>
-          </a:xfrm>
-          <a:prstGeom xmlns:a="http://schemas.openxmlformats.org/drawingml/2006/main" prst="rect">
-            <a:avLst/>
-          </a:prstGeom>
-          <a:noFill xmlns:a="http://schemas.openxmlformats.org/drawingml/2006/main"/>
-          <a:ln xmlns:a="http://schemas.openxmlformats.org/drawingml/2006/main" w="0">
-            <a:noFill/>
-          </a:ln>
-        </p:spPr>
-        <p:txBody>
-          <a:bodyPr xmlns:a="http://schemas.openxmlformats.org/drawingml/2006/main" wrap="none" lIns="0" tIns="0" rIns="0" bIns="0" anchor="t">
-            <a:noAutofit/>
-          </a:bodyPr>
-          <a:lstStyle xmlns:a="http://schemas.openxmlformats.org/drawingml/2006/main"/>
-          <a:p xmlns:a="http://schemas.openxmlformats.org/drawingml/2006/main">
-            <a:pPr algn="l">
-              <a:defRPr sz="1725" b="0">
-                <a:solidFill>
-                  <a:srgbClr val="586277"/>
-                </a:solidFill>
-                <a:latin typeface="Arial"/>
-                <a:ea typeface="Arial"/>
-                <a:cs typeface="Arial"/>
-              </a:defRPr>
-            </a:pPr>
-            <a:r>
-              <a:rPr sz="1725" b="0">
-                <a:solidFill>
-                  <a:srgbClr val="586277"/>
-                </a:solidFill>
-                <a:latin typeface="Arial"/>
-                <a:ea typeface="Arial"/>
-                <a:cs typeface="Arial"/>
-              </a:rPr>
-              <a:t>IsnadLens / 07</a:t>
-            </a:r>
-          </a:p>
-        </p:txBody>
-      </p:sp>
-      <p:sp>
-        <p:nvSpPr>
-          <p:cNvPr id="2" name="">
-            <a:extLst xmlns:a="http://schemas.openxmlformats.org/drawingml/2006/main">
-              <a:ext uri="{FF2B5EF4-FFF2-40B4-BE49-F238E27FC236}">
-                <a16:creationId xmlns:a16="http://schemas.microsoft.com/office/drawing/2014/main" id="{E6E7E6C1-6482-4EB4-BC24-78AAF9814BE5}"/>
-              </a:ext>
-            </a:extLst>
-          </p:cNvPr>
-          <p:cNvSpPr>
-            <a:spLocks xmlns:a="http://schemas.openxmlformats.org/drawingml/2006/main" noGrp="1"/>
-          </p:cNvSpPr>
-          <p:nvPr/>
-        </p:nvSpPr>
-        <p:spPr>
-          <a:xfrm xmlns:a="http://schemas.openxmlformats.org/drawingml/2006/main">
-            <a:off x="16983075" y="9486900"/>
-            <a:ext cx="447675" cy="339566"/>
-          </a:xfrm>
-          <a:prstGeom xmlns:a="http://schemas.openxmlformats.org/drawingml/2006/main" prst="rect">
-            <a:avLst/>
-          </a:prstGeom>
-          <a:noFill xmlns:a="http://schemas.openxmlformats.org/drawingml/2006/main"/>
-          <a:ln xmlns:a="http://schemas.openxmlformats.org/drawingml/2006/main" w="0">
-            <a:noFill/>
-          </a:ln>
-        </p:spPr>
-        <p:txBody>
-          <a:bodyPr xmlns:a="http://schemas.openxmlformats.org/drawingml/2006/main" wrap="none" lIns="0" tIns="0" rIns="0" bIns="0" anchor="t">
-            <a:noAutofit/>
-          </a:bodyPr>
-          <a:lstStyle xmlns:a="http://schemas.openxmlformats.org/drawingml/2006/main"/>
-          <a:p xmlns:a="http://schemas.openxmlformats.org/drawingml/2006/main">
-            <a:pPr algn="ctr">
-              <a:defRPr sz="1725" b="0">
-                <a:solidFill>
-                  <a:srgbClr val="586277"/>
-                </a:solidFill>
-                <a:latin typeface="Arial"/>
-                <a:ea typeface="Arial"/>
-                <a:cs typeface="Arial"/>
-              </a:defRPr>
-            </a:pPr>
-            <a:r>
-              <a:rPr sz="1725" b="0">
-                <a:solidFill>
-                  <a:srgbClr val="586277"/>
-                </a:solidFill>
-                <a:latin typeface="Arial"/>
-                <a:ea typeface="Arial"/>
-                <a:cs typeface="Arial"/>
-              </a:rPr>
-              <a:t>تحدي</a:t>
-            </a:r>
-          </a:p>
-        </p:txBody>
-      </p:sp>
-      <p:sp>
-        <p:nvSpPr>
-          <p:cNvPr id="3" name="">
-            <a:extLst xmlns:a="http://schemas.openxmlformats.org/drawingml/2006/main">
-              <a:ext uri="{FF2B5EF4-FFF2-40B4-BE49-F238E27FC236}">
-                <a16:creationId xmlns:a16="http://schemas.microsoft.com/office/drawing/2014/main" id="{BD2035F7-0D48-4982-8AF8-19175030A865}"/>
-              </a:ext>
-            </a:extLst>
-          </p:cNvPr>
-          <p:cNvSpPr>
-            <a:spLocks xmlns:a="http://schemas.openxmlformats.org/drawingml/2006/main" noGrp="1"/>
-          </p:cNvSpPr>
-          <p:nvPr/>
-        </p:nvSpPr>
-        <p:spPr>
-          <a:xfrm xmlns:a="http://schemas.openxmlformats.org/drawingml/2006/main">
-            <a:off x="16440150" y="9486900"/>
-            <a:ext cx="457200" cy="339566"/>
-          </a:xfrm>
-          <a:prstGeom xmlns:a="http://schemas.openxmlformats.org/drawingml/2006/main" prst="rect">
-            <a:avLst/>
-          </a:prstGeom>
-          <a:noFill xmlns:a="http://schemas.openxmlformats.org/drawingml/2006/main"/>
-          <a:ln xmlns:a="http://schemas.openxmlformats.org/drawingml/2006/main" w="0">
-            <a:noFill/>
-          </a:ln>
-        </p:spPr>
-        <p:txBody>
-          <a:bodyPr xmlns:a="http://schemas.openxmlformats.org/drawingml/2006/main" wrap="none" lIns="0" tIns="0" rIns="0" bIns="0" anchor="t">
-            <a:noAutofit/>
-          </a:bodyPr>
-          <a:lstStyle xmlns:a="http://schemas.openxmlformats.org/drawingml/2006/main"/>
-          <a:p xmlns:a="http://schemas.openxmlformats.org/drawingml/2006/main">
-            <a:pPr algn="ctr">
-              <a:defRPr sz="1725" b="0">
-                <a:solidFill>
-                  <a:srgbClr val="586277"/>
-                </a:solidFill>
-                <a:latin typeface="Arial"/>
-                <a:ea typeface="Arial"/>
-                <a:cs typeface="Arial"/>
-              </a:defRPr>
-            </a:pPr>
-            <a:r>
-              <a:rPr sz="1725" b="0">
-                <a:solidFill>
-                  <a:srgbClr val="586277"/>
-                </a:solidFill>
-                <a:latin typeface="Arial"/>
-                <a:ea typeface="Arial"/>
-                <a:cs typeface="Arial"/>
-              </a:rPr>
-              <a:t>الذكاء</a:t>
-            </a:r>
-          </a:p>
-        </p:txBody>
-      </p:sp>
-      <p:sp>
-        <p:nvSpPr>
-          <p:cNvPr id="4" name="">
-            <a:extLst xmlns:a="http://schemas.openxmlformats.org/drawingml/2006/main">
-              <a:ext uri="{FF2B5EF4-FFF2-40B4-BE49-F238E27FC236}">
-                <a16:creationId xmlns:a16="http://schemas.microsoft.com/office/drawing/2014/main" id="{EE0DFD1A-C674-41ED-95EF-D71B47A37D20}"/>
-              </a:ext>
-            </a:extLst>
-          </p:cNvPr>
-          <p:cNvSpPr>
-            <a:spLocks xmlns:a="http://schemas.openxmlformats.org/drawingml/2006/main" noGrp="1"/>
-          </p:cNvSpPr>
-          <p:nvPr/>
-        </p:nvSpPr>
-        <p:spPr>
-          <a:xfrm xmlns:a="http://schemas.openxmlformats.org/drawingml/2006/main">
-            <a:off x="15468600" y="9486900"/>
-            <a:ext cx="885825" cy="339566"/>
-          </a:xfrm>
-          <a:prstGeom xmlns:a="http://schemas.openxmlformats.org/drawingml/2006/main" prst="rect">
-            <a:avLst/>
-          </a:prstGeom>
-          <a:noFill xmlns:a="http://schemas.openxmlformats.org/drawingml/2006/main"/>
-          <a:ln xmlns:a="http://schemas.openxmlformats.org/drawingml/2006/main" w="0">
-            <a:noFill/>
-          </a:ln>
-        </p:spPr>
-        <p:txBody>
-          <a:bodyPr xmlns:a="http://schemas.openxmlformats.org/drawingml/2006/main" wrap="none" lIns="0" tIns="0" rIns="0" bIns="0" anchor="t">
-            <a:noAutofit/>
-          </a:bodyPr>
-          <a:lstStyle xmlns:a="http://schemas.openxmlformats.org/drawingml/2006/main"/>
-          <a:p xmlns:a="http://schemas.openxmlformats.org/drawingml/2006/main">
-            <a:pPr algn="ctr">
-              <a:defRPr sz="1725" b="0">
-                <a:solidFill>
-                  <a:srgbClr val="586277"/>
-                </a:solidFill>
-                <a:latin typeface="Arial"/>
-                <a:ea typeface="Arial"/>
-                <a:cs typeface="Arial"/>
-              </a:defRPr>
-            </a:pPr>
-            <a:r>
-              <a:rPr sz="1725" b="0">
-                <a:solidFill>
-                  <a:srgbClr val="586277"/>
-                </a:solidFill>
-                <a:latin typeface="Arial"/>
-                <a:ea typeface="Arial"/>
-                <a:cs typeface="Arial"/>
-              </a:rPr>
-              <a:t>الاصطناعي</a:t>
-            </a:r>
-          </a:p>
-        </p:txBody>
-      </p:sp>
-      <p:sp>
-        <p:nvSpPr>
-          <p:cNvPr id="5" name="">
-            <a:extLst xmlns:a="http://schemas.openxmlformats.org/drawingml/2006/main">
-              <a:ext uri="{FF2B5EF4-FFF2-40B4-BE49-F238E27FC236}">
-                <a16:creationId xmlns:a16="http://schemas.microsoft.com/office/drawing/2014/main" id="{53C71D5F-0174-4AE6-A6B7-EDF28C2A1EF6}"/>
-              </a:ext>
-            </a:extLst>
-          </p:cNvPr>
-          <p:cNvSpPr>
-            <a:spLocks xmlns:a="http://schemas.openxmlformats.org/drawingml/2006/main" noGrp="1"/>
-          </p:cNvSpPr>
-          <p:nvPr/>
-        </p:nvSpPr>
-        <p:spPr>
-          <a:xfrm xmlns:a="http://schemas.openxmlformats.org/drawingml/2006/main">
-            <a:off x="15135225" y="9486900"/>
-            <a:ext cx="247650" cy="339566"/>
-          </a:xfrm>
-          <a:prstGeom xmlns:a="http://schemas.openxmlformats.org/drawingml/2006/main" prst="rect">
-            <a:avLst/>
-          </a:prstGeom>
-          <a:noFill xmlns:a="http://schemas.openxmlformats.org/drawingml/2006/main"/>
-          <a:ln xmlns:a="http://schemas.openxmlformats.org/drawingml/2006/main" w="0">
-            <a:noFill/>
-          </a:ln>
-        </p:spPr>
-        <p:txBody>
-          <a:bodyPr xmlns:a="http://schemas.openxmlformats.org/drawingml/2006/main" wrap="none" lIns="0" tIns="0" rIns="0" bIns="0" anchor="t">
-            <a:noAutofit/>
-          </a:bodyPr>
-          <a:lstStyle xmlns:a="http://schemas.openxmlformats.org/drawingml/2006/main"/>
-          <a:p xmlns:a="http://schemas.openxmlformats.org/drawingml/2006/main">
-            <a:pPr algn="ctr">
-              <a:defRPr sz="1725" b="0">
-                <a:solidFill>
-                  <a:srgbClr val="586277"/>
-                </a:solidFill>
-                <a:latin typeface="Arial"/>
-                <a:ea typeface="Arial"/>
-                <a:cs typeface="Arial"/>
-              </a:defRPr>
-            </a:pPr>
-            <a:r>
-              <a:rPr sz="1725" b="0">
-                <a:solidFill>
-                  <a:srgbClr val="586277"/>
-                </a:solidFill>
-                <a:latin typeface="Arial"/>
-                <a:ea typeface="Arial"/>
-                <a:cs typeface="Arial"/>
-              </a:rPr>
-              <a:t>في</a:t>
-            </a:r>
-          </a:p>
-        </p:txBody>
-      </p:sp>
-      <p:sp>
-        <p:nvSpPr>
-          <p:cNvPr id="6" name="">
-            <a:extLst xmlns:a="http://schemas.openxmlformats.org/drawingml/2006/main">
-              <a:ext uri="{FF2B5EF4-FFF2-40B4-BE49-F238E27FC236}">
-                <a16:creationId xmlns:a16="http://schemas.microsoft.com/office/drawing/2014/main" id="{D94E39D5-E559-493B-8A43-672DBA843A02}"/>
-              </a:ext>
-            </a:extLst>
-          </p:cNvPr>
-          <p:cNvSpPr>
-            <a:spLocks xmlns:a="http://schemas.openxmlformats.org/drawingml/2006/main" noGrp="1"/>
-          </p:cNvSpPr>
-          <p:nvPr/>
-        </p:nvSpPr>
-        <p:spPr>
-          <a:xfrm xmlns:a="http://schemas.openxmlformats.org/drawingml/2006/main">
-            <a:off x="14630400" y="9486900"/>
-            <a:ext cx="419100" cy="339566"/>
-          </a:xfrm>
-          <a:prstGeom xmlns:a="http://schemas.openxmlformats.org/drawingml/2006/main" prst="rect">
-            <a:avLst/>
-          </a:prstGeom>
-          <a:noFill xmlns:a="http://schemas.openxmlformats.org/drawingml/2006/main"/>
-          <a:ln xmlns:a="http://schemas.openxmlformats.org/drawingml/2006/main" w="0">
-            <a:noFill/>
-          </a:ln>
-        </p:spPr>
-        <p:txBody>
-          <a:bodyPr xmlns:a="http://schemas.openxmlformats.org/drawingml/2006/main" wrap="none" lIns="0" tIns="0" rIns="0" bIns="0" anchor="t">
-            <a:noAutofit/>
-          </a:bodyPr>
-          <a:lstStyle xmlns:a="http://schemas.openxmlformats.org/drawingml/2006/main"/>
-          <a:p xmlns:a="http://schemas.openxmlformats.org/drawingml/2006/main">
-            <a:pPr algn="ctr">
-              <a:defRPr sz="1725" b="0">
-                <a:solidFill>
-                  <a:srgbClr val="586277"/>
-                </a:solidFill>
-                <a:latin typeface="Arial"/>
-                <a:ea typeface="Arial"/>
-                <a:cs typeface="Arial"/>
-              </a:defRPr>
-            </a:pPr>
-            <a:r>
-              <a:rPr sz="1725" b="0">
-                <a:solidFill>
-                  <a:srgbClr val="586277"/>
-                </a:solidFill>
-                <a:latin typeface="Arial"/>
-                <a:ea typeface="Arial"/>
-                <a:cs typeface="Arial"/>
-              </a:rPr>
-              <a:t>خدمة</a:t>
-            </a:r>
-          </a:p>
-        </p:txBody>
-      </p:sp>
-      <p:sp>
-        <p:nvSpPr>
-          <p:cNvPr id="7" name="">
-            <a:extLst xmlns:a="http://schemas.openxmlformats.org/drawingml/2006/main">
-              <a:ext uri="{FF2B5EF4-FFF2-40B4-BE49-F238E27FC236}">
-                <a16:creationId xmlns:a16="http://schemas.microsoft.com/office/drawing/2014/main" id="{C0A17890-EEC0-47F5-83B8-9E7D30E601D5}"/>
-              </a:ext>
-            </a:extLst>
-          </p:cNvPr>
-          <p:cNvSpPr>
-            <a:spLocks xmlns:a="http://schemas.openxmlformats.org/drawingml/2006/main" noGrp="1"/>
-          </p:cNvSpPr>
-          <p:nvPr/>
-        </p:nvSpPr>
-        <p:spPr>
-          <a:xfrm xmlns:a="http://schemas.openxmlformats.org/drawingml/2006/main">
-            <a:off x="13839825" y="9486900"/>
-            <a:ext cx="704850" cy="339566"/>
-          </a:xfrm>
-          <a:prstGeom xmlns:a="http://schemas.openxmlformats.org/drawingml/2006/main" prst="rect">
-            <a:avLst/>
-          </a:prstGeom>
-          <a:noFill xmlns:a="http://schemas.openxmlformats.org/drawingml/2006/main"/>
-          <a:ln xmlns:a="http://schemas.openxmlformats.org/drawingml/2006/main" w="0">
-            <a:noFill/>
-          </a:ln>
-        </p:spPr>
-        <p:txBody>
-          <a:bodyPr xmlns:a="http://schemas.openxmlformats.org/drawingml/2006/main" wrap="none" lIns="0" tIns="0" rIns="0" bIns="0" anchor="t">
-            <a:noAutofit/>
-          </a:bodyPr>
-          <a:lstStyle xmlns:a="http://schemas.openxmlformats.org/drawingml/2006/main"/>
-          <a:p xmlns:a="http://schemas.openxmlformats.org/drawingml/2006/main">
-            <a:pPr algn="ctr">
-              <a:defRPr sz="1725" b="0">
-                <a:solidFill>
-                  <a:srgbClr val="586277"/>
-                </a:solidFill>
-                <a:latin typeface="Arial"/>
-                <a:ea typeface="Arial"/>
-                <a:cs typeface="Arial"/>
-              </a:defRPr>
-            </a:pPr>
-            <a:r>
-              <a:rPr sz="1725" b="0">
-                <a:solidFill>
-                  <a:srgbClr val="586277"/>
-                </a:solidFill>
-                <a:latin typeface="Arial"/>
-                <a:ea typeface="Arial"/>
-                <a:cs typeface="Arial"/>
-              </a:rPr>
-              <a:t>الدراسات</a:t>
-            </a:r>
-          </a:p>
-        </p:txBody>
-      </p:sp>
-      <p:sp>
-        <p:nvSpPr>
-          <p:cNvPr id="8" name="">
-            <a:extLst xmlns:a="http://schemas.openxmlformats.org/drawingml/2006/main">
-              <a:ext uri="{FF2B5EF4-FFF2-40B4-BE49-F238E27FC236}">
-                <a16:creationId xmlns:a16="http://schemas.microsoft.com/office/drawing/2014/main" id="{5AD1356C-3214-482A-900A-8D468B941E8F}"/>
-              </a:ext>
-            </a:extLst>
-          </p:cNvPr>
-          <p:cNvSpPr>
-            <a:spLocks xmlns:a="http://schemas.openxmlformats.org/drawingml/2006/main" noGrp="1"/>
-          </p:cNvSpPr>
-          <p:nvPr/>
-        </p:nvSpPr>
-        <p:spPr>
-          <a:xfrm xmlns:a="http://schemas.openxmlformats.org/drawingml/2006/main">
-            <a:off x="13058775" y="9486900"/>
-            <a:ext cx="695325" cy="339566"/>
-          </a:xfrm>
-          <a:prstGeom xmlns:a="http://schemas.openxmlformats.org/drawingml/2006/main" prst="rect">
-            <a:avLst/>
-          </a:prstGeom>
-          <a:noFill xmlns:a="http://schemas.openxmlformats.org/drawingml/2006/main"/>
-          <a:ln xmlns:a="http://schemas.openxmlformats.org/drawingml/2006/main" w="0">
-            <a:noFill/>
-          </a:ln>
-        </p:spPr>
-        <p:txBody>
-          <a:bodyPr xmlns:a="http://schemas.openxmlformats.org/drawingml/2006/main" wrap="none" lIns="0" tIns="0" rIns="0" bIns="0" anchor="t">
-            <a:noAutofit/>
-          </a:bodyPr>
-          <a:lstStyle xmlns:a="http://schemas.openxmlformats.org/drawingml/2006/main"/>
-          <a:p xmlns:a="http://schemas.openxmlformats.org/drawingml/2006/main">
-            <a:pPr algn="ctr">
-              <a:defRPr sz="1725" b="0">
-                <a:solidFill>
-                  <a:srgbClr val="586277"/>
-                </a:solidFill>
-                <a:latin typeface="Arial"/>
-                <a:ea typeface="Arial"/>
-                <a:cs typeface="Arial"/>
-              </a:defRPr>
-            </a:pPr>
-            <a:r>
-              <a:rPr sz="1725" b="0">
-                <a:solidFill>
-                  <a:srgbClr val="586277"/>
-                </a:solidFill>
-                <a:latin typeface="Arial"/>
-                <a:ea typeface="Arial"/>
-                <a:cs typeface="Arial"/>
-              </a:rPr>
-              <a:t>الإسلامية</a:t>
-            </a:r>
-          </a:p>
-        </p:txBody>
-      </p:sp>
-      <p:sp>
-        <p:nvSpPr>
-          <p:cNvPr id="9" name="">
-            <a:extLst xmlns:a="http://schemas.openxmlformats.org/drawingml/2006/main">
-              <a:ext uri="{FF2B5EF4-FFF2-40B4-BE49-F238E27FC236}">
-                <a16:creationId xmlns:a16="http://schemas.microsoft.com/office/drawing/2014/main" id="{5DF674C8-FC83-4FD1-81BF-C08187D2A324}"/>
-              </a:ext>
-            </a:extLst>
-          </p:cNvPr>
-          <p:cNvSpPr>
-            <a:spLocks xmlns:a="http://schemas.openxmlformats.org/drawingml/2006/main" noGrp="1"/>
-          </p:cNvSpPr>
-          <p:nvPr/>
-        </p:nvSpPr>
-        <p:spPr>
-          <a:xfrm xmlns:a="http://schemas.openxmlformats.org/drawingml/2006/main">
-            <a:off x="16163925" y="809625"/>
-            <a:ext cx="1171575" cy="1033463"/>
-          </a:xfrm>
-          <a:prstGeom xmlns:a="http://schemas.openxmlformats.org/drawingml/2006/main" prst="rect">
-            <a:avLst/>
-          </a:prstGeom>
-          <a:noFill xmlns:a="http://schemas.openxmlformats.org/drawingml/2006/main"/>
-          <a:ln xmlns:a="http://schemas.openxmlformats.org/drawingml/2006/main" w="0">
-            <a:noFill/>
-          </a:ln>
-        </p:spPr>
-        <p:txBody>
-          <a:bodyPr xmlns:a="http://schemas.openxmlformats.org/drawingml/2006/main" wrap="none" lIns="0" tIns="0" rIns="0" bIns="0" anchor="t">
-            <a:noAutofit/>
-          </a:bodyPr>
-          <a:lstStyle xmlns:a="http://schemas.openxmlformats.org/drawingml/2006/main"/>
-          <a:p xmlns:a="http://schemas.openxmlformats.org/drawingml/2006/main">
-            <a:pPr algn="ctr">
-              <a:defRPr sz="5250" b="1">
-                <a:solidFill>
-                  <a:srgbClr val="12183F"/>
-                </a:solidFill>
-                <a:latin typeface="Arial"/>
-                <a:ea typeface="Arial"/>
-                <a:cs typeface="Arial"/>
-              </a:defRPr>
-            </a:pPr>
-            <a:r>
-              <a:rPr sz="5250" b="1">
-                <a:solidFill>
-                  <a:srgbClr val="12183F"/>
-                </a:solidFill>
-                <a:latin typeface="Arial"/>
-                <a:ea typeface="Arial"/>
-                <a:cs typeface="Arial"/>
-              </a:rPr>
-              <a:t>425</a:t>
-            </a:r>
-          </a:p>
-        </p:txBody>
-      </p:sp>
-      <p:sp>
-        <p:nvSpPr>
-          <p:cNvPr id="10" name="">
-            <a:extLst xmlns:a="http://schemas.openxmlformats.org/drawingml/2006/main">
-              <a:ext uri="{FF2B5EF4-FFF2-40B4-BE49-F238E27FC236}">
-                <a16:creationId xmlns:a16="http://schemas.microsoft.com/office/drawing/2014/main" id="{7E8C5967-4E10-4EE7-BCFB-63CDF54BCB96}"/>
-              </a:ext>
-            </a:extLst>
-          </p:cNvPr>
-          <p:cNvSpPr>
-            <a:spLocks xmlns:a="http://schemas.openxmlformats.org/drawingml/2006/main" noGrp="1"/>
-          </p:cNvSpPr>
-          <p:nvPr/>
-        </p:nvSpPr>
-        <p:spPr>
-          <a:xfrm xmlns:a="http://schemas.openxmlformats.org/drawingml/2006/main">
-            <a:off x="14740414" y="809625"/>
-            <a:ext cx="1238250" cy="1033463"/>
-          </a:xfrm>
-          <a:prstGeom xmlns:a="http://schemas.openxmlformats.org/drawingml/2006/main" prst="rect">
-            <a:avLst/>
-          </a:prstGeom>
-          <a:noFill xmlns:a="http://schemas.openxmlformats.org/drawingml/2006/main"/>
-          <a:ln xmlns:a="http://schemas.openxmlformats.org/drawingml/2006/main" w="0">
-            <a:noFill/>
-          </a:ln>
-        </p:spPr>
-        <p:txBody>
-          <a:bodyPr xmlns:a="http://schemas.openxmlformats.org/drawingml/2006/main" wrap="none" lIns="0" tIns="0" rIns="0" bIns="0" anchor="t">
-            <a:noAutofit/>
-          </a:bodyPr>
-          <a:lstStyle xmlns:a="http://schemas.openxmlformats.org/drawingml/2006/main"/>
-          <a:p xmlns:a="http://schemas.openxmlformats.org/drawingml/2006/main">
-            <a:pPr algn="ctr">
-              <a:defRPr sz="5250" b="1">
-                <a:solidFill>
-                  <a:srgbClr val="12183F"/>
-                </a:solidFill>
-                <a:latin typeface="Arial"/>
-                <a:ea typeface="Arial"/>
-                <a:cs typeface="Arial"/>
-              </a:defRPr>
-            </a:pPr>
-            <a:r>
-              <a:rPr sz="5250" b="1">
-                <a:solidFill>
-                  <a:srgbClr val="12183F"/>
-                </a:solidFill>
-                <a:latin typeface="Arial"/>
-                <a:ea typeface="Arial"/>
-                <a:cs typeface="Arial"/>
-              </a:rPr>
-              <a:t>سؤالاً</a:t>
-            </a:r>
-          </a:p>
-        </p:txBody>
-      </p:sp>
-      <p:sp>
-        <p:nvSpPr>
-          <p:cNvPr id="11" name="">
-            <a:extLst xmlns:a="http://schemas.openxmlformats.org/drawingml/2006/main">
-              <a:ext uri="{FF2B5EF4-FFF2-40B4-BE49-F238E27FC236}">
-                <a16:creationId xmlns:a16="http://schemas.microsoft.com/office/drawing/2014/main" id="{97F2714A-6D33-4C27-9481-76B0FB517BB9}"/>
-              </a:ext>
-            </a:extLst>
-          </p:cNvPr>
-          <p:cNvSpPr>
-            <a:spLocks xmlns:a="http://schemas.openxmlformats.org/drawingml/2006/main" noGrp="1"/>
-          </p:cNvSpPr>
-          <p:nvPr/>
-        </p:nvSpPr>
-        <p:spPr>
-          <a:xfrm xmlns:a="http://schemas.openxmlformats.org/drawingml/2006/main">
-            <a:off x="13802677" y="809625"/>
-            <a:ext cx="752475" cy="1033463"/>
-          </a:xfrm>
-          <a:prstGeom xmlns:a="http://schemas.openxmlformats.org/drawingml/2006/main" prst="rect">
-            <a:avLst/>
-          </a:prstGeom>
-          <a:noFill xmlns:a="http://schemas.openxmlformats.org/drawingml/2006/main"/>
-          <a:ln xmlns:a="http://schemas.openxmlformats.org/drawingml/2006/main" w="0">
-            <a:noFill/>
-          </a:ln>
-        </p:spPr>
-        <p:txBody>
-          <a:bodyPr xmlns:a="http://schemas.openxmlformats.org/drawingml/2006/main" wrap="none" lIns="0" tIns="0" rIns="0" bIns="0" anchor="t">
-            <a:noAutofit/>
-          </a:bodyPr>
-          <a:lstStyle xmlns:a="http://schemas.openxmlformats.org/drawingml/2006/main"/>
-          <a:p xmlns:a="http://schemas.openxmlformats.org/drawingml/2006/main">
-            <a:pPr algn="ctr">
-              <a:defRPr sz="5250" b="1">
-                <a:solidFill>
-                  <a:srgbClr val="12183F"/>
-                </a:solidFill>
-                <a:latin typeface="Arial"/>
-                <a:ea typeface="Arial"/>
-                <a:cs typeface="Arial"/>
-              </a:defRPr>
-            </a:pPr>
-            <a:r>
-              <a:rPr sz="5250" b="1">
-                <a:solidFill>
-                  <a:srgbClr val="12183F"/>
-                </a:solidFill>
-                <a:latin typeface="Arial"/>
-                <a:ea typeface="Arial"/>
-                <a:cs typeface="Arial"/>
-              </a:rPr>
-              <a:t>حياً</a:t>
-            </a:r>
-          </a:p>
-        </p:txBody>
-      </p:sp>
-      <p:sp>
-        <p:nvSpPr>
-          <p:cNvPr id="12" name="">
-            <a:extLst xmlns:a="http://schemas.openxmlformats.org/drawingml/2006/main">
-              <a:ext uri="{FF2B5EF4-FFF2-40B4-BE49-F238E27FC236}">
-                <a16:creationId xmlns:a16="http://schemas.microsoft.com/office/drawing/2014/main" id="{666928A9-D1B2-4C5C-B5D5-C0210C006017}"/>
-              </a:ext>
-            </a:extLst>
-          </p:cNvPr>
-          <p:cNvSpPr>
-            <a:spLocks xmlns:a="http://schemas.openxmlformats.org/drawingml/2006/main" noGrp="1"/>
-          </p:cNvSpPr>
-          <p:nvPr/>
-        </p:nvSpPr>
-        <p:spPr>
-          <a:xfrm xmlns:a="http://schemas.openxmlformats.org/drawingml/2006/main">
-            <a:off x="12512516" y="809625"/>
-            <a:ext cx="1104900" cy="1033463"/>
-          </a:xfrm>
-          <a:prstGeom xmlns:a="http://schemas.openxmlformats.org/drawingml/2006/main" prst="rect">
-            <a:avLst/>
-          </a:prstGeom>
-          <a:noFill xmlns:a="http://schemas.openxmlformats.org/drawingml/2006/main"/>
-          <a:ln xmlns:a="http://schemas.openxmlformats.org/drawingml/2006/main" w="0">
-            <a:noFill/>
-          </a:ln>
-        </p:spPr>
-        <p:txBody>
-          <a:bodyPr xmlns:a="http://schemas.openxmlformats.org/drawingml/2006/main" wrap="none" lIns="0" tIns="0" rIns="0" bIns="0" anchor="t">
-            <a:noAutofit/>
-          </a:bodyPr>
-          <a:lstStyle xmlns:a="http://schemas.openxmlformats.org/drawingml/2006/main"/>
-          <a:p xmlns:a="http://schemas.openxmlformats.org/drawingml/2006/main">
-            <a:pPr algn="ctr">
-              <a:defRPr sz="5250" b="1">
-                <a:solidFill>
-                  <a:srgbClr val="12183F"/>
-                </a:solidFill>
-                <a:latin typeface="Arial"/>
-                <a:ea typeface="Arial"/>
-                <a:cs typeface="Arial"/>
-              </a:defRPr>
-            </a:pPr>
-            <a:r>
-              <a:rPr sz="5250" b="1">
-                <a:solidFill>
-                  <a:srgbClr val="12183F"/>
-                </a:solidFill>
-                <a:latin typeface="Arial"/>
-                <a:ea typeface="Arial"/>
-                <a:cs typeface="Arial"/>
-              </a:rPr>
-              <a:t>وراء</a:t>
-            </a:r>
-          </a:p>
-        </p:txBody>
-      </p:sp>
-      <p:sp>
-        <p:nvSpPr>
-          <p:cNvPr id="13" name="">
-            <a:extLst xmlns:a="http://schemas.openxmlformats.org/drawingml/2006/main">
-              <a:ext uri="{FF2B5EF4-FFF2-40B4-BE49-F238E27FC236}">
-                <a16:creationId xmlns:a16="http://schemas.microsoft.com/office/drawing/2014/main" id="{6407CA00-7DD3-4CBC-B6E7-602DC15BDC6A}"/>
-              </a:ext>
-            </a:extLst>
-          </p:cNvPr>
-          <p:cNvSpPr>
-            <a:spLocks xmlns:a="http://schemas.openxmlformats.org/drawingml/2006/main" noGrp="1"/>
-          </p:cNvSpPr>
-          <p:nvPr/>
-        </p:nvSpPr>
-        <p:spPr>
-          <a:xfrm xmlns:a="http://schemas.openxmlformats.org/drawingml/2006/main">
-            <a:off x="11193780" y="809625"/>
-            <a:ext cx="1133475" cy="1033463"/>
-          </a:xfrm>
-          <a:prstGeom xmlns:a="http://schemas.openxmlformats.org/drawingml/2006/main" prst="rect">
-            <a:avLst/>
-          </a:prstGeom>
-          <a:noFill xmlns:a="http://schemas.openxmlformats.org/drawingml/2006/main"/>
-          <a:ln xmlns:a="http://schemas.openxmlformats.org/drawingml/2006/main" w="0">
-            <a:noFill/>
-          </a:ln>
-        </p:spPr>
-        <p:txBody>
-          <a:bodyPr xmlns:a="http://schemas.openxmlformats.org/drawingml/2006/main" wrap="none" lIns="0" tIns="0" rIns="0" bIns="0" anchor="t">
-            <a:noAutofit/>
-          </a:bodyPr>
-          <a:lstStyle xmlns:a="http://schemas.openxmlformats.org/drawingml/2006/main"/>
-          <a:p xmlns:a="http://schemas.openxmlformats.org/drawingml/2006/main">
-            <a:pPr algn="ctr">
-              <a:defRPr sz="5250" b="1">
-                <a:solidFill>
-                  <a:srgbClr val="12183F"/>
-                </a:solidFill>
-                <a:latin typeface="Arial"/>
-                <a:ea typeface="Arial"/>
-                <a:cs typeface="Arial"/>
-              </a:defRPr>
-            </a:pPr>
-            <a:r>
-              <a:rPr sz="5250" b="1">
-                <a:solidFill>
-                  <a:srgbClr val="12183F"/>
-                </a:solidFill>
-                <a:latin typeface="Arial"/>
-                <a:ea typeface="Arial"/>
-                <a:cs typeface="Arial"/>
-              </a:rPr>
-              <a:t>رحلة</a:t>
-            </a:r>
-          </a:p>
-        </p:txBody>
-      </p:sp>
-      <p:sp>
-        <p:nvSpPr>
-          <p:cNvPr id="14" name="">
-            <a:extLst xmlns:a="http://schemas.openxmlformats.org/drawingml/2006/main">
-              <a:ext uri="{FF2B5EF4-FFF2-40B4-BE49-F238E27FC236}">
-                <a16:creationId xmlns:a16="http://schemas.microsoft.com/office/drawing/2014/main" id="{85B9B14B-B75A-4FDC-9102-54AD95A9DEA5}"/>
-              </a:ext>
-            </a:extLst>
-          </p:cNvPr>
-          <p:cNvSpPr>
-            <a:spLocks xmlns:a="http://schemas.openxmlformats.org/drawingml/2006/main" noGrp="1"/>
-          </p:cNvSpPr>
-          <p:nvPr/>
-        </p:nvSpPr>
-        <p:spPr>
-          <a:xfrm xmlns:a="http://schemas.openxmlformats.org/drawingml/2006/main">
-            <a:off x="9341644" y="809625"/>
-            <a:ext cx="1666875" cy="1033463"/>
-          </a:xfrm>
-          <a:prstGeom xmlns:a="http://schemas.openxmlformats.org/drawingml/2006/main" prst="rect">
-            <a:avLst/>
-          </a:prstGeom>
-          <a:noFill xmlns:a="http://schemas.openxmlformats.org/drawingml/2006/main"/>
-          <a:ln xmlns:a="http://schemas.openxmlformats.org/drawingml/2006/main" w="0">
-            <a:noFill/>
-          </a:ln>
-        </p:spPr>
-        <p:txBody>
-          <a:bodyPr xmlns:a="http://schemas.openxmlformats.org/drawingml/2006/main" wrap="none" lIns="0" tIns="0" rIns="0" bIns="0" anchor="t">
-            <a:noAutofit/>
-          </a:bodyPr>
-          <a:lstStyle xmlns:a="http://schemas.openxmlformats.org/drawingml/2006/main"/>
-          <a:p xmlns:a="http://schemas.openxmlformats.org/drawingml/2006/main">
-            <a:pPr algn="ctr">
-              <a:defRPr sz="5250" b="1">
-                <a:solidFill>
-                  <a:srgbClr val="12183F"/>
-                </a:solidFill>
-                <a:latin typeface="Arial"/>
-                <a:ea typeface="Arial"/>
-                <a:cs typeface="Arial"/>
-              </a:defRPr>
-            </a:pPr>
-            <a:r>
-              <a:rPr sz="5250" b="1">
-                <a:solidFill>
-                  <a:srgbClr val="12183F"/>
-                </a:solidFill>
-                <a:latin typeface="Arial"/>
-                <a:ea typeface="Arial"/>
-                <a:cs typeface="Arial"/>
-              </a:rPr>
-              <a:t>التطوير</a:t>
-            </a:r>
-          </a:p>
-        </p:txBody>
-      </p:sp>
-      <p:sp>
-        <p:nvSpPr>
-          <p:cNvPr id="15" name="">
-            <a:extLst xmlns:a="http://schemas.openxmlformats.org/drawingml/2006/main">
-              <a:ext uri="{FF2B5EF4-FFF2-40B4-BE49-F238E27FC236}">
-                <a16:creationId xmlns:a16="http://schemas.microsoft.com/office/drawing/2014/main" id="{C5779760-2753-4656-A3B1-1D001A24B5F3}"/>
-              </a:ext>
-            </a:extLst>
-          </p:cNvPr>
-          <p:cNvSpPr>
-            <a:spLocks xmlns:a="http://schemas.openxmlformats.org/drawingml/2006/main" noGrp="1"/>
-          </p:cNvSpPr>
-          <p:nvPr/>
-        </p:nvSpPr>
-        <p:spPr>
-          <a:xfrm xmlns:a="http://schemas.openxmlformats.org/drawingml/2006/main">
-            <a:off x="952500" y="2619375"/>
-            <a:ext cx="7239000" cy="2238375"/>
-          </a:xfrm>
-          <a:prstGeom xmlns:a="http://schemas.openxmlformats.org/drawingml/2006/main" prst="rect">
-            <a:avLst/>
-          </a:prstGeom>
-          <a:noFill xmlns:a="http://schemas.openxmlformats.org/drawingml/2006/main"/>
-          <a:ln xmlns:a="http://schemas.openxmlformats.org/drawingml/2006/main" w="0">
-            <a:noFill/>
-          </a:ln>
-        </p:spPr>
-        <p:txBody>
-          <a:bodyPr xmlns:a="http://schemas.openxmlformats.org/drawingml/2006/main" wrap="none" lIns="0" tIns="0" rIns="0" bIns="0" anchor="t">
-            <a:noAutofit/>
-          </a:bodyPr>
-          <a:lstStyle xmlns:a="http://schemas.openxmlformats.org/drawingml/2006/main"/>
-          <a:p xmlns:a="http://schemas.openxmlformats.org/drawingml/2006/main">
-            <a:pPr algn="l">
-              <a:defRPr sz="15375" b="1">
-                <a:solidFill>
-                  <a:srgbClr val="6150EA"/>
-                </a:solidFill>
-                <a:latin typeface="Arial"/>
-                <a:ea typeface="Arial"/>
-                <a:cs typeface="Arial"/>
-              </a:defRPr>
-            </a:pPr>
-            <a:r>
-              <a:rPr sz="15375" b="1">
-                <a:solidFill>
-                  <a:srgbClr val="6150EA"/>
-                </a:solidFill>
-                <a:latin typeface="Arial"/>
-                <a:ea typeface="Arial"/>
-                <a:cs typeface="Arial"/>
-              </a:rPr>
-              <a:t>425</a:t>
-            </a:r>
-          </a:p>
-        </p:txBody>
-      </p:sp>
-      <p:sp>
-        <p:nvSpPr>
-          <p:cNvPr id="16" name="">
-            <a:extLst xmlns:a="http://schemas.openxmlformats.org/drawingml/2006/main">
-              <a:ext uri="{FF2B5EF4-FFF2-40B4-BE49-F238E27FC236}">
-                <a16:creationId xmlns:a16="http://schemas.microsoft.com/office/drawing/2014/main" id="{97816C8E-2ED5-4045-8222-804C59A91959}"/>
-              </a:ext>
-            </a:extLst>
-          </p:cNvPr>
-          <p:cNvSpPr>
-            <a:spLocks xmlns:a="http://schemas.openxmlformats.org/drawingml/2006/main" noGrp="1"/>
-          </p:cNvSpPr>
-          <p:nvPr/>
-        </p:nvSpPr>
-        <p:spPr>
-          <a:xfrm xmlns:a="http://schemas.openxmlformats.org/drawingml/2006/main">
-            <a:off x="15916275" y="3095625"/>
-            <a:ext cx="942975" cy="1018699"/>
-          </a:xfrm>
-          <a:prstGeom xmlns:a="http://schemas.openxmlformats.org/drawingml/2006/main" prst="rect">
-            <a:avLst/>
-          </a:prstGeom>
-          <a:noFill xmlns:a="http://schemas.openxmlformats.org/drawingml/2006/main"/>
-          <a:ln xmlns:a="http://schemas.openxmlformats.org/drawingml/2006/main" w="0">
-            <a:noFill/>
-          </a:ln>
-        </p:spPr>
-        <p:txBody>
-          <a:bodyPr xmlns:a="http://schemas.openxmlformats.org/drawingml/2006/main" wrap="none" lIns="0" tIns="0" rIns="0" bIns="0" anchor="t">
-            <a:noAutofit/>
-          </a:bodyPr>
-          <a:lstStyle xmlns:a="http://schemas.openxmlformats.org/drawingml/2006/main"/>
-          <a:p xmlns:a="http://schemas.openxmlformats.org/drawingml/2006/main">
-            <a:pPr algn="ctr">
-              <a:defRPr sz="5175" b="1">
-                <a:solidFill>
-                  <a:srgbClr val="12183F"/>
-                </a:solidFill>
-                <a:latin typeface="Arial"/>
-                <a:ea typeface="Arial"/>
-                <a:cs typeface="Arial"/>
-              </a:defRPr>
-            </a:pPr>
-            <a:r>
-              <a:rPr sz="5175" b="1">
-                <a:solidFill>
-                  <a:srgbClr val="12183F"/>
-                </a:solidFill>
-                <a:latin typeface="Arial"/>
-                <a:ea typeface="Arial"/>
-                <a:cs typeface="Arial"/>
-              </a:rPr>
-              <a:t>نص</a:t>
-            </a:r>
-          </a:p>
-        </p:txBody>
-      </p:sp>
-      <p:sp>
-        <p:nvSpPr>
-          <p:cNvPr id="17" name="">
-            <a:extLst xmlns:a="http://schemas.openxmlformats.org/drawingml/2006/main">
-              <a:ext uri="{FF2B5EF4-FFF2-40B4-BE49-F238E27FC236}">
-                <a16:creationId xmlns:a16="http://schemas.microsoft.com/office/drawing/2014/main" id="{4422476B-EAFA-4E86-A9A8-66B9A7774183}"/>
-              </a:ext>
-            </a:extLst>
-          </p:cNvPr>
-          <p:cNvSpPr>
-            <a:spLocks xmlns:a="http://schemas.openxmlformats.org/drawingml/2006/main" noGrp="1"/>
-          </p:cNvSpPr>
-          <p:nvPr/>
-        </p:nvSpPr>
-        <p:spPr>
-          <a:xfrm xmlns:a="http://schemas.openxmlformats.org/drawingml/2006/main">
-            <a:off x="14533531" y="3095625"/>
-            <a:ext cx="1200150" cy="1018699"/>
-          </a:xfrm>
-          <a:prstGeom xmlns:a="http://schemas.openxmlformats.org/drawingml/2006/main" prst="rect">
-            <a:avLst/>
-          </a:prstGeom>
-          <a:noFill xmlns:a="http://schemas.openxmlformats.org/drawingml/2006/main"/>
-          <a:ln xmlns:a="http://schemas.openxmlformats.org/drawingml/2006/main" w="0">
-            <a:noFill/>
-          </a:ln>
-        </p:spPr>
-        <p:txBody>
-          <a:bodyPr xmlns:a="http://schemas.openxmlformats.org/drawingml/2006/main" wrap="none" lIns="0" tIns="0" rIns="0" bIns="0" anchor="t">
-            <a:noAutofit/>
-          </a:bodyPr>
-          <a:lstStyle xmlns:a="http://schemas.openxmlformats.org/drawingml/2006/main"/>
-          <a:p xmlns:a="http://schemas.openxmlformats.org/drawingml/2006/main">
-            <a:pPr algn="ctr">
-              <a:defRPr sz="5175" b="1">
-                <a:solidFill>
-                  <a:srgbClr val="12183F"/>
-                </a:solidFill>
-                <a:latin typeface="Arial"/>
-                <a:ea typeface="Arial"/>
-                <a:cs typeface="Arial"/>
-              </a:defRPr>
-            </a:pPr>
-            <a:r>
-              <a:rPr sz="5175" b="1">
-                <a:solidFill>
-                  <a:srgbClr val="12183F"/>
-                </a:solidFill>
-                <a:latin typeface="Arial"/>
-                <a:ea typeface="Arial"/>
-                <a:cs typeface="Arial"/>
-              </a:rPr>
-              <a:t>سؤال</a:t>
-            </a:r>
-          </a:p>
-        </p:txBody>
-      </p:sp>
-      <p:sp>
-        <p:nvSpPr>
-          <p:cNvPr id="18" name="">
-            <a:extLst xmlns:a="http://schemas.openxmlformats.org/drawingml/2006/main">
-              <a:ext uri="{FF2B5EF4-FFF2-40B4-BE49-F238E27FC236}">
-                <a16:creationId xmlns:a16="http://schemas.microsoft.com/office/drawing/2014/main" id="{2D31A7A0-33B9-4718-8CAC-D863C5B616E2}"/>
-              </a:ext>
-            </a:extLst>
-          </p:cNvPr>
-          <p:cNvSpPr>
-            <a:spLocks xmlns:a="http://schemas.openxmlformats.org/drawingml/2006/main" noGrp="1"/>
-          </p:cNvSpPr>
-          <p:nvPr/>
-        </p:nvSpPr>
-        <p:spPr>
-          <a:xfrm xmlns:a="http://schemas.openxmlformats.org/drawingml/2006/main">
-            <a:off x="12845986" y="3095625"/>
-            <a:ext cx="1504950" cy="1018699"/>
-          </a:xfrm>
-          <a:prstGeom xmlns:a="http://schemas.openxmlformats.org/drawingml/2006/main" prst="rect">
-            <a:avLst/>
-          </a:prstGeom>
-          <a:noFill xmlns:a="http://schemas.openxmlformats.org/drawingml/2006/main"/>
-          <a:ln xmlns:a="http://schemas.openxmlformats.org/drawingml/2006/main" w="0">
-            <a:noFill/>
-          </a:ln>
-        </p:spPr>
-        <p:txBody>
-          <a:bodyPr xmlns:a="http://schemas.openxmlformats.org/drawingml/2006/main" wrap="none" lIns="0" tIns="0" rIns="0" bIns="0" anchor="t">
-            <a:noAutofit/>
-          </a:bodyPr>
-          <a:lstStyle xmlns:a="http://schemas.openxmlformats.org/drawingml/2006/main"/>
-          <a:p xmlns:a="http://schemas.openxmlformats.org/drawingml/2006/main">
-            <a:pPr algn="ctr">
-              <a:defRPr sz="5175" b="1">
-                <a:solidFill>
-                  <a:srgbClr val="12183F"/>
-                </a:solidFill>
-                <a:latin typeface="Arial"/>
-                <a:ea typeface="Arial"/>
-                <a:cs typeface="Arial"/>
-              </a:defRPr>
-            </a:pPr>
-            <a:r>
-              <a:rPr sz="5175" b="1">
-                <a:solidFill>
-                  <a:srgbClr val="12183F"/>
-                </a:solidFill>
-                <a:latin typeface="Arial"/>
-                <a:ea typeface="Arial"/>
-                <a:cs typeface="Arial"/>
-              </a:rPr>
-              <a:t>مختلف</a:t>
-            </a:r>
-          </a:p>
-        </p:txBody>
-      </p:sp>
-      <p:sp>
-        <p:nvSpPr>
-          <p:cNvPr id="19" name="">
-            <a:extLst xmlns:a="http://schemas.openxmlformats.org/drawingml/2006/main">
-              <a:ext uri="{FF2B5EF4-FFF2-40B4-BE49-F238E27FC236}">
-                <a16:creationId xmlns:a16="http://schemas.microsoft.com/office/drawing/2014/main" id="{453539BF-49C0-492F-B987-9CE222DF4263}"/>
-              </a:ext>
-            </a:extLst>
-          </p:cNvPr>
-          <p:cNvSpPr>
-            <a:spLocks xmlns:a="http://schemas.openxmlformats.org/drawingml/2006/main" noGrp="1"/>
-          </p:cNvSpPr>
-          <p:nvPr/>
-        </p:nvSpPr>
-        <p:spPr>
-          <a:xfrm xmlns:a="http://schemas.openxmlformats.org/drawingml/2006/main">
-            <a:off x="16411575" y="4333875"/>
-            <a:ext cx="447675" cy="693896"/>
-          </a:xfrm>
-          <a:prstGeom xmlns:a="http://schemas.openxmlformats.org/drawingml/2006/main" prst="rect">
-            <a:avLst/>
-          </a:prstGeom>
-          <a:noFill xmlns:a="http://schemas.openxmlformats.org/drawingml/2006/main"/>
-          <a:ln xmlns:a="http://schemas.openxmlformats.org/drawingml/2006/main" w="0">
-            <a:noFill/>
-          </a:ln>
-        </p:spPr>
-        <p:txBody>
-          <a:bodyPr xmlns:a="http://schemas.openxmlformats.org/drawingml/2006/main" wrap="none" lIns="0" tIns="0" rIns="0" bIns="0" anchor="t">
-            <a:noAutofit/>
-          </a:bodyPr>
-          <a:lstStyle xmlns:a="http://schemas.openxmlformats.org/drawingml/2006/main"/>
-          <a:p xmlns:a="http://schemas.openxmlformats.org/drawingml/2006/main">
-            <a:pPr algn="ctr">
-              <a:defRPr sz="3525" b="0">
-                <a:solidFill>
-                  <a:srgbClr val="12183F"/>
-                </a:solidFill>
-                <a:latin typeface="Arial"/>
-                <a:ea typeface="Arial"/>
-                <a:cs typeface="Arial"/>
-              </a:defRPr>
-            </a:pPr>
-            <a:r>
-              <a:rPr sz="3525" b="0">
-                <a:solidFill>
-                  <a:srgbClr val="12183F"/>
-                </a:solidFill>
-                <a:latin typeface="Arial"/>
-                <a:ea typeface="Arial"/>
-                <a:cs typeface="Arial"/>
-              </a:rPr>
-              <a:t>في</a:t>
-            </a:r>
-          </a:p>
-        </p:txBody>
-      </p:sp>
-      <p:sp>
-        <p:nvSpPr>
-          <p:cNvPr id="20" name="">
-            <a:extLst xmlns:a="http://schemas.openxmlformats.org/drawingml/2006/main">
-              <a:ext uri="{FF2B5EF4-FFF2-40B4-BE49-F238E27FC236}">
-                <a16:creationId xmlns:a16="http://schemas.microsoft.com/office/drawing/2014/main" id="{99846D8A-C51D-4B20-8C9E-3F84B27A8B66}"/>
-              </a:ext>
-            </a:extLst>
-          </p:cNvPr>
-          <p:cNvSpPr>
-            <a:spLocks xmlns:a="http://schemas.openxmlformats.org/drawingml/2006/main" noGrp="1"/>
-          </p:cNvSpPr>
-          <p:nvPr/>
-        </p:nvSpPr>
-        <p:spPr>
-          <a:xfrm xmlns:a="http://schemas.openxmlformats.org/drawingml/2006/main">
-            <a:off x="15725203" y="4333875"/>
-            <a:ext cx="561975" cy="693896"/>
-          </a:xfrm>
-          <a:prstGeom xmlns:a="http://schemas.openxmlformats.org/drawingml/2006/main" prst="rect">
-            <a:avLst/>
-          </a:prstGeom>
-          <a:noFill xmlns:a="http://schemas.openxmlformats.org/drawingml/2006/main"/>
-          <a:ln xmlns:a="http://schemas.openxmlformats.org/drawingml/2006/main" w="0">
-            <a:noFill/>
-          </a:ln>
-        </p:spPr>
-        <p:txBody>
-          <a:bodyPr xmlns:a="http://schemas.openxmlformats.org/drawingml/2006/main" wrap="none" lIns="0" tIns="0" rIns="0" bIns="0" anchor="t">
-            <a:noAutofit/>
-          </a:bodyPr>
-          <a:lstStyle xmlns:a="http://schemas.openxmlformats.org/drawingml/2006/main"/>
-          <a:p xmlns:a="http://schemas.openxmlformats.org/drawingml/2006/main">
-            <a:pPr algn="ctr">
-              <a:defRPr sz="3525" b="0">
-                <a:solidFill>
-                  <a:srgbClr val="12183F"/>
-                </a:solidFill>
-                <a:latin typeface="Arial"/>
-                <a:ea typeface="Arial"/>
-                <a:cs typeface="Arial"/>
-              </a:defRPr>
-            </a:pPr>
-            <a:r>
-              <a:rPr sz="3525" b="0">
-                <a:solidFill>
-                  <a:srgbClr val="12183F"/>
-                </a:solidFill>
-                <a:latin typeface="Arial"/>
-                <a:ea typeface="Arial"/>
-                <a:cs typeface="Arial"/>
-              </a:rPr>
-              <a:t>12</a:t>
-            </a:r>
-          </a:p>
-        </p:txBody>
-      </p:sp>
-      <p:sp>
-        <p:nvSpPr>
-          <p:cNvPr id="21" name="">
-            <a:extLst xmlns:a="http://schemas.openxmlformats.org/drawingml/2006/main">
-              <a:ext uri="{FF2B5EF4-FFF2-40B4-BE49-F238E27FC236}">
-                <a16:creationId xmlns:a16="http://schemas.microsoft.com/office/drawing/2014/main" id="{E82A7E24-0C04-4F20-82A4-DBBC6119C2F5}"/>
-              </a:ext>
-            </a:extLst>
-          </p:cNvPr>
-          <p:cNvSpPr>
-            <a:spLocks xmlns:a="http://schemas.openxmlformats.org/drawingml/2006/main" noGrp="1"/>
-          </p:cNvSpPr>
-          <p:nvPr/>
-        </p:nvSpPr>
-        <p:spPr>
-          <a:xfrm xmlns:a="http://schemas.openxmlformats.org/drawingml/2006/main">
-            <a:off x="14353032" y="4333875"/>
-            <a:ext cx="1247775" cy="693896"/>
-          </a:xfrm>
-          <a:prstGeom xmlns:a="http://schemas.openxmlformats.org/drawingml/2006/main" prst="rect">
-            <a:avLst/>
-          </a:prstGeom>
-          <a:noFill xmlns:a="http://schemas.openxmlformats.org/drawingml/2006/main"/>
-          <a:ln xmlns:a="http://schemas.openxmlformats.org/drawingml/2006/main" w="0">
-            <a:noFill/>
-          </a:ln>
-        </p:spPr>
-        <p:txBody>
-          <a:bodyPr xmlns:a="http://schemas.openxmlformats.org/drawingml/2006/main" wrap="none" lIns="0" tIns="0" rIns="0" bIns="0" anchor="t">
-            <a:noAutofit/>
-          </a:bodyPr>
-          <a:lstStyle xmlns:a="http://schemas.openxmlformats.org/drawingml/2006/main"/>
-          <a:p xmlns:a="http://schemas.openxmlformats.org/drawingml/2006/main">
-            <a:pPr algn="ctr">
-              <a:defRPr sz="3525" b="0">
-                <a:solidFill>
-                  <a:srgbClr val="12183F"/>
-                </a:solidFill>
-                <a:latin typeface="Arial"/>
-                <a:ea typeface="Arial"/>
-                <a:cs typeface="Arial"/>
-              </a:defRPr>
-            </a:pPr>
-            <a:r>
-              <a:rPr sz="3525" b="0">
-                <a:solidFill>
-                  <a:srgbClr val="12183F"/>
-                </a:solidFill>
-                <a:latin typeface="Arial"/>
-                <a:ea typeface="Arial"/>
-                <a:cs typeface="Arial"/>
-              </a:rPr>
-              <a:t>مجموعة</a:t>
-            </a:r>
-          </a:p>
-        </p:txBody>
-      </p:sp>
-      <p:sp>
-        <p:nvSpPr>
-          <p:cNvPr id="22" name="">
-            <a:extLst xmlns:a="http://schemas.openxmlformats.org/drawingml/2006/main">
-              <a:ext uri="{FF2B5EF4-FFF2-40B4-BE49-F238E27FC236}">
-                <a16:creationId xmlns:a16="http://schemas.microsoft.com/office/drawing/2014/main" id="{FAA50ECD-5AC5-4CF1-B710-C306204DC869}"/>
-              </a:ext>
-            </a:extLst>
-          </p:cNvPr>
-          <p:cNvSpPr>
-            <a:spLocks xmlns:a="http://schemas.openxmlformats.org/drawingml/2006/main" noGrp="1"/>
-          </p:cNvSpPr>
-          <p:nvPr/>
-        </p:nvSpPr>
-        <p:spPr>
-          <a:xfrm xmlns:a="http://schemas.openxmlformats.org/drawingml/2006/main">
-            <a:off x="13218985" y="4333875"/>
-            <a:ext cx="1009650" cy="693896"/>
-          </a:xfrm>
-          <a:prstGeom xmlns:a="http://schemas.openxmlformats.org/drawingml/2006/main" prst="rect">
-            <a:avLst/>
-          </a:prstGeom>
-          <a:noFill xmlns:a="http://schemas.openxmlformats.org/drawingml/2006/main"/>
-          <a:ln xmlns:a="http://schemas.openxmlformats.org/drawingml/2006/main" w="0">
-            <a:noFill/>
-          </a:ln>
-        </p:spPr>
-        <p:txBody>
-          <a:bodyPr xmlns:a="http://schemas.openxmlformats.org/drawingml/2006/main" wrap="none" lIns="0" tIns="0" rIns="0" bIns="0" anchor="t">
-            <a:noAutofit/>
-          </a:bodyPr>
-          <a:lstStyle xmlns:a="http://schemas.openxmlformats.org/drawingml/2006/main"/>
-          <a:p xmlns:a="http://schemas.openxmlformats.org/drawingml/2006/main">
-            <a:pPr algn="ctr">
-              <a:defRPr sz="3525" b="0">
-                <a:solidFill>
-                  <a:srgbClr val="12183F"/>
-                </a:solidFill>
-                <a:latin typeface="Arial"/>
-                <a:ea typeface="Arial"/>
-                <a:cs typeface="Arial"/>
-              </a:defRPr>
-            </a:pPr>
-            <a:r>
-              <a:rPr sz="3525" b="0">
-                <a:solidFill>
-                  <a:srgbClr val="12183F"/>
-                </a:solidFill>
-                <a:latin typeface="Arial"/>
-                <a:ea typeface="Arial"/>
-                <a:cs typeface="Arial"/>
-              </a:rPr>
-              <a:t>رئيسية</a:t>
-            </a:r>
-          </a:p>
-        </p:txBody>
-      </p:sp>
-      <p:sp>
-        <p:nvSpPr>
-          <p:cNvPr id="23" name="">
-            <a:extLst xmlns:a="http://schemas.openxmlformats.org/drawingml/2006/main">
-              <a:ext uri="{FF2B5EF4-FFF2-40B4-BE49-F238E27FC236}">
-                <a16:creationId xmlns:a16="http://schemas.microsoft.com/office/drawing/2014/main" id="{4A65F1AB-EDD9-4B89-8C63-FE09BBC6601A}"/>
-              </a:ext>
-            </a:extLst>
-          </p:cNvPr>
-          <p:cNvSpPr>
-            <a:spLocks xmlns:a="http://schemas.openxmlformats.org/drawingml/2006/main" noGrp="1"/>
-          </p:cNvSpPr>
-          <p:nvPr/>
-        </p:nvSpPr>
-        <p:spPr>
-          <a:xfrm xmlns:a="http://schemas.openxmlformats.org/drawingml/2006/main">
-            <a:off x="12132564" y="4333875"/>
-            <a:ext cx="962025" cy="693896"/>
-          </a:xfrm>
-          <a:prstGeom xmlns:a="http://schemas.openxmlformats.org/drawingml/2006/main" prst="rect">
-            <a:avLst/>
-          </a:prstGeom>
-          <a:noFill xmlns:a="http://schemas.openxmlformats.org/drawingml/2006/main"/>
-          <a:ln xmlns:a="http://schemas.openxmlformats.org/drawingml/2006/main" w="0">
-            <a:noFill/>
-          </a:ln>
-        </p:spPr>
-        <p:txBody>
-          <a:bodyPr xmlns:a="http://schemas.openxmlformats.org/drawingml/2006/main" wrap="none" lIns="0" tIns="0" rIns="0" bIns="0" anchor="t">
-            <a:noAutofit/>
-          </a:bodyPr>
-          <a:lstStyle xmlns:a="http://schemas.openxmlformats.org/drawingml/2006/main"/>
-          <a:p xmlns:a="http://schemas.openxmlformats.org/drawingml/2006/main">
-            <a:pPr algn="ctr">
-              <a:defRPr sz="3525" b="0">
-                <a:solidFill>
-                  <a:srgbClr val="12183F"/>
-                </a:solidFill>
-                <a:latin typeface="Arial"/>
-                <a:ea typeface="Arial"/>
-                <a:cs typeface="Arial"/>
-              </a:defRPr>
-            </a:pPr>
-            <a:r>
-              <a:rPr sz="3525" b="0">
-                <a:solidFill>
-                  <a:srgbClr val="12183F"/>
-                </a:solidFill>
-                <a:latin typeface="Arial"/>
-                <a:ea typeface="Arial"/>
-                <a:cs typeface="Arial"/>
-              </a:rPr>
-              <a:t>مكتملة</a:t>
-            </a:r>
-          </a:p>
-        </p:txBody>
-      </p:sp>
-      <p:sp>
-        <p:nvSpPr>
-          <p:cNvPr id="24" name="">
-            <a:extLst xmlns:a="http://schemas.openxmlformats.org/drawingml/2006/main">
-              <a:ext uri="{FF2B5EF4-FFF2-40B4-BE49-F238E27FC236}">
-                <a16:creationId xmlns:a16="http://schemas.microsoft.com/office/drawing/2014/main" id="{E3B8342D-8F27-4CBF-9182-8850EAA15A92}"/>
-              </a:ext>
-            </a:extLst>
-          </p:cNvPr>
-          <p:cNvSpPr>
-            <a:spLocks xmlns:a="http://schemas.openxmlformats.org/drawingml/2006/main" noGrp="1"/>
-          </p:cNvSpPr>
-          <p:nvPr/>
-        </p:nvSpPr>
-        <p:spPr>
-          <a:xfrm xmlns:a="http://schemas.openxmlformats.org/drawingml/2006/main">
-            <a:off x="16002000" y="6334125"/>
-            <a:ext cx="857250" cy="634841"/>
-          </a:xfrm>
-          <a:prstGeom xmlns:a="http://schemas.openxmlformats.org/drawingml/2006/main" prst="rect">
-            <a:avLst/>
-          </a:prstGeom>
-          <a:noFill xmlns:a="http://schemas.openxmlformats.org/drawingml/2006/main"/>
-          <a:ln xmlns:a="http://schemas.openxmlformats.org/drawingml/2006/main" w="0">
-            <a:noFill/>
-          </a:ln>
-        </p:spPr>
-        <p:txBody>
-          <a:bodyPr xmlns:a="http://schemas.openxmlformats.org/drawingml/2006/main" wrap="none" lIns="0" tIns="0" rIns="0" bIns="0" anchor="t">
-            <a:noAutofit/>
-          </a:bodyPr>
-          <a:lstStyle xmlns:a="http://schemas.openxmlformats.org/drawingml/2006/main"/>
-          <a:p xmlns:a="http://schemas.openxmlformats.org/drawingml/2006/main">
-            <a:pPr algn="ctr">
-              <a:defRPr sz="3225" b="1">
-                <a:solidFill>
-                  <a:srgbClr val="075642"/>
-                </a:solidFill>
-                <a:latin typeface="Arial"/>
-                <a:ea typeface="Arial"/>
-                <a:cs typeface="Arial"/>
-              </a:defRPr>
-            </a:pPr>
-            <a:r>
-              <a:rPr sz="3225" b="1">
-                <a:solidFill>
-                  <a:srgbClr val="075642"/>
-                </a:solidFill>
-                <a:latin typeface="Arial"/>
-                <a:ea typeface="Arial"/>
-                <a:cs typeface="Arial"/>
-              </a:rPr>
-              <a:t>إضافة</a:t>
-            </a:r>
-          </a:p>
-        </p:txBody>
-      </p:sp>
-      <p:sp>
-        <p:nvSpPr>
-          <p:cNvPr id="25" name="">
-            <a:extLst xmlns:a="http://schemas.openxmlformats.org/drawingml/2006/main">
-              <a:ext uri="{FF2B5EF4-FFF2-40B4-BE49-F238E27FC236}">
-                <a16:creationId xmlns:a16="http://schemas.microsoft.com/office/drawing/2014/main" id="{D1805187-D5DA-44E3-86C0-3129D56D0DFC}"/>
-              </a:ext>
-            </a:extLst>
-          </p:cNvPr>
-          <p:cNvSpPr>
-            <a:spLocks xmlns:a="http://schemas.openxmlformats.org/drawingml/2006/main" noGrp="1"/>
-          </p:cNvSpPr>
-          <p:nvPr/>
-        </p:nvSpPr>
-        <p:spPr>
-          <a:xfrm xmlns:a="http://schemas.openxmlformats.org/drawingml/2006/main">
-            <a:off x="15411926" y="6334125"/>
-            <a:ext cx="476250" cy="634841"/>
-          </a:xfrm>
-          <a:prstGeom xmlns:a="http://schemas.openxmlformats.org/drawingml/2006/main" prst="rect">
-            <a:avLst/>
-          </a:prstGeom>
-          <a:noFill xmlns:a="http://schemas.openxmlformats.org/drawingml/2006/main"/>
-          <a:ln xmlns:a="http://schemas.openxmlformats.org/drawingml/2006/main" w="0">
-            <a:noFill/>
-          </a:ln>
-        </p:spPr>
-        <p:txBody>
-          <a:bodyPr xmlns:a="http://schemas.openxmlformats.org/drawingml/2006/main" wrap="none" lIns="0" tIns="0" rIns="0" bIns="0" anchor="t">
-            <a:noAutofit/>
-          </a:bodyPr>
-          <a:lstStyle xmlns:a="http://schemas.openxmlformats.org/drawingml/2006/main"/>
-          <a:p xmlns:a="http://schemas.openxmlformats.org/drawingml/2006/main">
-            <a:pPr algn="ctr">
-              <a:defRPr sz="3225" b="1">
-                <a:solidFill>
-                  <a:srgbClr val="075642"/>
-                </a:solidFill>
-                <a:latin typeface="Arial"/>
-                <a:ea typeface="Arial"/>
-                <a:cs typeface="Arial"/>
-              </a:defRPr>
-            </a:pPr>
-            <a:r>
-              <a:rPr sz="3225" b="1">
-                <a:solidFill>
-                  <a:srgbClr val="075642"/>
-                </a:solidFill>
-                <a:latin typeface="Arial"/>
-                <a:ea typeface="Arial"/>
-                <a:cs typeface="Arial"/>
-              </a:rPr>
-              <a:t>إلى</a:t>
-            </a:r>
-          </a:p>
-        </p:txBody>
-      </p:sp>
-      <p:sp>
-        <p:nvSpPr>
-          <p:cNvPr id="26" name="">
-            <a:extLst xmlns:a="http://schemas.openxmlformats.org/drawingml/2006/main">
-              <a:ext uri="{FF2B5EF4-FFF2-40B4-BE49-F238E27FC236}">
-                <a16:creationId xmlns:a16="http://schemas.microsoft.com/office/drawing/2014/main" id="{407BDD6A-5084-4AD4-8988-1EFAD80A98E1}"/>
-              </a:ext>
-            </a:extLst>
-          </p:cNvPr>
-          <p:cNvSpPr>
-            <a:spLocks xmlns:a="http://schemas.openxmlformats.org/drawingml/2006/main" noGrp="1"/>
-          </p:cNvSpPr>
-          <p:nvPr/>
-        </p:nvSpPr>
-        <p:spPr>
-          <a:xfrm xmlns:a="http://schemas.openxmlformats.org/drawingml/2006/main">
-            <a:off x="14212253" y="6334125"/>
-            <a:ext cx="1085850" cy="634841"/>
-          </a:xfrm>
-          <a:prstGeom xmlns:a="http://schemas.openxmlformats.org/drawingml/2006/main" prst="rect">
-            <a:avLst/>
-          </a:prstGeom>
-          <a:noFill xmlns:a="http://schemas.openxmlformats.org/drawingml/2006/main"/>
-          <a:ln xmlns:a="http://schemas.openxmlformats.org/drawingml/2006/main" w="0">
-            <a:noFill/>
-          </a:ln>
-        </p:spPr>
-        <p:txBody>
-          <a:bodyPr xmlns:a="http://schemas.openxmlformats.org/drawingml/2006/main" wrap="none" lIns="0" tIns="0" rIns="0" bIns="0" anchor="t">
-            <a:noAutofit/>
-          </a:bodyPr>
-          <a:lstStyle xmlns:a="http://schemas.openxmlformats.org/drawingml/2006/main"/>
-          <a:p xmlns:a="http://schemas.openxmlformats.org/drawingml/2006/main">
-            <a:pPr algn="ctr">
-              <a:defRPr sz="3225" b="1">
-                <a:solidFill>
-                  <a:srgbClr val="075642"/>
-                </a:solidFill>
-                <a:latin typeface="Arial"/>
-                <a:ea typeface="Arial"/>
-                <a:cs typeface="Arial"/>
-              </a:defRPr>
-            </a:pPr>
-            <a:r>
-              <a:rPr sz="3225" b="1">
-                <a:solidFill>
-                  <a:srgbClr val="075642"/>
-                </a:solidFill>
-                <a:latin typeface="Arial"/>
-                <a:ea typeface="Arial"/>
-                <a:cs typeface="Arial"/>
-              </a:rPr>
-              <a:t>2,924</a:t>
-            </a:r>
-          </a:p>
-        </p:txBody>
-      </p:sp>
-      <p:sp>
-        <p:nvSpPr>
-          <p:cNvPr id="27" name="">
-            <a:extLst xmlns:a="http://schemas.openxmlformats.org/drawingml/2006/main">
-              <a:ext uri="{FF2B5EF4-FFF2-40B4-BE49-F238E27FC236}">
-                <a16:creationId xmlns:a16="http://schemas.microsoft.com/office/drawing/2014/main" id="{2580B79E-C2CA-4299-B8DC-86DDD20DEE49}"/>
-              </a:ext>
-            </a:extLst>
-          </p:cNvPr>
-          <p:cNvSpPr>
-            <a:spLocks xmlns:a="http://schemas.openxmlformats.org/drawingml/2006/main" noGrp="1"/>
-          </p:cNvSpPr>
-          <p:nvPr/>
-        </p:nvSpPr>
-        <p:spPr>
-          <a:xfrm xmlns:a="http://schemas.openxmlformats.org/drawingml/2006/main">
-            <a:off x="13288804" y="6334125"/>
-            <a:ext cx="809625" cy="634841"/>
-          </a:xfrm>
-          <a:prstGeom xmlns:a="http://schemas.openxmlformats.org/drawingml/2006/main" prst="rect">
-            <a:avLst/>
-          </a:prstGeom>
-          <a:noFill xmlns:a="http://schemas.openxmlformats.org/drawingml/2006/main"/>
-          <a:ln xmlns:a="http://schemas.openxmlformats.org/drawingml/2006/main" w="0">
-            <a:noFill/>
-          </a:ln>
-        </p:spPr>
-        <p:txBody>
-          <a:bodyPr xmlns:a="http://schemas.openxmlformats.org/drawingml/2006/main" wrap="none" lIns="0" tIns="0" rIns="0" bIns="0" anchor="t">
-            <a:noAutofit/>
-          </a:bodyPr>
-          <a:lstStyle xmlns:a="http://schemas.openxmlformats.org/drawingml/2006/main"/>
-          <a:p xmlns:a="http://schemas.openxmlformats.org/drawingml/2006/main">
-            <a:pPr algn="ctr">
-              <a:defRPr sz="3225" b="1">
-                <a:solidFill>
-                  <a:srgbClr val="075642"/>
-                </a:solidFill>
-                <a:latin typeface="Arial"/>
-                <a:ea typeface="Arial"/>
-                <a:cs typeface="Arial"/>
-              </a:defRPr>
-            </a:pPr>
-            <a:r>
-              <a:rPr sz="3225" b="1">
-                <a:solidFill>
-                  <a:srgbClr val="075642"/>
-                </a:solidFill>
-                <a:latin typeface="Arial"/>
-                <a:ea typeface="Arial"/>
-                <a:cs typeface="Arial"/>
-              </a:rPr>
-              <a:t>فحصاً</a:t>
-            </a:r>
-          </a:p>
-        </p:txBody>
-      </p:sp>
-      <p:sp>
-        <p:nvSpPr>
-          <p:cNvPr id="28" name="">
-            <a:extLst xmlns:a="http://schemas.openxmlformats.org/drawingml/2006/main">
-              <a:ext uri="{FF2B5EF4-FFF2-40B4-BE49-F238E27FC236}">
-                <a16:creationId xmlns:a16="http://schemas.microsoft.com/office/drawing/2014/main" id="{112750CD-ED65-4AF7-91B7-236F3E116547}"/>
-              </a:ext>
-            </a:extLst>
-          </p:cNvPr>
-          <p:cNvSpPr>
-            <a:spLocks xmlns:a="http://schemas.openxmlformats.org/drawingml/2006/main" noGrp="1"/>
-          </p:cNvSpPr>
-          <p:nvPr/>
-        </p:nvSpPr>
-        <p:spPr>
-          <a:xfrm xmlns:a="http://schemas.openxmlformats.org/drawingml/2006/main">
-            <a:off x="12232005" y="6334125"/>
-            <a:ext cx="942975" cy="634841"/>
-          </a:xfrm>
-          <a:prstGeom xmlns:a="http://schemas.openxmlformats.org/drawingml/2006/main" prst="rect">
-            <a:avLst/>
-          </a:prstGeom>
-          <a:noFill xmlns:a="http://schemas.openxmlformats.org/drawingml/2006/main"/>
-          <a:ln xmlns:a="http://schemas.openxmlformats.org/drawingml/2006/main" w="0">
-            <a:noFill/>
-          </a:ln>
-        </p:spPr>
-        <p:txBody>
-          <a:bodyPr xmlns:a="http://schemas.openxmlformats.org/drawingml/2006/main" wrap="none" lIns="0" tIns="0" rIns="0" bIns="0" anchor="t">
-            <a:noAutofit/>
-          </a:bodyPr>
-          <a:lstStyle xmlns:a="http://schemas.openxmlformats.org/drawingml/2006/main"/>
-          <a:p xmlns:a="http://schemas.openxmlformats.org/drawingml/2006/main">
-            <a:pPr algn="ctr">
-              <a:defRPr sz="3225" b="1">
-                <a:solidFill>
-                  <a:srgbClr val="075642"/>
-                </a:solidFill>
-                <a:latin typeface="Arial"/>
-                <a:ea typeface="Arial"/>
-                <a:cs typeface="Arial"/>
-              </a:defRPr>
-            </a:pPr>
-            <a:r>
-              <a:rPr sz="3225" b="1">
-                <a:solidFill>
-                  <a:srgbClr val="075642"/>
-                </a:solidFill>
-                <a:latin typeface="Arial"/>
-                <a:ea typeface="Arial"/>
-                <a:cs typeface="Arial"/>
-              </a:rPr>
-              <a:t>برمجياً</a:t>
-            </a:r>
-          </a:p>
-        </p:txBody>
-      </p:sp>
-      <p:sp>
-        <p:nvSpPr>
-          <p:cNvPr id="29" name="">
-            <a:extLst xmlns:a="http://schemas.openxmlformats.org/drawingml/2006/main">
-              <a:ext uri="{FF2B5EF4-FFF2-40B4-BE49-F238E27FC236}">
-                <a16:creationId xmlns:a16="http://schemas.microsoft.com/office/drawing/2014/main" id="{BDDC8597-AA25-401F-A139-E67E9C68D4AC}"/>
-              </a:ext>
-            </a:extLst>
-          </p:cNvPr>
-          <p:cNvSpPr>
-            <a:spLocks xmlns:a="http://schemas.openxmlformats.org/drawingml/2006/main" noGrp="1"/>
-          </p:cNvSpPr>
-          <p:nvPr/>
-        </p:nvSpPr>
-        <p:spPr>
-          <a:xfrm xmlns:a="http://schemas.openxmlformats.org/drawingml/2006/main">
-            <a:off x="11508581" y="6334125"/>
-            <a:ext cx="609600" cy="634841"/>
-          </a:xfrm>
-          <a:prstGeom xmlns:a="http://schemas.openxmlformats.org/drawingml/2006/main" prst="rect">
-            <a:avLst/>
-          </a:prstGeom>
-          <a:noFill xmlns:a="http://schemas.openxmlformats.org/drawingml/2006/main"/>
-          <a:ln xmlns:a="http://schemas.openxmlformats.org/drawingml/2006/main" w="0">
-            <a:noFill/>
-          </a:ln>
-        </p:spPr>
-        <p:txBody>
-          <a:bodyPr xmlns:a="http://schemas.openxmlformats.org/drawingml/2006/main" wrap="none" lIns="0" tIns="0" rIns="0" bIns="0" anchor="t">
-            <a:noAutofit/>
-          </a:bodyPr>
-          <a:lstStyle xmlns:a="http://schemas.openxmlformats.org/drawingml/2006/main"/>
-          <a:p xmlns:a="http://schemas.openxmlformats.org/drawingml/2006/main">
-            <a:pPr algn="ctr">
-              <a:defRPr sz="3225" b="1">
-                <a:solidFill>
-                  <a:srgbClr val="075642"/>
-                </a:solidFill>
-                <a:latin typeface="Arial"/>
-                <a:ea typeface="Arial"/>
-                <a:cs typeface="Arial"/>
-              </a:defRPr>
-            </a:pPr>
-            <a:r>
-              <a:rPr sz="3225" b="1">
-                <a:solidFill>
-                  <a:srgbClr val="075642"/>
-                </a:solidFill>
-                <a:latin typeface="Arial"/>
-                <a:ea typeface="Arial"/>
-                <a:cs typeface="Arial"/>
-              </a:rPr>
-              <a:t>دون</a:t>
-            </a:r>
-          </a:p>
-        </p:txBody>
-      </p:sp>
-      <p:sp>
-        <p:nvSpPr>
-          <p:cNvPr id="30" name="">
-            <a:extLst xmlns:a="http://schemas.openxmlformats.org/drawingml/2006/main">
-              <a:ext uri="{FF2B5EF4-FFF2-40B4-BE49-F238E27FC236}">
-                <a16:creationId xmlns:a16="http://schemas.microsoft.com/office/drawing/2014/main" id="{BB36937F-DC40-43A3-9AA3-880955C5ECBB}"/>
-              </a:ext>
-            </a:extLst>
-          </p:cNvPr>
-          <p:cNvSpPr>
-            <a:spLocks xmlns:a="http://schemas.openxmlformats.org/drawingml/2006/main" noGrp="1"/>
-          </p:cNvSpPr>
-          <p:nvPr/>
-        </p:nvSpPr>
-        <p:spPr>
-          <a:xfrm xmlns:a="http://schemas.openxmlformats.org/drawingml/2006/main">
-            <a:off x="10537508" y="6334125"/>
-            <a:ext cx="857250" cy="634841"/>
-          </a:xfrm>
-          <a:prstGeom xmlns:a="http://schemas.openxmlformats.org/drawingml/2006/main" prst="rect">
-            <a:avLst/>
-          </a:prstGeom>
-          <a:noFill xmlns:a="http://schemas.openxmlformats.org/drawingml/2006/main"/>
-          <a:ln xmlns:a="http://schemas.openxmlformats.org/drawingml/2006/main" w="0">
-            <a:noFill/>
-          </a:ln>
-        </p:spPr>
-        <p:txBody>
-          <a:bodyPr xmlns:a="http://schemas.openxmlformats.org/drawingml/2006/main" wrap="none" lIns="0" tIns="0" rIns="0" bIns="0" anchor="t">
-            <a:noAutofit/>
-          </a:bodyPr>
-          <a:lstStyle xmlns:a="http://schemas.openxmlformats.org/drawingml/2006/main"/>
-          <a:p xmlns:a="http://schemas.openxmlformats.org/drawingml/2006/main">
-            <a:pPr algn="ctr">
-              <a:defRPr sz="3225" b="1">
-                <a:solidFill>
-                  <a:srgbClr val="075642"/>
-                </a:solidFill>
-                <a:latin typeface="Arial"/>
-                <a:ea typeface="Arial"/>
-                <a:cs typeface="Arial"/>
-              </a:defRPr>
-            </a:pPr>
-            <a:r>
-              <a:rPr sz="3225" b="1">
-                <a:solidFill>
-                  <a:srgbClr val="075642"/>
-                </a:solidFill>
-                <a:latin typeface="Arial"/>
-                <a:ea typeface="Arial"/>
-                <a:cs typeface="Arial"/>
-              </a:rPr>
-              <a:t>اتصال</a:t>
-            </a:r>
-          </a:p>
-        </p:txBody>
-      </p:sp>
-      <p:sp>
-        <p:nvSpPr>
-          <p:cNvPr id="31" name="">
-            <a:extLst xmlns:a="http://schemas.openxmlformats.org/drawingml/2006/main">
-              <a:ext uri="{FF2B5EF4-FFF2-40B4-BE49-F238E27FC236}">
-                <a16:creationId xmlns:a16="http://schemas.microsoft.com/office/drawing/2014/main" id="{42729036-6A23-4579-A345-73261081CAD2}"/>
-              </a:ext>
-            </a:extLst>
-          </p:cNvPr>
-          <p:cNvSpPr>
-            <a:spLocks xmlns:a="http://schemas.openxmlformats.org/drawingml/2006/main" noGrp="1"/>
-          </p:cNvSpPr>
-          <p:nvPr/>
-        </p:nvSpPr>
-        <p:spPr>
-          <a:xfrm xmlns:a="http://schemas.openxmlformats.org/drawingml/2006/main">
-            <a:off x="9366409" y="6334125"/>
-            <a:ext cx="1057275" cy="634841"/>
-          </a:xfrm>
-          <a:prstGeom xmlns:a="http://schemas.openxmlformats.org/drawingml/2006/main" prst="rect">
-            <a:avLst/>
-          </a:prstGeom>
-          <a:noFill xmlns:a="http://schemas.openxmlformats.org/drawingml/2006/main"/>
-          <a:ln xmlns:a="http://schemas.openxmlformats.org/drawingml/2006/main" w="0">
-            <a:noFill/>
-          </a:ln>
-        </p:spPr>
-        <p:txBody>
-          <a:bodyPr xmlns:a="http://schemas.openxmlformats.org/drawingml/2006/main" wrap="none" lIns="0" tIns="0" rIns="0" bIns="0" anchor="t">
-            <a:noAutofit/>
-          </a:bodyPr>
-          <a:lstStyle xmlns:a="http://schemas.openxmlformats.org/drawingml/2006/main"/>
-          <a:p xmlns:a="http://schemas.openxmlformats.org/drawingml/2006/main">
-            <a:pPr algn="ctr">
-              <a:defRPr sz="3225" b="1">
-                <a:solidFill>
-                  <a:srgbClr val="075642"/>
-                </a:solidFill>
-                <a:latin typeface="Arial"/>
-                <a:ea typeface="Arial"/>
-                <a:cs typeface="Arial"/>
-              </a:defRPr>
-            </a:pPr>
-            <a:r>
-              <a:rPr sz="3225" b="1">
-                <a:solidFill>
-                  <a:srgbClr val="075642"/>
-                </a:solidFill>
-                <a:latin typeface="Arial"/>
-                <a:ea typeface="Arial"/>
-                <a:cs typeface="Arial"/>
-              </a:rPr>
-              <a:t>بخدمات</a:t>
-            </a:r>
-          </a:p>
-        </p:txBody>
-      </p:sp>
-      <p:sp>
-        <p:nvSpPr>
-          <p:cNvPr id="32" name="">
-            <a:extLst xmlns:a="http://schemas.openxmlformats.org/drawingml/2006/main">
-              <a:ext uri="{FF2B5EF4-FFF2-40B4-BE49-F238E27FC236}">
-                <a16:creationId xmlns:a16="http://schemas.microsoft.com/office/drawing/2014/main" id="{AF9D2BCC-BE32-4C1A-81B7-304C337F17BA}"/>
-              </a:ext>
-            </a:extLst>
-          </p:cNvPr>
-          <p:cNvSpPr>
-            <a:spLocks xmlns:a="http://schemas.openxmlformats.org/drawingml/2006/main" noGrp="1"/>
-          </p:cNvSpPr>
-          <p:nvPr/>
-        </p:nvSpPr>
-        <p:spPr>
-          <a:xfrm xmlns:a="http://schemas.openxmlformats.org/drawingml/2006/main">
-            <a:off x="8252460" y="6334125"/>
-            <a:ext cx="1000125" cy="634841"/>
-          </a:xfrm>
-          <a:prstGeom xmlns:a="http://schemas.openxmlformats.org/drawingml/2006/main" prst="rect">
-            <a:avLst/>
-          </a:prstGeom>
-          <a:noFill xmlns:a="http://schemas.openxmlformats.org/drawingml/2006/main"/>
-          <a:ln xmlns:a="http://schemas.openxmlformats.org/drawingml/2006/main" w="0">
-            <a:noFill/>
-          </a:ln>
-        </p:spPr>
-        <p:txBody>
-          <a:bodyPr xmlns:a="http://schemas.openxmlformats.org/drawingml/2006/main" wrap="none" lIns="0" tIns="0" rIns="0" bIns="0" anchor="t">
-            <a:noAutofit/>
-          </a:bodyPr>
-          <a:lstStyle xmlns:a="http://schemas.openxmlformats.org/drawingml/2006/main"/>
-          <a:p xmlns:a="http://schemas.openxmlformats.org/drawingml/2006/main">
-            <a:pPr algn="ctr">
-              <a:defRPr sz="3225" b="1">
-                <a:solidFill>
-                  <a:srgbClr val="075642"/>
-                </a:solidFill>
-                <a:latin typeface="Arial"/>
-                <a:ea typeface="Arial"/>
-                <a:cs typeface="Arial"/>
-              </a:defRPr>
-            </a:pPr>
-            <a:r>
-              <a:rPr sz="3225" b="1">
-                <a:solidFill>
-                  <a:srgbClr val="075642"/>
-                </a:solidFill>
-                <a:latin typeface="Arial"/>
-                <a:ea typeface="Arial"/>
-                <a:cs typeface="Arial"/>
-              </a:rPr>
-              <a:t>النماذج</a:t>
-            </a:r>
-          </a:p>
-        </p:txBody>
-      </p:sp>
-      <p:sp>
-        <p:nvSpPr>
-          <p:cNvPr id="33" name="">
-            <a:extLst xmlns:a="http://schemas.openxmlformats.org/drawingml/2006/main">
-              <a:ext uri="{FF2B5EF4-FFF2-40B4-BE49-F238E27FC236}">
-                <a16:creationId xmlns:a16="http://schemas.microsoft.com/office/drawing/2014/main" id="{BEFFD903-D55D-4B3A-98F8-2B51BD55FFBF}"/>
-              </a:ext>
-            </a:extLst>
-          </p:cNvPr>
-          <p:cNvSpPr>
-            <a:spLocks xmlns:a="http://schemas.openxmlformats.org/drawingml/2006/main" noGrp="1"/>
-          </p:cNvSpPr>
-          <p:nvPr/>
-        </p:nvSpPr>
-        <p:spPr>
-          <a:xfrm xmlns:a="http://schemas.openxmlformats.org/drawingml/2006/main">
-            <a:off x="15535275" y="7315200"/>
-            <a:ext cx="1323975" cy="634841"/>
-          </a:xfrm>
-          <a:prstGeom xmlns:a="http://schemas.openxmlformats.org/drawingml/2006/main" prst="rect">
-            <a:avLst/>
-          </a:prstGeom>
-          <a:noFill xmlns:a="http://schemas.openxmlformats.org/drawingml/2006/main"/>
-          <a:ln xmlns:a="http://schemas.openxmlformats.org/drawingml/2006/main" w="0">
-            <a:noFill/>
-          </a:ln>
-        </p:spPr>
-        <p:txBody>
-          <a:bodyPr xmlns:a="http://schemas.openxmlformats.org/drawingml/2006/main" wrap="none" lIns="0" tIns="0" rIns="0" bIns="0" anchor="t">
-            <a:noAutofit/>
-          </a:bodyPr>
-          <a:lstStyle xmlns:a="http://schemas.openxmlformats.org/drawingml/2006/main"/>
-          <a:p xmlns:a="http://schemas.openxmlformats.org/drawingml/2006/main">
-            <a:pPr algn="ctr">
-              <a:defRPr sz="3225" b="0">
-                <a:solidFill>
-                  <a:srgbClr val="12183F"/>
-                </a:solidFill>
-                <a:latin typeface="Arial"/>
-                <a:ea typeface="Arial"/>
-                <a:cs typeface="Arial"/>
-              </a:defRPr>
-            </a:pPr>
-            <a:r>
-              <a:rPr sz="3225" b="0">
-                <a:solidFill>
-                  <a:srgbClr val="12183F"/>
-                </a:solidFill>
-                <a:latin typeface="Arial"/>
-                <a:ea typeface="Arial"/>
-                <a:cs typeface="Arial"/>
-              </a:rPr>
-              <a:t>ومجموعة</a:t>
-            </a:r>
-          </a:p>
-        </p:txBody>
-      </p:sp>
-      <p:sp>
-        <p:nvSpPr>
-          <p:cNvPr id="34" name="">
-            <a:extLst xmlns:a="http://schemas.openxmlformats.org/drawingml/2006/main">
-              <a:ext uri="{FF2B5EF4-FFF2-40B4-BE49-F238E27FC236}">
-                <a16:creationId xmlns:a16="http://schemas.microsoft.com/office/drawing/2014/main" id="{40FA43B9-F43A-4A35-A28E-E028734D6AB5}"/>
-              </a:ext>
-            </a:extLst>
-          </p:cNvPr>
-          <p:cNvSpPr>
-            <a:spLocks xmlns:a="http://schemas.openxmlformats.org/drawingml/2006/main" noGrp="1"/>
-          </p:cNvSpPr>
-          <p:nvPr/>
-        </p:nvSpPr>
-        <p:spPr>
-          <a:xfrm xmlns:a="http://schemas.openxmlformats.org/drawingml/2006/main">
-            <a:off x="14535626" y="7315200"/>
-            <a:ext cx="885825" cy="634841"/>
-          </a:xfrm>
-          <a:prstGeom xmlns:a="http://schemas.openxmlformats.org/drawingml/2006/main" prst="rect">
-            <a:avLst/>
-          </a:prstGeom>
-          <a:noFill xmlns:a="http://schemas.openxmlformats.org/drawingml/2006/main"/>
-          <a:ln xmlns:a="http://schemas.openxmlformats.org/drawingml/2006/main" w="0">
-            <a:noFill/>
-          </a:ln>
-        </p:spPr>
-        <p:txBody>
-          <a:bodyPr xmlns:a="http://schemas.openxmlformats.org/drawingml/2006/main" wrap="none" lIns="0" tIns="0" rIns="0" bIns="0" anchor="t">
-            <a:noAutofit/>
-          </a:bodyPr>
-          <a:lstStyle xmlns:a="http://schemas.openxmlformats.org/drawingml/2006/main"/>
-          <a:p xmlns:a="http://schemas.openxmlformats.org/drawingml/2006/main">
-            <a:pPr algn="ctr">
-              <a:defRPr sz="3225" b="0">
-                <a:solidFill>
-                  <a:srgbClr val="12183F"/>
-                </a:solidFill>
-                <a:latin typeface="Arial"/>
-                <a:ea typeface="Arial"/>
-                <a:cs typeface="Arial"/>
-              </a:defRPr>
-            </a:pPr>
-            <a:r>
-              <a:rPr sz="3225" b="0">
-                <a:solidFill>
-                  <a:srgbClr val="12183F"/>
-                </a:solidFill>
-                <a:latin typeface="Arial"/>
-                <a:ea typeface="Arial"/>
-                <a:cs typeface="Arial"/>
-              </a:rPr>
-              <a:t>انحدار</a:t>
-            </a:r>
-          </a:p>
-        </p:txBody>
-      </p:sp>
-      <p:sp>
-        <p:nvSpPr>
-          <p:cNvPr id="35" name="">
-            <a:extLst xmlns:a="http://schemas.openxmlformats.org/drawingml/2006/main">
-              <a:ext uri="{FF2B5EF4-FFF2-40B4-BE49-F238E27FC236}">
-                <a16:creationId xmlns:a16="http://schemas.microsoft.com/office/drawing/2014/main" id="{8FCB2938-E918-4F25-B5A3-681E038EE14C}"/>
-              </a:ext>
-            </a:extLst>
-          </p:cNvPr>
-          <p:cNvSpPr>
-            <a:spLocks xmlns:a="http://schemas.openxmlformats.org/drawingml/2006/main" noGrp="1"/>
-          </p:cNvSpPr>
-          <p:nvPr/>
-        </p:nvSpPr>
-        <p:spPr>
-          <a:xfrm xmlns:a="http://schemas.openxmlformats.org/drawingml/2006/main">
-            <a:off x="13659803" y="7315200"/>
-            <a:ext cx="762000" cy="634841"/>
-          </a:xfrm>
-          <a:prstGeom xmlns:a="http://schemas.openxmlformats.org/drawingml/2006/main" prst="rect">
-            <a:avLst/>
-          </a:prstGeom>
-          <a:noFill xmlns:a="http://schemas.openxmlformats.org/drawingml/2006/main"/>
-          <a:ln xmlns:a="http://schemas.openxmlformats.org/drawingml/2006/main" w="0">
-            <a:noFill/>
-          </a:ln>
-        </p:spPr>
-        <p:txBody>
-          <a:bodyPr xmlns:a="http://schemas.openxmlformats.org/drawingml/2006/main" wrap="none" lIns="0" tIns="0" rIns="0" bIns="0" anchor="t">
-            <a:noAutofit/>
-          </a:bodyPr>
-          <a:lstStyle xmlns:a="http://schemas.openxmlformats.org/drawingml/2006/main"/>
-          <a:p xmlns:a="http://schemas.openxmlformats.org/drawingml/2006/main">
-            <a:pPr algn="ctr">
-              <a:defRPr sz="3225" b="0">
-                <a:solidFill>
-                  <a:srgbClr val="12183F"/>
-                </a:solidFill>
-                <a:latin typeface="Arial"/>
-                <a:ea typeface="Arial"/>
-                <a:cs typeface="Arial"/>
-              </a:defRPr>
-            </a:pPr>
-            <a:r>
-              <a:rPr sz="3225" b="0">
-                <a:solidFill>
-                  <a:srgbClr val="12183F"/>
-                </a:solidFill>
-                <a:latin typeface="Arial"/>
-                <a:ea typeface="Arial"/>
-                <a:cs typeface="Arial"/>
-              </a:rPr>
-              <a:t>لاحقة</a:t>
-            </a:r>
-          </a:p>
-        </p:txBody>
-      </p:sp>
-      <p:sp>
-        <p:nvSpPr>
-          <p:cNvPr id="36" name="">
-            <a:extLst xmlns:a="http://schemas.openxmlformats.org/drawingml/2006/main">
-              <a:ext uri="{FF2B5EF4-FFF2-40B4-BE49-F238E27FC236}">
-                <a16:creationId xmlns:a16="http://schemas.microsoft.com/office/drawing/2014/main" id="{EDCDADBC-7001-409A-B046-BB8F14CD3E6E}"/>
-              </a:ext>
-            </a:extLst>
-          </p:cNvPr>
-          <p:cNvSpPr>
-            <a:spLocks xmlns:a="http://schemas.openxmlformats.org/drawingml/2006/main" noGrp="1"/>
-          </p:cNvSpPr>
-          <p:nvPr/>
-        </p:nvSpPr>
-        <p:spPr>
-          <a:xfrm xmlns:a="http://schemas.openxmlformats.org/drawingml/2006/main">
-            <a:off x="13107829" y="7315200"/>
-            <a:ext cx="438150" cy="634841"/>
-          </a:xfrm>
-          <a:prstGeom xmlns:a="http://schemas.openxmlformats.org/drawingml/2006/main" prst="rect">
-            <a:avLst/>
-          </a:prstGeom>
-          <a:noFill xmlns:a="http://schemas.openxmlformats.org/drawingml/2006/main"/>
-          <a:ln xmlns:a="http://schemas.openxmlformats.org/drawingml/2006/main" w="0">
-            <a:noFill/>
-          </a:ln>
-        </p:spPr>
-        <p:txBody>
-          <a:bodyPr xmlns:a="http://schemas.openxmlformats.org/drawingml/2006/main" wrap="none" lIns="0" tIns="0" rIns="0" bIns="0" anchor="t">
-            <a:noAutofit/>
-          </a:bodyPr>
-          <a:lstStyle xmlns:a="http://schemas.openxmlformats.org/drawingml/2006/main"/>
-          <a:p xmlns:a="http://schemas.openxmlformats.org/drawingml/2006/main">
-            <a:pPr algn="ctr">
-              <a:defRPr sz="3225" b="0">
-                <a:solidFill>
-                  <a:srgbClr val="12183F"/>
-                </a:solidFill>
-                <a:latin typeface="Arial"/>
-                <a:ea typeface="Arial"/>
-                <a:cs typeface="Arial"/>
-              </a:defRPr>
-            </a:pPr>
-            <a:r>
-              <a:rPr sz="3225" b="0">
-                <a:solidFill>
-                  <a:srgbClr val="12183F"/>
-                </a:solidFill>
-                <a:latin typeface="Arial"/>
-                <a:ea typeface="Arial"/>
-                <a:cs typeface="Arial"/>
-              </a:rPr>
-              <a:t>من</a:t>
-            </a:r>
-          </a:p>
-        </p:txBody>
-      </p:sp>
-      <p:sp>
-        <p:nvSpPr>
-          <p:cNvPr id="37" name="">
-            <a:extLst xmlns:a="http://schemas.openxmlformats.org/drawingml/2006/main">
-              <a:ext uri="{FF2B5EF4-FFF2-40B4-BE49-F238E27FC236}">
-                <a16:creationId xmlns:a16="http://schemas.microsoft.com/office/drawing/2014/main" id="{0C618684-C047-4242-A944-6757AD401878}"/>
-              </a:ext>
-            </a:extLst>
-          </p:cNvPr>
-          <p:cNvSpPr>
-            <a:spLocks xmlns:a="http://schemas.openxmlformats.org/drawingml/2006/main" noGrp="1"/>
-          </p:cNvSpPr>
-          <p:nvPr/>
-        </p:nvSpPr>
-        <p:spPr>
-          <a:xfrm xmlns:a="http://schemas.openxmlformats.org/drawingml/2006/main">
-            <a:off x="12251055" y="7315200"/>
-            <a:ext cx="742950" cy="634841"/>
-          </a:xfrm>
-          <a:prstGeom xmlns:a="http://schemas.openxmlformats.org/drawingml/2006/main" prst="rect">
-            <a:avLst/>
-          </a:prstGeom>
-          <a:noFill xmlns:a="http://schemas.openxmlformats.org/drawingml/2006/main"/>
-          <a:ln xmlns:a="http://schemas.openxmlformats.org/drawingml/2006/main" w="0">
-            <a:noFill/>
-          </a:ln>
-        </p:spPr>
-        <p:txBody>
-          <a:bodyPr xmlns:a="http://schemas.openxmlformats.org/drawingml/2006/main" wrap="none" lIns="0" tIns="0" rIns="0" bIns="0" anchor="t">
-            <a:noAutofit/>
-          </a:bodyPr>
-          <a:lstStyle xmlns:a="http://schemas.openxmlformats.org/drawingml/2006/main"/>
-          <a:p xmlns:a="http://schemas.openxmlformats.org/drawingml/2006/main">
-            <a:pPr algn="ctr">
-              <a:defRPr sz="3225" b="0">
-                <a:solidFill>
-                  <a:srgbClr val="12183F"/>
-                </a:solidFill>
-                <a:latin typeface="Arial"/>
-                <a:ea typeface="Arial"/>
-                <a:cs typeface="Arial"/>
-              </a:defRPr>
-            </a:pPr>
-            <a:r>
-              <a:rPr sz="3225" b="0">
-                <a:solidFill>
-                  <a:srgbClr val="12183F"/>
-                </a:solidFill>
-                <a:latin typeface="Arial"/>
-                <a:ea typeface="Arial"/>
-                <a:cs typeface="Arial"/>
-              </a:rPr>
-              <a:t>542</a:t>
-            </a:r>
-          </a:p>
-        </p:txBody>
-      </p:sp>
-      <p:sp>
-        <p:nvSpPr>
-          <p:cNvPr id="38" name="">
-            <a:extLst xmlns:a="http://schemas.openxmlformats.org/drawingml/2006/main">
-              <a:ext uri="{FF2B5EF4-FFF2-40B4-BE49-F238E27FC236}">
-                <a16:creationId xmlns:a16="http://schemas.microsoft.com/office/drawing/2014/main" id="{23C2BE11-E0A2-419A-BDFE-C3F4A8481099}"/>
-              </a:ext>
-            </a:extLst>
-          </p:cNvPr>
-          <p:cNvSpPr>
-            <a:spLocks xmlns:a="http://schemas.openxmlformats.org/drawingml/2006/main" noGrp="1"/>
-          </p:cNvSpPr>
-          <p:nvPr/>
-        </p:nvSpPr>
-        <p:spPr>
-          <a:xfrm xmlns:a="http://schemas.openxmlformats.org/drawingml/2006/main">
-            <a:off x="11194256" y="7315200"/>
-            <a:ext cx="942975" cy="634841"/>
-          </a:xfrm>
-          <a:prstGeom xmlns:a="http://schemas.openxmlformats.org/drawingml/2006/main" prst="rect">
-            <a:avLst/>
-          </a:prstGeom>
-          <a:noFill xmlns:a="http://schemas.openxmlformats.org/drawingml/2006/main"/>
-          <a:ln xmlns:a="http://schemas.openxmlformats.org/drawingml/2006/main" w="0">
-            <a:noFill/>
-          </a:ln>
-        </p:spPr>
-        <p:txBody>
-          <a:bodyPr xmlns:a="http://schemas.openxmlformats.org/drawingml/2006/main" wrap="none" lIns="0" tIns="0" rIns="0" bIns="0" anchor="t">
-            <a:noAutofit/>
-          </a:bodyPr>
-          <a:lstStyle xmlns:a="http://schemas.openxmlformats.org/drawingml/2006/main"/>
-          <a:p xmlns:a="http://schemas.openxmlformats.org/drawingml/2006/main">
-            <a:pPr algn="ctr">
-              <a:defRPr sz="3225" b="0">
-                <a:solidFill>
-                  <a:srgbClr val="12183F"/>
-                </a:solidFill>
-                <a:latin typeface="Arial"/>
-                <a:ea typeface="Arial"/>
-                <a:cs typeface="Arial"/>
-              </a:defRPr>
-            </a:pPr>
-            <a:r>
-              <a:rPr sz="3225" b="0">
-                <a:solidFill>
-                  <a:srgbClr val="12183F"/>
-                </a:solidFill>
-                <a:latin typeface="Arial"/>
-                <a:ea typeface="Arial"/>
-                <a:cs typeface="Arial"/>
-              </a:rPr>
-              <a:t>اختباراً</a:t>
-            </a:r>
-          </a:p>
-        </p:txBody>
-      </p:sp>
-      <p:sp>
-        <p:nvSpPr>
-          <p:cNvPr id="39" name="">
-            <a:extLst xmlns:a="http://schemas.openxmlformats.org/drawingml/2006/main">
-              <a:ext uri="{FF2B5EF4-FFF2-40B4-BE49-F238E27FC236}">
-                <a16:creationId xmlns:a16="http://schemas.microsoft.com/office/drawing/2014/main" id="{199762A6-BC6B-42EE-B255-7C7D7651C02A}"/>
-              </a:ext>
-            </a:extLst>
-          </p:cNvPr>
-          <p:cNvSpPr>
-            <a:spLocks xmlns:a="http://schemas.openxmlformats.org/drawingml/2006/main" noGrp="1"/>
-          </p:cNvSpPr>
-          <p:nvPr/>
-        </p:nvSpPr>
-        <p:spPr>
-          <a:xfrm xmlns:a="http://schemas.openxmlformats.org/drawingml/2006/main">
-            <a:off x="10670858" y="7315200"/>
-            <a:ext cx="409575" cy="634841"/>
-          </a:xfrm>
-          <a:prstGeom xmlns:a="http://schemas.openxmlformats.org/drawingml/2006/main" prst="rect">
-            <a:avLst/>
-          </a:prstGeom>
-          <a:noFill xmlns:a="http://schemas.openxmlformats.org/drawingml/2006/main"/>
-          <a:ln xmlns:a="http://schemas.openxmlformats.org/drawingml/2006/main" w="0">
-            <a:noFill/>
-          </a:ln>
-        </p:spPr>
-        <p:txBody>
-          <a:bodyPr xmlns:a="http://schemas.openxmlformats.org/drawingml/2006/main" wrap="none" lIns="0" tIns="0" rIns="0" bIns="0" anchor="t">
-            <a:noAutofit/>
-          </a:bodyPr>
-          <a:lstStyle xmlns:a="http://schemas.openxmlformats.org/drawingml/2006/main"/>
-          <a:p xmlns:a="http://schemas.openxmlformats.org/drawingml/2006/main">
-            <a:pPr algn="ctr">
-              <a:defRPr sz="3225" b="0">
-                <a:solidFill>
-                  <a:srgbClr val="12183F"/>
-                </a:solidFill>
-                <a:latin typeface="Arial"/>
-                <a:ea typeface="Arial"/>
-                <a:cs typeface="Arial"/>
-              </a:defRPr>
-            </a:pPr>
-            <a:r>
-              <a:rPr sz="3225" b="0">
-                <a:solidFill>
-                  <a:srgbClr val="12183F"/>
-                </a:solidFill>
-                <a:latin typeface="Arial"/>
-                <a:ea typeface="Arial"/>
-                <a:cs typeface="Arial"/>
-              </a:rPr>
-              <a:t>في</a:t>
-            </a:r>
-          </a:p>
-        </p:txBody>
-      </p:sp>
-      <p:sp>
-        <p:nvSpPr>
-          <p:cNvPr id="40" name="">
-            <a:extLst xmlns:a="http://schemas.openxmlformats.org/drawingml/2006/main">
-              <a:ext uri="{FF2B5EF4-FFF2-40B4-BE49-F238E27FC236}">
-                <a16:creationId xmlns:a16="http://schemas.microsoft.com/office/drawing/2014/main" id="{7E302D3E-5CA6-4386-832A-570CF761022C}"/>
-              </a:ext>
-            </a:extLst>
-          </p:cNvPr>
-          <p:cNvSpPr>
-            <a:spLocks xmlns:a="http://schemas.openxmlformats.org/drawingml/2006/main" noGrp="1"/>
-          </p:cNvSpPr>
-          <p:nvPr/>
-        </p:nvSpPr>
-        <p:spPr>
-          <a:xfrm xmlns:a="http://schemas.openxmlformats.org/drawingml/2006/main">
-            <a:off x="10042684" y="7315200"/>
-            <a:ext cx="514350" cy="634841"/>
-          </a:xfrm>
-          <a:prstGeom xmlns:a="http://schemas.openxmlformats.org/drawingml/2006/main" prst="rect">
-            <a:avLst/>
-          </a:prstGeom>
-          <a:noFill xmlns:a="http://schemas.openxmlformats.org/drawingml/2006/main"/>
-          <a:ln xmlns:a="http://schemas.openxmlformats.org/drawingml/2006/main" w="0">
-            <a:noFill/>
-          </a:ln>
-        </p:spPr>
-        <p:txBody>
-          <a:bodyPr xmlns:a="http://schemas.openxmlformats.org/drawingml/2006/main" wrap="none" lIns="0" tIns="0" rIns="0" bIns="0" anchor="t">
-            <a:noAutofit/>
-          </a:bodyPr>
-          <a:lstStyle xmlns:a="http://schemas.openxmlformats.org/drawingml/2006/main"/>
-          <a:p xmlns:a="http://schemas.openxmlformats.org/drawingml/2006/main">
-            <a:pPr algn="ctr">
-              <a:defRPr sz="3225" b="0">
-                <a:solidFill>
-                  <a:srgbClr val="12183F"/>
-                </a:solidFill>
-                <a:latin typeface="Arial"/>
-                <a:ea typeface="Arial"/>
-                <a:cs typeface="Arial"/>
-              </a:defRPr>
-            </a:pPr>
-            <a:r>
-              <a:rPr sz="3225" b="0">
-                <a:solidFill>
-                  <a:srgbClr val="12183F"/>
-                </a:solidFill>
-                <a:latin typeface="Arial"/>
-                <a:ea typeface="Arial"/>
-                <a:cs typeface="Arial"/>
-              </a:rPr>
-              <a:t>51</a:t>
-            </a:r>
-          </a:p>
-        </p:txBody>
-      </p:sp>
-      <p:sp>
-        <p:nvSpPr>
-          <p:cNvPr id="41" name="">
-            <a:extLst xmlns:a="http://schemas.openxmlformats.org/drawingml/2006/main">
-              <a:ext uri="{FF2B5EF4-FFF2-40B4-BE49-F238E27FC236}">
-                <a16:creationId xmlns:a16="http://schemas.microsoft.com/office/drawing/2014/main" id="{951435A3-7C14-4736-A5A9-F0B80483473C}"/>
-              </a:ext>
-            </a:extLst>
-          </p:cNvPr>
-          <p:cNvSpPr>
-            <a:spLocks xmlns:a="http://schemas.openxmlformats.org/drawingml/2006/main" noGrp="1"/>
-          </p:cNvSpPr>
-          <p:nvPr/>
-        </p:nvSpPr>
-        <p:spPr>
-          <a:xfrm xmlns:a="http://schemas.openxmlformats.org/drawingml/2006/main">
-            <a:off x="9414510" y="7315200"/>
-            <a:ext cx="514350" cy="634841"/>
-          </a:xfrm>
-          <a:prstGeom xmlns:a="http://schemas.openxmlformats.org/drawingml/2006/main" prst="rect">
-            <a:avLst/>
-          </a:prstGeom>
-          <a:noFill xmlns:a="http://schemas.openxmlformats.org/drawingml/2006/main"/>
-          <a:ln xmlns:a="http://schemas.openxmlformats.org/drawingml/2006/main" w="0">
-            <a:noFill/>
-          </a:ln>
-        </p:spPr>
-        <p:txBody>
-          <a:bodyPr xmlns:a="http://schemas.openxmlformats.org/drawingml/2006/main" wrap="none" lIns="0" tIns="0" rIns="0" bIns="0" anchor="t">
-            <a:noAutofit/>
-          </a:bodyPr>
-          <a:lstStyle xmlns:a="http://schemas.openxmlformats.org/drawingml/2006/main"/>
-          <a:p xmlns:a="http://schemas.openxmlformats.org/drawingml/2006/main">
-            <a:pPr algn="ctr">
-              <a:defRPr sz="3225" b="0">
-                <a:solidFill>
-                  <a:srgbClr val="12183F"/>
-                </a:solidFill>
-                <a:latin typeface="Arial"/>
-                <a:ea typeface="Arial"/>
-                <a:cs typeface="Arial"/>
-              </a:defRPr>
-            </a:pPr>
-            <a:r>
-              <a:rPr sz="3225" b="0">
-                <a:solidFill>
-                  <a:srgbClr val="12183F"/>
-                </a:solidFill>
-                <a:latin typeface="Arial"/>
-                <a:ea typeface="Arial"/>
-                <a:cs typeface="Arial"/>
-              </a:rPr>
-              <a:t>ملفاً</a:t>
-            </a:r>
-          </a:p>
-        </p:txBody>
-      </p:sp>
-      <p:sp>
-        <p:nvSpPr>
-          <p:cNvPr id="42" name="">
-            <a:extLst xmlns:a="http://schemas.openxmlformats.org/drawingml/2006/main">
-              <a:ext uri="{FF2B5EF4-FFF2-40B4-BE49-F238E27FC236}">
-                <a16:creationId xmlns:a16="http://schemas.microsoft.com/office/drawing/2014/main" id="{380898C8-C309-4CEC-A6A0-44B9A12F6871}"/>
-              </a:ext>
-            </a:extLst>
-          </p:cNvPr>
-          <p:cNvSpPr>
-            <a:spLocks xmlns:a="http://schemas.openxmlformats.org/drawingml/2006/main" noGrp="1"/>
-          </p:cNvSpPr>
-          <p:nvPr/>
-        </p:nvSpPr>
-        <p:spPr>
-          <a:xfrm xmlns:a="http://schemas.openxmlformats.org/drawingml/2006/main">
-            <a:off x="16040100" y="8582025"/>
-            <a:ext cx="819150" cy="428149"/>
-          </a:xfrm>
-          <a:prstGeom xmlns:a="http://schemas.openxmlformats.org/drawingml/2006/main" prst="rect">
-            <a:avLst/>
-          </a:prstGeom>
-          <a:noFill xmlns:a="http://schemas.openxmlformats.org/drawingml/2006/main"/>
-          <a:ln xmlns:a="http://schemas.openxmlformats.org/drawingml/2006/main" w="0">
-            <a:noFill/>
-          </a:ln>
-        </p:spPr>
-        <p:txBody>
-          <a:bodyPr xmlns:a="http://schemas.openxmlformats.org/drawingml/2006/main" wrap="none" lIns="0" tIns="0" rIns="0" bIns="0" anchor="t">
-            <a:noAutofit/>
-          </a:bodyPr>
-          <a:lstStyle xmlns:a="http://schemas.openxmlformats.org/drawingml/2006/main"/>
-          <a:p xmlns:a="http://schemas.openxmlformats.org/drawingml/2006/main">
-            <a:pPr algn="ctr">
-              <a:defRPr sz="2175" b="0">
-                <a:solidFill>
-                  <a:srgbClr val="586277"/>
-                </a:solidFill>
-                <a:latin typeface="Arial"/>
-                <a:ea typeface="Arial"/>
-                <a:cs typeface="Arial"/>
-              </a:defRPr>
-            </a:pPr>
-            <a:r>
-              <a:rPr sz="2175" b="0">
-                <a:solidFill>
-                  <a:srgbClr val="586277"/>
-                </a:solidFill>
-                <a:latin typeface="Arial"/>
-                <a:ea typeface="Arial"/>
-                <a:cs typeface="Arial"/>
-              </a:rPr>
-              <a:t>الفحوص</a:t>
-            </a:r>
-          </a:p>
-        </p:txBody>
-      </p:sp>
-      <p:sp>
-        <p:nvSpPr>
-          <p:cNvPr id="43" name="">
-            <a:extLst xmlns:a="http://schemas.openxmlformats.org/drawingml/2006/main">
-              <a:ext uri="{FF2B5EF4-FFF2-40B4-BE49-F238E27FC236}">
-                <a16:creationId xmlns:a16="http://schemas.microsoft.com/office/drawing/2014/main" id="{87D187F5-BF49-46F6-862A-C0DF9D3398FF}"/>
-              </a:ext>
-            </a:extLst>
-          </p:cNvPr>
-          <p:cNvSpPr>
-            <a:spLocks xmlns:a="http://schemas.openxmlformats.org/drawingml/2006/main" noGrp="1"/>
-          </p:cNvSpPr>
-          <p:nvPr/>
-        </p:nvSpPr>
-        <p:spPr>
-          <a:xfrm xmlns:a="http://schemas.openxmlformats.org/drawingml/2006/main">
-            <a:off x="15144750" y="8582025"/>
-            <a:ext cx="809625" cy="428149"/>
-          </a:xfrm>
-          <a:prstGeom xmlns:a="http://schemas.openxmlformats.org/drawingml/2006/main" prst="rect">
-            <a:avLst/>
-          </a:prstGeom>
-          <a:noFill xmlns:a="http://schemas.openxmlformats.org/drawingml/2006/main"/>
-          <a:ln xmlns:a="http://schemas.openxmlformats.org/drawingml/2006/main" w="0">
-            <a:noFill/>
-          </a:ln>
-        </p:spPr>
-        <p:txBody>
-          <a:bodyPr xmlns:a="http://schemas.openxmlformats.org/drawingml/2006/main" wrap="none" lIns="0" tIns="0" rIns="0" bIns="0" anchor="t">
-            <a:noAutofit/>
-          </a:bodyPr>
-          <a:lstStyle xmlns:a="http://schemas.openxmlformats.org/drawingml/2006/main"/>
-          <a:p xmlns:a="http://schemas.openxmlformats.org/drawingml/2006/main">
-            <a:pPr algn="ctr">
-              <a:defRPr sz="2175" b="0">
-                <a:solidFill>
-                  <a:srgbClr val="586277"/>
-                </a:solidFill>
-                <a:latin typeface="Arial"/>
-                <a:ea typeface="Arial"/>
-                <a:cs typeface="Arial"/>
-              </a:defRPr>
-            </a:pPr>
-            <a:r>
-              <a:rPr sz="2175" b="0">
-                <a:solidFill>
-                  <a:srgbClr val="586277"/>
-                </a:solidFill>
-                <a:latin typeface="Arial"/>
-                <a:ea typeface="Arial"/>
-                <a:cs typeface="Arial"/>
-              </a:rPr>
-              <a:t>البرمجية</a:t>
-            </a:r>
-          </a:p>
-        </p:txBody>
-      </p:sp>
-      <p:sp>
-        <p:nvSpPr>
-          <p:cNvPr id="44" name="">
-            <a:extLst xmlns:a="http://schemas.openxmlformats.org/drawingml/2006/main">
-              <a:ext uri="{FF2B5EF4-FFF2-40B4-BE49-F238E27FC236}">
-                <a16:creationId xmlns:a16="http://schemas.microsoft.com/office/drawing/2014/main" id="{4AAD7091-FEA7-45DC-AECC-D0D0F6D2789A}"/>
-              </a:ext>
-            </a:extLst>
-          </p:cNvPr>
-          <p:cNvSpPr>
-            <a:spLocks xmlns:a="http://schemas.openxmlformats.org/drawingml/2006/main" noGrp="1"/>
-          </p:cNvSpPr>
-          <p:nvPr/>
-        </p:nvSpPr>
-        <p:spPr>
-          <a:xfrm xmlns:a="http://schemas.openxmlformats.org/drawingml/2006/main">
-            <a:off x="14525625" y="8582025"/>
-            <a:ext cx="533400" cy="428149"/>
-          </a:xfrm>
-          <a:prstGeom xmlns:a="http://schemas.openxmlformats.org/drawingml/2006/main" prst="rect">
-            <a:avLst/>
-          </a:prstGeom>
-          <a:noFill xmlns:a="http://schemas.openxmlformats.org/drawingml/2006/main"/>
-          <a:ln xmlns:a="http://schemas.openxmlformats.org/drawingml/2006/main" w="0">
-            <a:noFill/>
-          </a:ln>
-        </p:spPr>
-        <p:txBody>
-          <a:bodyPr xmlns:a="http://schemas.openxmlformats.org/drawingml/2006/main" wrap="none" lIns="0" tIns="0" rIns="0" bIns="0" anchor="t">
-            <a:noAutofit/>
-          </a:bodyPr>
-          <a:lstStyle xmlns:a="http://schemas.openxmlformats.org/drawingml/2006/main"/>
-          <a:p xmlns:a="http://schemas.openxmlformats.org/drawingml/2006/main">
-            <a:pPr algn="ctr">
-              <a:defRPr sz="2175" b="0">
-                <a:solidFill>
-                  <a:srgbClr val="586277"/>
-                </a:solidFill>
-                <a:latin typeface="Arial"/>
-                <a:ea typeface="Arial"/>
-                <a:cs typeface="Arial"/>
-              </a:defRPr>
-            </a:pPr>
-            <a:r>
-              <a:rPr sz="2175" b="0">
-                <a:solidFill>
-                  <a:srgbClr val="586277"/>
-                </a:solidFill>
-                <a:latin typeface="Arial"/>
-                <a:ea typeface="Arial"/>
-                <a:cs typeface="Arial"/>
-              </a:rPr>
-              <a:t>ليست</a:t>
-            </a:r>
-          </a:p>
-        </p:txBody>
-      </p:sp>
-      <p:sp>
-        <p:nvSpPr>
-          <p:cNvPr id="45" name="">
-            <a:extLst xmlns:a="http://schemas.openxmlformats.org/drawingml/2006/main">
-              <a:ext uri="{FF2B5EF4-FFF2-40B4-BE49-F238E27FC236}">
-                <a16:creationId xmlns:a16="http://schemas.microsoft.com/office/drawing/2014/main" id="{9F172ACC-080D-468B-9254-0B9055076917}"/>
-              </a:ext>
-            </a:extLst>
-          </p:cNvPr>
-          <p:cNvSpPr>
-            <a:spLocks xmlns:a="http://schemas.openxmlformats.org/drawingml/2006/main" noGrp="1"/>
-          </p:cNvSpPr>
-          <p:nvPr/>
-        </p:nvSpPr>
-        <p:spPr>
-          <a:xfrm xmlns:a="http://schemas.openxmlformats.org/drawingml/2006/main">
-            <a:off x="13944600" y="8582025"/>
-            <a:ext cx="495300" cy="428149"/>
-          </a:xfrm>
-          <a:prstGeom xmlns:a="http://schemas.openxmlformats.org/drawingml/2006/main" prst="rect">
-            <a:avLst/>
-          </a:prstGeom>
-          <a:noFill xmlns:a="http://schemas.openxmlformats.org/drawingml/2006/main"/>
-          <a:ln xmlns:a="http://schemas.openxmlformats.org/drawingml/2006/main" w="0">
-            <a:noFill/>
-          </a:ln>
-        </p:spPr>
-        <p:txBody>
-          <a:bodyPr xmlns:a="http://schemas.openxmlformats.org/drawingml/2006/main" wrap="none" lIns="0" tIns="0" rIns="0" bIns="0" anchor="t">
-            <a:noAutofit/>
-          </a:bodyPr>
-          <a:lstStyle xmlns:a="http://schemas.openxmlformats.org/drawingml/2006/main"/>
-          <a:p xmlns:a="http://schemas.openxmlformats.org/drawingml/2006/main">
-            <a:pPr algn="ctr">
-              <a:defRPr sz="2175" b="0">
-                <a:solidFill>
-                  <a:srgbClr val="586277"/>
-                </a:solidFill>
-                <a:latin typeface="Arial"/>
-                <a:ea typeface="Arial"/>
-                <a:cs typeface="Arial"/>
-              </a:defRPr>
-            </a:pPr>
-            <a:r>
-              <a:rPr sz="2175" b="0">
-                <a:solidFill>
-                  <a:srgbClr val="586277"/>
-                </a:solidFill>
-                <a:latin typeface="Arial"/>
-                <a:ea typeface="Arial"/>
-                <a:cs typeface="Arial"/>
-              </a:rPr>
-              <a:t>أسئلة</a:t>
-            </a:r>
-          </a:p>
-        </p:txBody>
-      </p:sp>
-      <p:sp>
-        <p:nvSpPr>
-          <p:cNvPr id="46" name="">
-            <a:extLst xmlns:a="http://schemas.openxmlformats.org/drawingml/2006/main">
-              <a:ext uri="{FF2B5EF4-FFF2-40B4-BE49-F238E27FC236}">
-                <a16:creationId xmlns:a16="http://schemas.microsoft.com/office/drawing/2014/main" id="{5540E26D-D592-46AB-9B7C-A814F1AA0C8E}"/>
-              </a:ext>
-            </a:extLst>
-          </p:cNvPr>
-          <p:cNvSpPr>
-            <a:spLocks xmlns:a="http://schemas.openxmlformats.org/drawingml/2006/main" noGrp="1"/>
-          </p:cNvSpPr>
-          <p:nvPr/>
-        </p:nvSpPr>
-        <p:spPr>
-          <a:xfrm xmlns:a="http://schemas.openxmlformats.org/drawingml/2006/main">
-            <a:off x="13477875" y="8582025"/>
-            <a:ext cx="381000" cy="428149"/>
-          </a:xfrm>
-          <a:prstGeom xmlns:a="http://schemas.openxmlformats.org/drawingml/2006/main" prst="rect">
-            <a:avLst/>
-          </a:prstGeom>
-          <a:noFill xmlns:a="http://schemas.openxmlformats.org/drawingml/2006/main"/>
-          <a:ln xmlns:a="http://schemas.openxmlformats.org/drawingml/2006/main" w="0">
-            <a:noFill/>
-          </a:ln>
-        </p:spPr>
-        <p:txBody>
-          <a:bodyPr xmlns:a="http://schemas.openxmlformats.org/drawingml/2006/main" wrap="none" lIns="0" tIns="0" rIns="0" bIns="0" anchor="t">
-            <a:noAutofit/>
-          </a:bodyPr>
-          <a:lstStyle xmlns:a="http://schemas.openxmlformats.org/drawingml/2006/main"/>
-          <a:p xmlns:a="http://schemas.openxmlformats.org/drawingml/2006/main">
-            <a:pPr algn="ctr">
-              <a:defRPr sz="2175" b="0">
-                <a:solidFill>
-                  <a:srgbClr val="586277"/>
-                </a:solidFill>
-                <a:latin typeface="Arial"/>
-                <a:ea typeface="Arial"/>
-                <a:cs typeface="Arial"/>
-              </a:defRPr>
-            </a:pPr>
-            <a:r>
-              <a:rPr sz="2175" b="0">
-                <a:solidFill>
-                  <a:srgbClr val="586277"/>
-                </a:solidFill>
-                <a:latin typeface="Arial"/>
-                <a:ea typeface="Arial"/>
-                <a:cs typeface="Arial"/>
-              </a:rPr>
-              <a:t>حية</a:t>
-            </a:r>
-          </a:p>
-        </p:txBody>
-      </p:sp>
-      <p:sp>
-        <p:nvSpPr>
-          <p:cNvPr id="47" name="">
-            <a:extLst xmlns:a="http://schemas.openxmlformats.org/drawingml/2006/main">
-              <a:ext uri="{FF2B5EF4-FFF2-40B4-BE49-F238E27FC236}">
-                <a16:creationId xmlns:a16="http://schemas.microsoft.com/office/drawing/2014/main" id="{375947AE-09AB-4BB5-8F6E-FDF9EF9F65E9}"/>
-              </a:ext>
-            </a:extLst>
-          </p:cNvPr>
-          <p:cNvSpPr>
-            <a:spLocks xmlns:a="http://schemas.openxmlformats.org/drawingml/2006/main" noGrp="1"/>
-          </p:cNvSpPr>
-          <p:nvPr/>
-        </p:nvSpPr>
-        <p:spPr>
-          <a:xfrm xmlns:a="http://schemas.openxmlformats.org/drawingml/2006/main">
-            <a:off x="12734925" y="8582025"/>
-            <a:ext cx="657225" cy="428149"/>
-          </a:xfrm>
-          <a:prstGeom xmlns:a="http://schemas.openxmlformats.org/drawingml/2006/main" prst="rect">
-            <a:avLst/>
-          </a:prstGeom>
-          <a:noFill xmlns:a="http://schemas.openxmlformats.org/drawingml/2006/main"/>
-          <a:ln xmlns:a="http://schemas.openxmlformats.org/drawingml/2006/main" w="0">
-            <a:noFill/>
-          </a:ln>
-        </p:spPr>
-        <p:txBody>
-          <a:bodyPr xmlns:a="http://schemas.openxmlformats.org/drawingml/2006/main" wrap="none" lIns="0" tIns="0" rIns="0" bIns="0" anchor="t">
-            <a:noAutofit/>
-          </a:bodyPr>
-          <a:lstStyle xmlns:a="http://schemas.openxmlformats.org/drawingml/2006/main"/>
-          <a:p xmlns:a="http://schemas.openxmlformats.org/drawingml/2006/main">
-            <a:pPr algn="ctr">
-              <a:defRPr sz="2175" b="0">
-                <a:solidFill>
-                  <a:srgbClr val="586277"/>
-                </a:solidFill>
-                <a:latin typeface="Arial"/>
-                <a:ea typeface="Arial"/>
-                <a:cs typeface="Arial"/>
-              </a:defRPr>
-            </a:pPr>
-            <a:r>
-              <a:rPr sz="2175" b="0">
-                <a:solidFill>
-                  <a:srgbClr val="586277"/>
-                </a:solidFill>
-                <a:latin typeface="Arial"/>
-                <a:ea typeface="Arial"/>
-                <a:cs typeface="Arial"/>
-              </a:rPr>
-              <a:t>إضافية</a:t>
-            </a:r>
-          </a:p>
-        </p:txBody>
-      </p:sp>
-      <p:sp>
-        <p:nvSpPr>
-          <p:cNvPr id="48" name="">
-            <a:extLst xmlns:a="http://schemas.openxmlformats.org/drawingml/2006/main">
-              <a:ext uri="{FF2B5EF4-FFF2-40B4-BE49-F238E27FC236}">
-                <a16:creationId xmlns:a16="http://schemas.microsoft.com/office/drawing/2014/main" id="{498C6310-7E03-40C1-9D66-55CE0E626B64}"/>
-              </a:ext>
-            </a:extLst>
-          </p:cNvPr>
-          <p:cNvSpPr>
-            <a:spLocks xmlns:a="http://schemas.openxmlformats.org/drawingml/2006/main" noGrp="1"/>
-          </p:cNvSpPr>
-          <p:nvPr/>
-        </p:nvSpPr>
-        <p:spPr>
-          <a:xfrm xmlns:a="http://schemas.openxmlformats.org/drawingml/2006/main">
-            <a:off x="11820525" y="8582025"/>
-            <a:ext cx="828675" cy="428149"/>
-          </a:xfrm>
-          <a:prstGeom xmlns:a="http://schemas.openxmlformats.org/drawingml/2006/main" prst="rect">
-            <a:avLst/>
-          </a:prstGeom>
-          <a:noFill xmlns:a="http://schemas.openxmlformats.org/drawingml/2006/main"/>
-          <a:ln xmlns:a="http://schemas.openxmlformats.org/drawingml/2006/main" w="0">
-            <a:noFill/>
-          </a:ln>
-        </p:spPr>
-        <p:txBody>
-          <a:bodyPr xmlns:a="http://schemas.openxmlformats.org/drawingml/2006/main" wrap="none" lIns="0" tIns="0" rIns="0" bIns="0" anchor="t">
-            <a:noAutofit/>
-          </a:bodyPr>
-          <a:lstStyle xmlns:a="http://schemas.openxmlformats.org/drawingml/2006/main"/>
-          <a:p xmlns:a="http://schemas.openxmlformats.org/drawingml/2006/main">
-            <a:pPr algn="ctr">
-              <a:defRPr sz="2175" b="0">
-                <a:solidFill>
-                  <a:srgbClr val="586277"/>
-                </a:solidFill>
-                <a:latin typeface="Arial"/>
-                <a:ea typeface="Arial"/>
-                <a:cs typeface="Arial"/>
-              </a:defRPr>
-            </a:pPr>
-            <a:r>
-              <a:rPr sz="2175" b="0">
-                <a:solidFill>
-                  <a:srgbClr val="586277"/>
-                </a:solidFill>
-                <a:latin typeface="Arial"/>
-                <a:ea typeface="Arial"/>
-                <a:cs typeface="Arial"/>
-              </a:rPr>
-              <a:t>الإعادات</a:t>
-            </a:r>
-          </a:p>
-        </p:txBody>
-      </p:sp>
-      <p:sp>
-        <p:nvSpPr>
-          <p:cNvPr id="49" name="">
-            <a:extLst xmlns:a="http://schemas.openxmlformats.org/drawingml/2006/main">
-              <a:ext uri="{FF2B5EF4-FFF2-40B4-BE49-F238E27FC236}">
-                <a16:creationId xmlns:a16="http://schemas.microsoft.com/office/drawing/2014/main" id="{335FA853-C6B5-452E-B49A-8224E850CDEE}"/>
-              </a:ext>
-            </a:extLst>
-          </p:cNvPr>
-          <p:cNvSpPr>
-            <a:spLocks xmlns:a="http://schemas.openxmlformats.org/drawingml/2006/main" noGrp="1"/>
-          </p:cNvSpPr>
-          <p:nvPr/>
-        </p:nvSpPr>
-        <p:spPr>
-          <a:xfrm xmlns:a="http://schemas.openxmlformats.org/drawingml/2006/main">
-            <a:off x="10972800" y="8582025"/>
-            <a:ext cx="762000" cy="428149"/>
-          </a:xfrm>
-          <a:prstGeom xmlns:a="http://schemas.openxmlformats.org/drawingml/2006/main" prst="rect">
-            <a:avLst/>
-          </a:prstGeom>
-          <a:noFill xmlns:a="http://schemas.openxmlformats.org/drawingml/2006/main"/>
-          <a:ln xmlns:a="http://schemas.openxmlformats.org/drawingml/2006/main" w="0">
-            <a:noFill/>
-          </a:ln>
-        </p:spPr>
-        <p:txBody>
-          <a:bodyPr xmlns:a="http://schemas.openxmlformats.org/drawingml/2006/main" wrap="none" lIns="0" tIns="0" rIns="0" bIns="0" anchor="t">
-            <a:noAutofit/>
-          </a:bodyPr>
-          <a:lstStyle xmlns:a="http://schemas.openxmlformats.org/drawingml/2006/main"/>
-          <a:p xmlns:a="http://schemas.openxmlformats.org/drawingml/2006/main">
-            <a:pPr algn="ctr">
-              <a:defRPr sz="2175" b="0">
-                <a:solidFill>
-                  <a:srgbClr val="586277"/>
-                </a:solidFill>
-                <a:latin typeface="Arial"/>
-                <a:ea typeface="Arial"/>
-                <a:cs typeface="Arial"/>
-              </a:defRPr>
-            </a:pPr>
-            <a:r>
-              <a:rPr sz="2175" b="0">
-                <a:solidFill>
-                  <a:srgbClr val="586277"/>
-                </a:solidFill>
-                <a:latin typeface="Arial"/>
-                <a:ea typeface="Arial"/>
-                <a:cs typeface="Arial"/>
-              </a:rPr>
-              <a:t>الموجهة</a:t>
-            </a:r>
-          </a:p>
-        </p:txBody>
-      </p:sp>
-      <p:sp>
-        <p:nvSpPr>
-          <p:cNvPr id="50" name="">
-            <a:extLst xmlns:a="http://schemas.openxmlformats.org/drawingml/2006/main">
-              <a:ext uri="{FF2B5EF4-FFF2-40B4-BE49-F238E27FC236}">
-                <a16:creationId xmlns:a16="http://schemas.microsoft.com/office/drawing/2014/main" id="{874AA287-4EE2-4D0E-9BBB-0A0129037862}"/>
-              </a:ext>
-            </a:extLst>
-          </p:cNvPr>
-          <p:cNvSpPr>
-            <a:spLocks xmlns:a="http://schemas.openxmlformats.org/drawingml/2006/main" noGrp="1"/>
-          </p:cNvSpPr>
-          <p:nvPr/>
-        </p:nvSpPr>
-        <p:spPr>
-          <a:xfrm xmlns:a="http://schemas.openxmlformats.org/drawingml/2006/main">
-            <a:off x="10325100" y="8582025"/>
-            <a:ext cx="561975" cy="428149"/>
-          </a:xfrm>
-          <a:prstGeom xmlns:a="http://schemas.openxmlformats.org/drawingml/2006/main" prst="rect">
-            <a:avLst/>
-          </a:prstGeom>
-          <a:noFill xmlns:a="http://schemas.openxmlformats.org/drawingml/2006/main"/>
-          <a:ln xmlns:a="http://schemas.openxmlformats.org/drawingml/2006/main" w="0">
-            <a:noFill/>
-          </a:ln>
-        </p:spPr>
-        <p:txBody>
-          <a:bodyPr xmlns:a="http://schemas.openxmlformats.org/drawingml/2006/main" wrap="none" lIns="0" tIns="0" rIns="0" bIns="0" anchor="t">
-            <a:noAutofit/>
-          </a:bodyPr>
-          <a:lstStyle xmlns:a="http://schemas.openxmlformats.org/drawingml/2006/main"/>
-          <a:p xmlns:a="http://schemas.openxmlformats.org/drawingml/2006/main">
-            <a:pPr algn="ctr">
-              <a:defRPr sz="2175" b="0">
-                <a:solidFill>
-                  <a:srgbClr val="586277"/>
-                </a:solidFill>
-                <a:latin typeface="Arial"/>
-                <a:ea typeface="Arial"/>
-                <a:cs typeface="Arial"/>
-              </a:defRPr>
-            </a:pPr>
-            <a:r>
-              <a:rPr sz="2175" b="0">
-                <a:solidFill>
-                  <a:srgbClr val="586277"/>
-                </a:solidFill>
-                <a:latin typeface="Arial"/>
-                <a:ea typeface="Arial"/>
-                <a:cs typeface="Arial"/>
-              </a:rPr>
-              <a:t>خارج</a:t>
-            </a:r>
-          </a:p>
-        </p:txBody>
-      </p:sp>
-      <p:sp>
-        <p:nvSpPr>
-          <p:cNvPr id="51" name="">
-            <a:extLst xmlns:a="http://schemas.openxmlformats.org/drawingml/2006/main">
-              <a:ext uri="{FF2B5EF4-FFF2-40B4-BE49-F238E27FC236}">
-                <a16:creationId xmlns:a16="http://schemas.microsoft.com/office/drawing/2014/main" id="{7EB9D926-91E9-4AD8-91D9-D6808C52D681}"/>
-              </a:ext>
-            </a:extLst>
-          </p:cNvPr>
-          <p:cNvSpPr>
-            <a:spLocks xmlns:a="http://schemas.openxmlformats.org/drawingml/2006/main" noGrp="1"/>
-          </p:cNvSpPr>
-          <p:nvPr/>
-        </p:nvSpPr>
-        <p:spPr>
-          <a:xfrm xmlns:a="http://schemas.openxmlformats.org/drawingml/2006/main">
-            <a:off x="9582150" y="8582025"/>
-            <a:ext cx="657225" cy="428149"/>
-          </a:xfrm>
-          <a:prstGeom xmlns:a="http://schemas.openxmlformats.org/drawingml/2006/main" prst="rect">
-            <a:avLst/>
-          </a:prstGeom>
-          <a:noFill xmlns:a="http://schemas.openxmlformats.org/drawingml/2006/main"/>
-          <a:ln xmlns:a="http://schemas.openxmlformats.org/drawingml/2006/main" w="0">
-            <a:noFill/>
-          </a:ln>
-        </p:spPr>
-        <p:txBody>
-          <a:bodyPr xmlns:a="http://schemas.openxmlformats.org/drawingml/2006/main" wrap="none" lIns="0" tIns="0" rIns="0" bIns="0" anchor="t">
-            <a:noAutofit/>
-          </a:bodyPr>
-          <a:lstStyle xmlns:a="http://schemas.openxmlformats.org/drawingml/2006/main"/>
-          <a:p xmlns:a="http://schemas.openxmlformats.org/drawingml/2006/main">
-            <a:pPr algn="ctr">
-              <a:defRPr sz="2175" b="0">
-                <a:solidFill>
-                  <a:srgbClr val="586277"/>
-                </a:solidFill>
-                <a:latin typeface="Arial"/>
-                <a:ea typeface="Arial"/>
-                <a:cs typeface="Arial"/>
-              </a:defRPr>
-            </a:pPr>
-            <a:r>
-              <a:rPr sz="2175" b="0">
-                <a:solidFill>
-                  <a:srgbClr val="586277"/>
-                </a:solidFill>
-                <a:latin typeface="Arial"/>
-                <a:ea typeface="Arial"/>
-                <a:cs typeface="Arial"/>
-              </a:rPr>
-              <a:t>إجمالي</a:t>
-            </a:r>
-          </a:p>
-        </p:txBody>
-      </p:sp>
-      <p:sp>
-        <p:nvSpPr>
-          <p:cNvPr id="52" name="">
-            <a:extLst xmlns:a="http://schemas.openxmlformats.org/drawingml/2006/main">
-              <a:ext uri="{FF2B5EF4-FFF2-40B4-BE49-F238E27FC236}">
-                <a16:creationId xmlns:a16="http://schemas.microsoft.com/office/drawing/2014/main" id="{6908D019-8693-45A8-88AD-64BDAB1192E7}"/>
-              </a:ext>
-            </a:extLst>
-          </p:cNvPr>
-          <p:cNvSpPr>
-            <a:spLocks xmlns:a="http://schemas.openxmlformats.org/drawingml/2006/main" noGrp="1"/>
-          </p:cNvSpPr>
-          <p:nvPr/>
-        </p:nvSpPr>
-        <p:spPr>
-          <a:xfrm xmlns:a="http://schemas.openxmlformats.org/drawingml/2006/main">
-            <a:off x="8896350" y="8582025"/>
-            <a:ext cx="600075" cy="428149"/>
-          </a:xfrm>
-          <a:prstGeom xmlns:a="http://schemas.openxmlformats.org/drawingml/2006/main" prst="rect">
-            <a:avLst/>
-          </a:prstGeom>
-          <a:noFill xmlns:a="http://schemas.openxmlformats.org/drawingml/2006/main"/>
-          <a:ln xmlns:a="http://schemas.openxmlformats.org/drawingml/2006/main" w="0">
-            <a:noFill/>
-          </a:ln>
-        </p:spPr>
-        <p:txBody>
-          <a:bodyPr xmlns:a="http://schemas.openxmlformats.org/drawingml/2006/main" wrap="none" lIns="0" tIns="0" rIns="0" bIns="0" anchor="t">
-            <a:noAutofit/>
-          </a:bodyPr>
-          <a:lstStyle xmlns:a="http://schemas.openxmlformats.org/drawingml/2006/main"/>
-          <a:p xmlns:a="http://schemas.openxmlformats.org/drawingml/2006/main">
-            <a:pPr algn="ctr">
-              <a:defRPr sz="2175" b="0">
-                <a:solidFill>
-                  <a:srgbClr val="586277"/>
-                </a:solidFill>
-                <a:latin typeface="Arial"/>
-                <a:ea typeface="Arial"/>
-                <a:cs typeface="Arial"/>
-              </a:defRPr>
-            </a:pPr>
-            <a:r>
-              <a:rPr sz="2175" b="0">
-                <a:solidFill>
-                  <a:srgbClr val="586277"/>
-                </a:solidFill>
-                <a:latin typeface="Arial"/>
-                <a:ea typeface="Arial"/>
-                <a:cs typeface="Arial"/>
-              </a:rPr>
-              <a:t>425.</a:t>
-            </a:r>
-          </a:p>
-        </p:txBody>
-      </p:sp>
-    </p:spTree>
-    <p:extLst>
-      <p:ext uri="{BB962C8B-B14F-4D97-AF65-F5344CB8AC3E}">
-        <p14:creationId xmlns:p14="http://schemas.microsoft.com/office/powerpoint/2010/main" val="741905010"/>
-      </p:ext>
-    </p:extLst>
-  </p:cSld>
-</p:sld>
+<ns0:sld xmlns:ns0="http://schemas.openxmlformats.org/presentationml/2006/main" xmlns:ns1="http://schemas.openxmlformats.org/drawingml/2006/main" xmlns:ns2="http://schemas.microsoft.com/office/drawing/2014/main" xmlns:ns3="http://schemas.microsoft.com/office/powerpoint/2010/main">
+  <ns0:cSld>
+    <ns0:bg>
+      <ns0:bgPr>
+        <ns1:solidFill>
+          <ns1:srgbClr val="F2F4FF"/>
+        </ns1:solidFill>
+      </ns0:bgPr>
+    </ns0:bg>
+    <ns0:spTree>
+      <ns0:nvGrpSpPr>
+        <ns0:cNvPr id="1" name=""/>
+        <ns0:cNvGrpSpPr/>
+        <ns0:nvPr/>
+      </ns0:nvGrpSpPr>
+      <ns0:grpSpPr>
+        <ns1:xfrm/>
+      </ns0:grpSpPr>
+      <ns0:sp>
+        <ns0:nvSpPr>
+          <ns0:cNvPr id="53" name="">
+            <ns1:extLst>
+              <ns1:ext uri="{FF2B5EF4-FFF2-40B4-BE49-F238E27FC236}">
+                <ns2:creationId id="{327E8E01-61FA-414D-BE5A-59D7BD2F5EBA}"/>
+              </ns1:ext>
+            </ns1:extLst>
+          </ns0:cNvPr>
+          <ns0:cNvSpPr>
+            <ns1:spLocks noGrp="1"/>
+          </ns0:cNvSpPr>
+          <ns0:nvPr/>
+        </ns0:nvSpPr>
+        <ns0:spPr>
+          <ns1:xfrm>
+            <ns1:off x="857250" y="9486900"/>
+            <ns1:ext cx="6191250" cy="333375"/>
+          </ns1:xfrm>
+          <ns1:prstGeom prst="rect">
+            <ns1:avLst/>
+          </ns1:prstGeom>
+          <ns1:noFill/>
+          <ns1:ln w="0">
+            <ns1:noFill/>
+          </ns1:ln>
+        </ns0:spPr>
+        <ns0:txBody>
+          <ns1:bodyPr wrap="none" lIns="0" tIns="0" rIns="0" bIns="0" anchor="t">
+            <ns1:noAutofit/>
+          </ns1:bodyPr>
+          <ns1:lstStyle/>
+          <ns1:p>
+            <ns1:pPr algn="l">
+              <ns1:defRPr sz="1725" b="0">
+                <ns1:solidFill>
+                  <ns1:srgbClr val="586277"/>
+                </ns1:solidFill>
+                <ns1:latin typeface="Arial"/>
+                <ns1:ea typeface="Arial"/>
+                <ns1:cs typeface="Arial"/>
+              </ns1:defRPr>
+            </ns1:pPr>
+            <ns1:r>
+              <ns1:rPr sz="1725" b="0">
+                <ns1:solidFill>
+                  <ns1:srgbClr val="586277"/>
+                </ns1:solidFill>
+                <ns1:latin typeface="Arial"/>
+                <ns1:ea typeface="Arial"/>
+                <ns1:cs typeface="Arial"/>
+              </ns1:rPr>
+              <ns1:t>IsnadLens / 07</ns1:t>
+            </ns1:r>
+          </ns1:p>
+        </ns0:txBody>
+      </ns0:sp>
+      <ns0:sp>
+        <ns0:nvSpPr>
+          <ns0:cNvPr id="2" name="">
+            <ns1:extLst>
+              <ns1:ext uri="{FF2B5EF4-FFF2-40B4-BE49-F238E27FC236}">
+                <ns2:creationId id="{E6E7E6C1-6482-4EB4-BC24-78AAF9814BE5}"/>
+              </ns1:ext>
+            </ns1:extLst>
+          </ns0:cNvPr>
+          <ns0:cNvSpPr>
+            <ns1:spLocks noGrp="1"/>
+          </ns0:cNvSpPr>
+          <ns0:nvPr/>
+        </ns0:nvSpPr>
+        <ns0:spPr>
+          <ns1:xfrm>
+            <ns1:off x="16983075" y="9486900"/>
+            <ns1:ext cx="447675" cy="339566"/>
+          </ns1:xfrm>
+          <ns1:prstGeom prst="rect">
+            <ns1:avLst/>
+          </ns1:prstGeom>
+          <ns1:noFill/>
+          <ns1:ln w="0">
+            <ns1:noFill/>
+          </ns1:ln>
+        </ns0:spPr>
+        <ns0:txBody>
+          <ns1:bodyPr wrap="none" lIns="0" tIns="0" rIns="0" bIns="0" anchor="t">
+            <ns1:noAutofit/>
+          </ns1:bodyPr>
+          <ns1:lstStyle/>
+          <ns1:p>
+            <ns1:pPr algn="ctr">
+              <ns1:defRPr sz="1725" b="0">
+                <ns1:solidFill>
+                  <ns1:srgbClr val="586277"/>
+                </ns1:solidFill>
+                <ns1:latin typeface="Arial"/>
+                <ns1:ea typeface="Arial"/>
+                <ns1:cs typeface="Arial"/>
+              </ns1:defRPr>
+            </ns1:pPr>
+            <ns1:r>
+              <ns1:rPr sz="1725" b="0">
+                <ns1:solidFill>
+                  <ns1:srgbClr val="586277"/>
+                </ns1:solidFill>
+                <ns1:latin typeface="Arial"/>
+                <ns1:ea typeface="Arial"/>
+                <ns1:cs typeface="Arial"/>
+              </ns1:rPr>
+              <ns1:t>تحدي</ns1:t>
+            </ns1:r>
+          </ns1:p>
+        </ns0:txBody>
+      </ns0:sp>
+      <ns0:sp>
+        <ns0:nvSpPr>
+          <ns0:cNvPr id="3" name="">
+            <ns1:extLst>
+              <ns1:ext uri="{FF2B5EF4-FFF2-40B4-BE49-F238E27FC236}">
+                <ns2:creationId id="{BD2035F7-0D48-4982-8AF8-19175030A865}"/>
+              </ns1:ext>
+            </ns1:extLst>
+          </ns0:cNvPr>
+          <ns0:cNvSpPr>
+            <ns1:spLocks noGrp="1"/>
+          </ns0:cNvSpPr>
+          <ns0:nvPr/>
+        </ns0:nvSpPr>
+        <ns0:spPr>
+          <ns1:xfrm>
+            <ns1:off x="16440150" y="9486900"/>
+            <ns1:ext cx="457200" cy="339566"/>
+          </ns1:xfrm>
+          <ns1:prstGeom prst="rect">
+            <ns1:avLst/>
+          </ns1:prstGeom>
+          <ns1:noFill/>
+          <ns1:ln w="0">
+            <ns1:noFill/>
+          </ns1:ln>
+        </ns0:spPr>
+        <ns0:txBody>
+          <ns1:bodyPr wrap="none" lIns="0" tIns="0" rIns="0" bIns="0" anchor="t">
+            <ns1:noAutofit/>
+          </ns1:bodyPr>
+          <ns1:lstStyle/>
+          <ns1:p>
+            <ns1:pPr algn="ctr">
+              <ns1:defRPr sz="1725" b="0">
+                <ns1:solidFill>
+                  <ns1:srgbClr val="586277"/>
+                </ns1:solidFill>
+                <ns1:latin typeface="Arial"/>
+                <ns1:ea typeface="Arial"/>
+                <ns1:cs typeface="Arial"/>
+              </ns1:defRPr>
+            </ns1:pPr>
+            <ns1:r>
+              <ns1:rPr sz="1725" b="0">
+                <ns1:solidFill>
+                  <ns1:srgbClr val="586277"/>
+                </ns1:solidFill>
+                <ns1:latin typeface="Arial"/>
+                <ns1:ea typeface="Arial"/>
+                <ns1:cs typeface="Arial"/>
+              </ns1:rPr>
+              <ns1:t>الذكاء</ns1:t>
+            </ns1:r>
+          </ns1:p>
+        </ns0:txBody>
+      </ns0:sp>
+      <ns0:sp>
+        <ns0:nvSpPr>
+          <ns0:cNvPr id="4" name="">
+            <ns1:extLst>
+              <ns1:ext uri="{FF2B5EF4-FFF2-40B4-BE49-F238E27FC236}">
+                <ns2:creationId id="{EE0DFD1A-C674-41ED-95EF-D71B47A37D20}"/>
+              </ns1:ext>
+            </ns1:extLst>
+          </ns0:cNvPr>
+          <ns0:cNvSpPr>
+            <ns1:spLocks noGrp="1"/>
+          </ns0:cNvSpPr>
+          <ns0:nvPr/>
+        </ns0:nvSpPr>
+        <ns0:spPr>
+          <ns1:xfrm>
+            <ns1:off x="15468600" y="9486900"/>
+            <ns1:ext cx="885825" cy="339566"/>
+          </ns1:xfrm>
+          <ns1:prstGeom prst="rect">
+            <ns1:avLst/>
+          </ns1:prstGeom>
+          <ns1:noFill/>
+          <ns1:ln w="0">
+            <ns1:noFill/>
+          </ns1:ln>
+        </ns0:spPr>
+        <ns0:txBody>
+          <ns1:bodyPr wrap="none" lIns="0" tIns="0" rIns="0" bIns="0" anchor="t">
+            <ns1:noAutofit/>
+          </ns1:bodyPr>
+          <ns1:lstStyle/>
+          <ns1:p>
+            <ns1:pPr algn="ctr">
+              <ns1:defRPr sz="1725" b="0">
+                <ns1:solidFill>
+                  <ns1:srgbClr val="586277"/>
+                </ns1:solidFill>
+                <ns1:latin typeface="Arial"/>
+                <ns1:ea typeface="Arial"/>
+                <ns1:cs typeface="Arial"/>
+              </ns1:defRPr>
+            </ns1:pPr>
+            <ns1:r>
+              <ns1:rPr sz="1725" b="0">
+                <ns1:solidFill>
+                  <ns1:srgbClr val="586277"/>
+                </ns1:solidFill>
+                <ns1:latin typeface="Arial"/>
+                <ns1:ea typeface="Arial"/>
+                <ns1:cs typeface="Arial"/>
+              </ns1:rPr>
+              <ns1:t>الاصطناعي</ns1:t>
+            </ns1:r>
+          </ns1:p>
+        </ns0:txBody>
+      </ns0:sp>
+      <ns0:sp>
+        <ns0:nvSpPr>
+          <ns0:cNvPr id="5" name="">
+            <ns1:extLst>
+              <ns1:ext uri="{FF2B5EF4-FFF2-40B4-BE49-F238E27FC236}">
+                <ns2:creationId id="{53C71D5F-0174-4AE6-A6B7-EDF28C2A1EF6}"/>
+              </ns1:ext>
+            </ns1:extLst>
+          </ns0:cNvPr>
+          <ns0:cNvSpPr>
+            <ns1:spLocks noGrp="1"/>
+          </ns0:cNvSpPr>
+          <ns0:nvPr/>
+        </ns0:nvSpPr>
+        <ns0:spPr>
+          <ns1:xfrm>
+            <ns1:off x="15135225" y="9486900"/>
+            <ns1:ext cx="247650" cy="339566"/>
+          </ns1:xfrm>
+          <ns1:prstGeom prst="rect">
+            <ns1:avLst/>
+          </ns1:prstGeom>
+          <ns1:noFill/>
+          <ns1:ln w="0">
+            <ns1:noFill/>
+          </ns1:ln>
+        </ns0:spPr>
+        <ns0:txBody>
+          <ns1:bodyPr wrap="none" lIns="0" tIns="0" rIns="0" bIns="0" anchor="t">
+            <ns1:noAutofit/>
+          </ns1:bodyPr>
+          <ns1:lstStyle/>
+          <ns1:p>
+            <ns1:pPr algn="ctr">
+              <ns1:defRPr sz="1725" b="0">
+                <ns1:solidFill>
+                  <ns1:srgbClr val="586277"/>
+                </ns1:solidFill>
+                <ns1:latin typeface="Arial"/>
+                <ns1:ea typeface="Arial"/>
+                <ns1:cs typeface="Arial"/>
+              </ns1:defRPr>
+            </ns1:pPr>
+            <ns1:r>
+              <ns1:rPr sz="1725" b="0">
+                <ns1:solidFill>
+                  <ns1:srgbClr val="586277"/>
+                </ns1:solidFill>
+                <ns1:latin typeface="Arial"/>
+                <ns1:ea typeface="Arial"/>
+                <ns1:cs typeface="Arial"/>
+              </ns1:rPr>
+              <ns1:t>في</ns1:t>
+            </ns1:r>
+          </ns1:p>
+        </ns0:txBody>
+      </ns0:sp>
+      <ns0:sp>
+        <ns0:nvSpPr>
+          <ns0:cNvPr id="6" name="">
+            <ns1:extLst>
+              <ns1:ext uri="{FF2B5EF4-FFF2-40B4-BE49-F238E27FC236}">
+                <ns2:creationId id="{D94E39D5-E559-493B-8A43-672DBA843A02}"/>
+              </ns1:ext>
+            </ns1:extLst>
+          </ns0:cNvPr>
+          <ns0:cNvSpPr>
+            <ns1:spLocks noGrp="1"/>
+          </ns0:cNvSpPr>
+          <ns0:nvPr/>
+        </ns0:nvSpPr>
+        <ns0:spPr>
+          <ns1:xfrm>
+            <ns1:off x="14630400" y="9486900"/>
+            <ns1:ext cx="419100" cy="339566"/>
+          </ns1:xfrm>
+          <ns1:prstGeom prst="rect">
+            <ns1:avLst/>
+          </ns1:prstGeom>
+          <ns1:noFill/>
+          <ns1:ln w="0">
+            <ns1:noFill/>
+          </ns1:ln>
+        </ns0:spPr>
+        <ns0:txBody>
+          <ns1:bodyPr wrap="none" lIns="0" tIns="0" rIns="0" bIns="0" anchor="t">
+            <ns1:noAutofit/>
+          </ns1:bodyPr>
+          <ns1:lstStyle/>
+          <ns1:p>
+            <ns1:pPr algn="ctr">
+              <ns1:defRPr sz="1725" b="0">
+                <ns1:solidFill>
+                  <ns1:srgbClr val="586277"/>
+                </ns1:solidFill>
+                <ns1:latin typeface="Arial"/>
+                <ns1:ea typeface="Arial"/>
+                <ns1:cs typeface="Arial"/>
+              </ns1:defRPr>
+            </ns1:pPr>
+            <ns1:r>
+              <ns1:rPr sz="1725" b="0">
+                <ns1:solidFill>
+                  <ns1:srgbClr val="586277"/>
+                </ns1:solidFill>
+                <ns1:latin typeface="Arial"/>
+                <ns1:ea typeface="Arial"/>
+                <ns1:cs typeface="Arial"/>
+              </ns1:rPr>
+              <ns1:t>خدمة</ns1:t>
+            </ns1:r>
+          </ns1:p>
+        </ns0:txBody>
+      </ns0:sp>
+      <ns0:sp>
+        <ns0:nvSpPr>
+          <ns0:cNvPr id="7" name="">
+            <ns1:extLst>
+              <ns1:ext uri="{FF2B5EF4-FFF2-40B4-BE49-F238E27FC236}">
+                <ns2:creationId id="{C0A17890-EEC0-47F5-83B8-9E7D30E601D5}"/>
+              </ns1:ext>
+            </ns1:extLst>
+          </ns0:cNvPr>
+          <ns0:cNvSpPr>
+            <ns1:spLocks noGrp="1"/>
+          </ns0:cNvSpPr>
+          <ns0:nvPr/>
+        </ns0:nvSpPr>
+        <ns0:spPr>
+          <ns1:xfrm>
+            <ns1:off x="13839825" y="9486900"/>
+            <ns1:ext cx="704850" cy="339566"/>
+          </ns1:xfrm>
+          <ns1:prstGeom prst="rect">
+            <ns1:avLst/>
+          </ns1:prstGeom>
+          <ns1:noFill/>
+          <ns1:ln w="0">
+            <ns1:noFill/>
+          </ns1:ln>
+        </ns0:spPr>
+        <ns0:txBody>
+          <ns1:bodyPr wrap="none" lIns="0" tIns="0" rIns="0" bIns="0" anchor="t">
+            <ns1:noAutofit/>
+          </ns1:bodyPr>
+          <ns1:lstStyle/>
+          <ns1:p>
+            <ns1:pPr algn="ctr">
+              <ns1:defRPr sz="1725" b="0">
+                <ns1:solidFill>
+                  <ns1:srgbClr val="586277"/>
+                </ns1:solidFill>
+                <ns1:latin typeface="Arial"/>
+                <ns1:ea typeface="Arial"/>
+                <ns1:cs typeface="Arial"/>
+              </ns1:defRPr>
+            </ns1:pPr>
+            <ns1:r>
+              <ns1:rPr sz="1725" b="0">
+                <ns1:solidFill>
+                  <ns1:srgbClr val="586277"/>
+                </ns1:solidFill>
+                <ns1:latin typeface="Arial"/>
+                <ns1:ea typeface="Arial"/>
+                <ns1:cs typeface="Arial"/>
+              </ns1:rPr>
+              <ns1:t>الدراسات</ns1:t>
+            </ns1:r>
+          </ns1:p>
+        </ns0:txBody>
+      </ns0:sp>
+      <ns0:sp>
+        <ns0:nvSpPr>
+          <ns0:cNvPr id="8" name="">
+            <ns1:extLst>
+              <ns1:ext uri="{FF2B5EF4-FFF2-40B4-BE49-F238E27FC236}">
+                <ns2:creationId id="{5AD1356C-3214-482A-900A-8D468B941E8F}"/>
+              </ns1:ext>
+            </ns1:extLst>
+          </ns0:cNvPr>
+          <ns0:cNvSpPr>
+            <ns1:spLocks noGrp="1"/>
+          </ns0:cNvSpPr>
+          <ns0:nvPr/>
+        </ns0:nvSpPr>
+        <ns0:spPr>
+          <ns1:xfrm>
+            <ns1:off x="13058775" y="9486900"/>
+            <ns1:ext cx="695325" cy="339566"/>
+          </ns1:xfrm>
+          <ns1:prstGeom prst="rect">
+            <ns1:avLst/>
+          </ns1:prstGeom>
+          <ns1:noFill/>
+          <ns1:ln w="0">
+            <ns1:noFill/>
+          </ns1:ln>
+        </ns0:spPr>
+        <ns0:txBody>
+          <ns1:bodyPr wrap="none" lIns="0" tIns="0" rIns="0" bIns="0" anchor="t">
+            <ns1:noAutofit/>
+          </ns1:bodyPr>
+          <ns1:lstStyle/>
+          <ns1:p>
+            <ns1:pPr algn="ctr">
+              <ns1:defRPr sz="1725" b="0">
+                <ns1:solidFill>
+                  <ns1:srgbClr val="586277"/>
+                </ns1:solidFill>
+                <ns1:latin typeface="Arial"/>
+                <ns1:ea typeface="Arial"/>
+                <ns1:cs typeface="Arial"/>
+              </ns1:defRPr>
+            </ns1:pPr>
+            <ns1:r>
+              <ns1:rPr sz="1725" b="0">
+                <ns1:solidFill>
+                  <ns1:srgbClr val="586277"/>
+                </ns1:solidFill>
+                <ns1:latin typeface="Arial"/>
+                <ns1:ea typeface="Arial"/>
+                <ns1:cs typeface="Arial"/>
+              </ns1:rPr>
+              <ns1:t>الإسلامية</ns1:t>
+            </ns1:r>
+          </ns1:p>
+        </ns0:txBody>
+      </ns0:sp>
+      <ns0:sp>
+        <ns0:nvSpPr>
+          <ns0:cNvPr id="9" name="">
+            <ns1:extLst>
+              <ns1:ext uri="{FF2B5EF4-FFF2-40B4-BE49-F238E27FC236}">
+                <ns2:creationId id="{5DF674C8-FC83-4FD1-81BF-C08187D2A324}"/>
+              </ns1:ext>
+            </ns1:extLst>
+          </ns0:cNvPr>
+          <ns0:cNvSpPr>
+            <ns1:spLocks noGrp="1"/>
+          </ns0:cNvSpPr>
+          <ns0:nvPr/>
+        </ns0:nvSpPr>
+        <ns0:spPr>
+          <ns1:xfrm>
+            <ns1:off x="16163925" y="809625"/>
+            <ns1:ext cx="1171575" cy="1033463"/>
+          </ns1:xfrm>
+          <ns1:prstGeom prst="rect">
+            <ns1:avLst/>
+          </ns1:prstGeom>
+          <ns1:noFill/>
+          <ns1:ln w="0">
+            <ns1:noFill/>
+          </ns1:ln>
+        </ns0:spPr>
+        <ns0:txBody>
+          <ns1:bodyPr wrap="none" lIns="0" tIns="0" rIns="0" bIns="0" anchor="t">
+            <ns1:noAutofit/>
+          </ns1:bodyPr>
+          <ns1:lstStyle/>
+          <ns1:p>
+            <ns1:pPr algn="ctr">
+              <ns1:defRPr sz="5250" b="1">
+                <ns1:solidFill>
+                  <ns1:srgbClr val="12183F"/>
+                </ns1:solidFill>
+                <ns1:latin typeface="Arial"/>
+                <ns1:ea typeface="Arial"/>
+                <ns1:cs typeface="Arial"/>
+              </ns1:defRPr>
+            </ns1:pPr>
+            <ns1:r>
+              <ns1:rPr sz="5250" b="1">
+                <ns1:solidFill>
+                  <ns1:srgbClr val="12183F"/>
+                </ns1:solidFill>
+                <ns1:latin typeface="Arial"/>
+                <ns1:ea typeface="Arial"/>
+                <ns1:cs typeface="Arial"/>
+              </ns1:rPr>
+              <ns1:t>425</ns1:t>
+            </ns1:r>
+          </ns1:p>
+        </ns0:txBody>
+      </ns0:sp>
+      <ns0:sp>
+        <ns0:nvSpPr>
+          <ns0:cNvPr id="10" name="">
+            <ns1:extLst>
+              <ns1:ext uri="{FF2B5EF4-FFF2-40B4-BE49-F238E27FC236}">
+                <ns2:creationId id="{7E8C5967-4E10-4EE7-BCFB-63CDF54BCB96}"/>
+              </ns1:ext>
+            </ns1:extLst>
+          </ns0:cNvPr>
+          <ns0:cNvSpPr>
+            <ns1:spLocks noGrp="1"/>
+          </ns0:cNvSpPr>
+          <ns0:nvPr/>
+        </ns0:nvSpPr>
+        <ns0:spPr>
+          <ns1:xfrm>
+            <ns1:off x="14740414" y="809625"/>
+            <ns1:ext cx="1238250" cy="1033463"/>
+          </ns1:xfrm>
+          <ns1:prstGeom prst="rect">
+            <ns1:avLst/>
+          </ns1:prstGeom>
+          <ns1:noFill/>
+          <ns1:ln w="0">
+            <ns1:noFill/>
+          </ns1:ln>
+        </ns0:spPr>
+        <ns0:txBody>
+          <ns1:bodyPr wrap="none" lIns="0" tIns="0" rIns="0" bIns="0" anchor="t">
+            <ns1:noAutofit/>
+          </ns1:bodyPr>
+          <ns1:lstStyle/>
+          <ns1:p>
+            <ns1:pPr algn="ctr">
+              <ns1:defRPr sz="5250" b="1">
+                <ns1:solidFill>
+                  <ns1:srgbClr val="12183F"/>
+                </ns1:solidFill>
+                <ns1:latin typeface="Arial"/>
+                <ns1:ea typeface="Arial"/>
+                <ns1:cs typeface="Arial"/>
+              </ns1:defRPr>
+            </ns1:pPr>
+            <ns1:r>
+              <ns1:rPr sz="5250" b="1">
+                <ns1:solidFill>
+                  <ns1:srgbClr val="12183F"/>
+                </ns1:solidFill>
+                <ns1:latin typeface="Arial"/>
+                <ns1:ea typeface="Arial"/>
+                <ns1:cs typeface="Arial"/>
+              </ns1:rPr>
+              <ns1:t>سؤالاً</ns1:t>
+            </ns1:r>
+          </ns1:p>
+        </ns0:txBody>
+      </ns0:sp>
+      <ns0:sp>
+        <ns0:nvSpPr>
+          <ns0:cNvPr id="11" name="">
+            <ns1:extLst>
+              <ns1:ext uri="{FF2B5EF4-FFF2-40B4-BE49-F238E27FC236}">
+                <ns2:creationId id="{97F2714A-6D33-4C27-9481-76B0FB517BB9}"/>
+              </ns1:ext>
+            </ns1:extLst>
+          </ns0:cNvPr>
+          <ns0:cNvSpPr>
+            <ns1:spLocks noGrp="1"/>
+          </ns0:cNvSpPr>
+          <ns0:nvPr/>
+        </ns0:nvSpPr>
+        <ns0:spPr>
+          <ns1:xfrm>
+            <ns1:off x="13364527" y="809625"/>
+            <ns1:ext cx="1190625" cy="1033463"/>
+          </ns1:xfrm>
+          <ns1:prstGeom prst="rect">
+            <ns1:avLst/>
+          </ns1:prstGeom>
+          <ns1:noFill/>
+          <ns1:ln w="0">
+            <ns1:noFill/>
+          </ns1:ln>
+        </ns0:spPr>
+        <ns0:txBody>
+          <ns1:bodyPr wrap="none" lIns="0" tIns="0" rIns="0" bIns="0" anchor="t">
+            <ns1:noAutofit/>
+          </ns1:bodyPr>
+          <ns1:lstStyle/>
+          <ns1:p>
+            <ns1:pPr algn="ctr">
+              <ns1:defRPr sz="5250" b="1">
+                <ns1:solidFill>
+                  <ns1:srgbClr val="12183F"/>
+                </ns1:solidFill>
+                <ns1:latin typeface="Arial"/>
+                <ns1:ea typeface="Arial"/>
+                <ns1:cs typeface="Arial"/>
+              </ns1:defRPr>
+            </ns1:pPr>
+            <ns1:r>
+              <ns1:rPr sz="5250" b="1">
+                <ns1:solidFill>
+                  <ns1:srgbClr val="12183F"/>
+                </ns1:solidFill>
+                <ns1:latin typeface="Arial"/>
+                <ns1:ea typeface="Arial"/>
+                <ns1:cs typeface="Arial"/>
+              </ns1:rPr>
+              <ns1:t>موثقاً</ns1:t>
+            </ns1:r>
+          </ns1:p>
+        </ns0:txBody>
+      </ns0:sp>
+      <ns0:sp>
+        <ns0:nvSpPr>
+          <ns0:cNvPr id="12" name="">
+            <ns1:extLst>
+              <ns1:ext uri="{FF2B5EF4-FFF2-40B4-BE49-F238E27FC236}">
+                <ns2:creationId id="{666928A9-D1B2-4C5C-B5D5-C0210C006017}"/>
+              </ns1:ext>
+            </ns1:extLst>
+          </ns0:cNvPr>
+          <ns0:cNvSpPr>
+            <ns1:spLocks noGrp="1"/>
+          </ns0:cNvSpPr>
+          <ns0:nvPr/>
+        </ns0:nvSpPr>
+        <ns0:spPr>
+          <ns1:xfrm>
+            <ns1:off x="12074366" y="809625"/>
+            <ns1:ext cx="1104900" cy="1033463"/>
+          </ns1:xfrm>
+          <ns1:prstGeom prst="rect">
+            <ns1:avLst/>
+          </ns1:prstGeom>
+          <ns1:noFill/>
+          <ns1:ln w="0">
+            <ns1:noFill/>
+          </ns1:ln>
+        </ns0:spPr>
+        <ns0:txBody>
+          <ns1:bodyPr wrap="none" lIns="0" tIns="0" rIns="0" bIns="0" anchor="t">
+            <ns1:noAutofit/>
+          </ns1:bodyPr>
+          <ns1:lstStyle/>
+          <ns1:p>
+            <ns1:pPr algn="ctr">
+              <ns1:defRPr sz="5250" b="1">
+                <ns1:solidFill>
+                  <ns1:srgbClr val="12183F"/>
+                </ns1:solidFill>
+                <ns1:latin typeface="Arial"/>
+                <ns1:ea typeface="Arial"/>
+                <ns1:cs typeface="Arial"/>
+              </ns1:defRPr>
+            </ns1:pPr>
+            <ns1:r>
+              <ns1:rPr sz="5250" b="1">
+                <ns1:solidFill>
+                  <ns1:srgbClr val="12183F"/>
+                </ns1:solidFill>
+                <ns1:latin typeface="Arial"/>
+                <ns1:ea typeface="Arial"/>
+                <ns1:cs typeface="Arial"/>
+              </ns1:rPr>
+              <ns1:t>وراء</ns1:t>
+            </ns1:r>
+          </ns1:p>
+        </ns0:txBody>
+      </ns0:sp>
+      <ns0:sp>
+        <ns0:nvSpPr>
+          <ns0:cNvPr id="13" name="">
+            <ns1:extLst>
+              <ns1:ext uri="{FF2B5EF4-FFF2-40B4-BE49-F238E27FC236}">
+                <ns2:creationId id="{6407CA00-7DD3-4CBC-B6E7-602DC15BDC6A}"/>
+              </ns1:ext>
+            </ns1:extLst>
+          </ns0:cNvPr>
+          <ns0:cNvSpPr>
+            <ns1:spLocks noGrp="1"/>
+          </ns0:cNvSpPr>
+          <ns0:nvPr/>
+        </ns0:nvSpPr>
+        <ns0:spPr>
+          <ns1:xfrm>
+            <ns1:off x="10755630" y="809625"/>
+            <ns1:ext cx="1133475" cy="1033463"/>
+          </ns1:xfrm>
+          <ns1:prstGeom prst="rect">
+            <ns1:avLst/>
+          </ns1:prstGeom>
+          <ns1:noFill/>
+          <ns1:ln w="0">
+            <ns1:noFill/>
+          </ns1:ln>
+        </ns0:spPr>
+        <ns0:txBody>
+          <ns1:bodyPr wrap="none" lIns="0" tIns="0" rIns="0" bIns="0" anchor="t">
+            <ns1:noAutofit/>
+          </ns1:bodyPr>
+          <ns1:lstStyle/>
+          <ns1:p>
+            <ns1:pPr algn="ctr">
+              <ns1:defRPr sz="5250" b="1">
+                <ns1:solidFill>
+                  <ns1:srgbClr val="12183F"/>
+                </ns1:solidFill>
+                <ns1:latin typeface="Arial"/>
+                <ns1:ea typeface="Arial"/>
+                <ns1:cs typeface="Arial"/>
+              </ns1:defRPr>
+            </ns1:pPr>
+            <ns1:r>
+              <ns1:rPr sz="5250" b="1">
+                <ns1:solidFill>
+                  <ns1:srgbClr val="12183F"/>
+                </ns1:solidFill>
+                <ns1:latin typeface="Arial"/>
+                <ns1:ea typeface="Arial"/>
+                <ns1:cs typeface="Arial"/>
+              </ns1:rPr>
+              <ns1:t>رحلة</ns1:t>
+            </ns1:r>
+          </ns1:p>
+        </ns0:txBody>
+      </ns0:sp>
+      <ns0:sp>
+        <ns0:nvSpPr>
+          <ns0:cNvPr id="14" name="">
+            <ns1:extLst>
+              <ns1:ext uri="{FF2B5EF4-FFF2-40B4-BE49-F238E27FC236}">
+                <ns2:creationId id="{85B9B14B-B75A-4FDC-9102-54AD95A9DEA5}"/>
+              </ns1:ext>
+            </ns1:extLst>
+          </ns0:cNvPr>
+          <ns0:cNvSpPr>
+            <ns1:spLocks noGrp="1"/>
+          </ns0:cNvSpPr>
+          <ns0:nvPr/>
+        </ns0:nvSpPr>
+        <ns0:spPr>
+          <ns1:xfrm>
+            <ns1:off x="8903494" y="809625"/>
+            <ns1:ext cx="1666875" cy="1033463"/>
+          </ns1:xfrm>
+          <ns1:prstGeom prst="rect">
+            <ns1:avLst/>
+          </ns1:prstGeom>
+          <ns1:noFill/>
+          <ns1:ln w="0">
+            <ns1:noFill/>
+          </ns1:ln>
+        </ns0:spPr>
+        <ns0:txBody>
+          <ns1:bodyPr wrap="none" lIns="0" tIns="0" rIns="0" bIns="0" anchor="t">
+            <ns1:noAutofit/>
+          </ns1:bodyPr>
+          <ns1:lstStyle/>
+          <ns1:p>
+            <ns1:pPr algn="ctr">
+              <ns1:defRPr sz="5250" b="1">
+                <ns1:solidFill>
+                  <ns1:srgbClr val="12183F"/>
+                </ns1:solidFill>
+                <ns1:latin typeface="Arial"/>
+                <ns1:ea typeface="Arial"/>
+                <ns1:cs typeface="Arial"/>
+              </ns1:defRPr>
+            </ns1:pPr>
+            <ns1:r>
+              <ns1:rPr sz="5250" b="1">
+                <ns1:solidFill>
+                  <ns1:srgbClr val="12183F"/>
+                </ns1:solidFill>
+                <ns1:latin typeface="Arial"/>
+                <ns1:ea typeface="Arial"/>
+                <ns1:cs typeface="Arial"/>
+              </ns1:rPr>
+              <ns1:t>التطوير</ns1:t>
+            </ns1:r>
+          </ns1:p>
+        </ns0:txBody>
+      </ns0:sp>
+      <ns0:sp>
+        <ns0:nvSpPr>
+          <ns0:cNvPr id="15" name="">
+            <ns1:extLst>
+              <ns1:ext uri="{FF2B5EF4-FFF2-40B4-BE49-F238E27FC236}">
+                <ns2:creationId id="{C5779760-2753-4656-A3B1-1D001A24B5F3}"/>
+              </ns1:ext>
+            </ns1:extLst>
+          </ns0:cNvPr>
+          <ns0:cNvSpPr>
+            <ns1:spLocks noGrp="1"/>
+          </ns0:cNvSpPr>
+          <ns0:nvPr/>
+        </ns0:nvSpPr>
+        <ns0:spPr>
+          <ns1:xfrm>
+            <ns1:off x="952500" y="2619375"/>
+            <ns1:ext cx="7239000" cy="2238375"/>
+          </ns1:xfrm>
+          <ns1:prstGeom prst="rect">
+            <ns1:avLst/>
+          </ns1:prstGeom>
+          <ns1:noFill/>
+          <ns1:ln w="0">
+            <ns1:noFill/>
+          </ns1:ln>
+        </ns0:spPr>
+        <ns0:txBody>
+          <ns1:bodyPr wrap="none" lIns="0" tIns="0" rIns="0" bIns="0" anchor="t">
+            <ns1:noAutofit/>
+          </ns1:bodyPr>
+          <ns1:lstStyle/>
+          <ns1:p>
+            <ns1:pPr algn="l">
+              <ns1:defRPr sz="15375" b="1">
+                <ns1:solidFill>
+                  <ns1:srgbClr val="6150EA"/>
+                </ns1:solidFill>
+                <ns1:latin typeface="Arial"/>
+                <ns1:ea typeface="Arial"/>
+                <ns1:cs typeface="Arial"/>
+              </ns1:defRPr>
+            </ns1:pPr>
+            <ns1:r>
+              <ns1:rPr sz="15375" b="1">
+                <ns1:solidFill>
+                  <ns1:srgbClr val="6150EA"/>
+                </ns1:solidFill>
+                <ns1:latin typeface="Arial"/>
+                <ns1:ea typeface="Arial"/>
+                <ns1:cs typeface="Arial"/>
+              </ns1:rPr>
+              <ns1:t>425</ns1:t>
+            </ns1:r>
+          </ns1:p>
+        </ns0:txBody>
+      </ns0:sp>
+      <ns0:sp>
+        <ns0:nvSpPr>
+          <ns0:cNvPr id="16" name="">
+            <ns1:extLst>
+              <ns1:ext uri="{FF2B5EF4-FFF2-40B4-BE49-F238E27FC236}">
+                <ns2:creationId id="{97816C8E-2ED5-4045-8222-804C59A91959}"/>
+              </ns1:ext>
+            </ns1:extLst>
+          </ns0:cNvPr>
+          <ns0:cNvSpPr>
+            <ns1:spLocks noGrp="1"/>
+          </ns0:cNvSpPr>
+          <ns0:nvPr/>
+        </ns0:nvSpPr>
+        <ns0:spPr>
+          <ns1:xfrm>
+            <ns1:off x="15916275" y="3095625"/>
+            <ns1:ext cx="942975" cy="1018699"/>
+          </ns1:xfrm>
+          <ns1:prstGeom prst="rect">
+            <ns1:avLst/>
+          </ns1:prstGeom>
+          <ns1:noFill/>
+          <ns1:ln w="0">
+            <ns1:noFill/>
+          </ns1:ln>
+        </ns0:spPr>
+        <ns0:txBody>
+          <ns1:bodyPr wrap="none" lIns="0" tIns="0" rIns="0" bIns="0" anchor="t">
+            <ns1:noAutofit/>
+          </ns1:bodyPr>
+          <ns1:lstStyle/>
+          <ns1:p>
+            <ns1:pPr algn="ctr">
+              <ns1:defRPr sz="5175" b="1">
+                <ns1:solidFill>
+                  <ns1:srgbClr val="12183F"/>
+                </ns1:solidFill>
+                <ns1:latin typeface="Arial"/>
+                <ns1:ea typeface="Arial"/>
+                <ns1:cs typeface="Arial"/>
+              </ns1:defRPr>
+            </ns1:pPr>
+            <ns1:r>
+              <ns1:rPr sz="5175" b="1">
+                <ns1:solidFill>
+                  <ns1:srgbClr val="12183F"/>
+                </ns1:solidFill>
+                <ns1:latin typeface="Arial"/>
+                <ns1:ea typeface="Arial"/>
+                <ns1:cs typeface="Arial"/>
+              </ns1:rPr>
+              <ns1:t>نص</ns1:t>
+            </ns1:r>
+          </ns1:p>
+        </ns0:txBody>
+      </ns0:sp>
+      <ns0:sp>
+        <ns0:nvSpPr>
+          <ns0:cNvPr id="17" name="">
+            <ns1:extLst>
+              <ns1:ext uri="{FF2B5EF4-FFF2-40B4-BE49-F238E27FC236}">
+                <ns2:creationId id="{4422476B-EAFA-4E86-A9A8-66B9A7774183}"/>
+              </ns1:ext>
+            </ns1:extLst>
+          </ns0:cNvPr>
+          <ns0:cNvSpPr>
+            <ns1:spLocks noGrp="1"/>
+          </ns0:cNvSpPr>
+          <ns0:nvPr/>
+        </ns0:nvSpPr>
+        <ns0:spPr>
+          <ns1:xfrm>
+            <ns1:off x="14533531" y="3095625"/>
+            <ns1:ext cx="1200150" cy="1018699"/>
+          </ns1:xfrm>
+          <ns1:prstGeom prst="rect">
+            <ns1:avLst/>
+          </ns1:prstGeom>
+          <ns1:noFill/>
+          <ns1:ln w="0">
+            <ns1:noFill/>
+          </ns1:ln>
+        </ns0:spPr>
+        <ns0:txBody>
+          <ns1:bodyPr wrap="none" lIns="0" tIns="0" rIns="0" bIns="0" anchor="t">
+            <ns1:noAutofit/>
+          </ns1:bodyPr>
+          <ns1:lstStyle/>
+          <ns1:p>
+            <ns1:pPr algn="ctr">
+              <ns1:defRPr sz="5175" b="1">
+                <ns1:solidFill>
+                  <ns1:srgbClr val="12183F"/>
+                </ns1:solidFill>
+                <ns1:latin typeface="Arial"/>
+                <ns1:ea typeface="Arial"/>
+                <ns1:cs typeface="Arial"/>
+              </ns1:defRPr>
+            </ns1:pPr>
+            <ns1:r>
+              <ns1:rPr sz="5175" b="1">
+                <ns1:solidFill>
+                  <ns1:srgbClr val="12183F"/>
+                </ns1:solidFill>
+                <ns1:latin typeface="Arial"/>
+                <ns1:ea typeface="Arial"/>
+                <ns1:cs typeface="Arial"/>
+              </ns1:rPr>
+              <ns1:t>سؤال</ns1:t>
+            </ns1:r>
+          </ns1:p>
+        </ns0:txBody>
+      </ns0:sp>
+      <ns0:sp>
+        <ns0:nvSpPr>
+          <ns0:cNvPr id="18" name="">
+            <ns1:extLst>
+              <ns1:ext uri="{FF2B5EF4-FFF2-40B4-BE49-F238E27FC236}">
+                <ns2:creationId id="{2D31A7A0-33B9-4718-8CAC-D863C5B616E2}"/>
+              </ns1:ext>
+            </ns1:extLst>
+          </ns0:cNvPr>
+          <ns0:cNvSpPr>
+            <ns1:spLocks noGrp="1"/>
+          </ns0:cNvSpPr>
+          <ns0:nvPr/>
+        </ns0:nvSpPr>
+        <ns0:spPr>
+          <ns1:xfrm>
+            <ns1:off x="12845986" y="3095625"/>
+            <ns1:ext cx="1504950" cy="1018699"/>
+          </ns1:xfrm>
+          <ns1:prstGeom prst="rect">
+            <ns1:avLst/>
+          </ns1:prstGeom>
+          <ns1:noFill/>
+          <ns1:ln w="0">
+            <ns1:noFill/>
+          </ns1:ln>
+        </ns0:spPr>
+        <ns0:txBody>
+          <ns1:bodyPr wrap="none" lIns="0" tIns="0" rIns="0" bIns="0" anchor="t">
+            <ns1:noAutofit/>
+          </ns1:bodyPr>
+          <ns1:lstStyle/>
+          <ns1:p>
+            <ns1:pPr algn="ctr">
+              <ns1:defRPr sz="5175" b="1">
+                <ns1:solidFill>
+                  <ns1:srgbClr val="12183F"/>
+                </ns1:solidFill>
+                <ns1:latin typeface="Arial"/>
+                <ns1:ea typeface="Arial"/>
+                <ns1:cs typeface="Arial"/>
+              </ns1:defRPr>
+            </ns1:pPr>
+            <ns1:r>
+              <ns1:rPr sz="5175" b="1">
+                <ns1:solidFill>
+                  <ns1:srgbClr val="12183F"/>
+                </ns1:solidFill>
+                <ns1:latin typeface="Arial"/>
+                <ns1:ea typeface="Arial"/>
+                <ns1:cs typeface="Arial"/>
+              </ns1:rPr>
+              <ns1:t>مختلف</ns1:t>
+            </ns1:r>
+          </ns1:p>
+        </ns0:txBody>
+      </ns0:sp>
+      <ns0:sp>
+        <ns0:nvSpPr>
+          <ns0:cNvPr id="19" name="">
+            <ns1:extLst>
+              <ns1:ext uri="{FF2B5EF4-FFF2-40B4-BE49-F238E27FC236}">
+                <ns2:creationId id="{453539BF-49C0-492F-B987-9CE222DF4263}"/>
+              </ns1:ext>
+            </ns1:extLst>
+          </ns0:cNvPr>
+          <ns0:cNvSpPr>
+            <ns1:spLocks noGrp="1"/>
+          </ns0:cNvSpPr>
+          <ns0:nvPr/>
+        </ns0:nvSpPr>
+        <ns0:spPr>
+          <ns1:xfrm>
+            <ns1:off x="16411575" y="4333875"/>
+            <ns1:ext cx="447675" cy="693896"/>
+          </ns1:xfrm>
+          <ns1:prstGeom prst="rect">
+            <ns1:avLst/>
+          </ns1:prstGeom>
+          <ns1:noFill/>
+          <ns1:ln w="0">
+            <ns1:noFill/>
+          </ns1:ln>
+        </ns0:spPr>
+        <ns0:txBody>
+          <ns1:bodyPr wrap="none" lIns="0" tIns="0" rIns="0" bIns="0" anchor="t">
+            <ns1:noAutofit/>
+          </ns1:bodyPr>
+          <ns1:lstStyle/>
+          <ns1:p>
+            <ns1:pPr algn="ctr">
+              <ns1:defRPr sz="3525" b="0">
+                <ns1:solidFill>
+                  <ns1:srgbClr val="12183F"/>
+                </ns1:solidFill>
+                <ns1:latin typeface="Arial"/>
+                <ns1:ea typeface="Arial"/>
+                <ns1:cs typeface="Arial"/>
+              </ns1:defRPr>
+            </ns1:pPr>
+            <ns1:r>
+              <ns1:rPr sz="3525" b="0">
+                <ns1:solidFill>
+                  <ns1:srgbClr val="12183F"/>
+                </ns1:solidFill>
+                <ns1:latin typeface="Arial"/>
+                <ns1:ea typeface="Arial"/>
+                <ns1:cs typeface="Arial"/>
+              </ns1:rPr>
+              <ns1:t>في</ns1:t>
+            </ns1:r>
+          </ns1:p>
+        </ns0:txBody>
+      </ns0:sp>
+      <ns0:sp>
+        <ns0:nvSpPr>
+          <ns0:cNvPr id="20" name="">
+            <ns1:extLst>
+              <ns1:ext uri="{FF2B5EF4-FFF2-40B4-BE49-F238E27FC236}">
+                <ns2:creationId id="{99846D8A-C51D-4B20-8C9E-3F84B27A8B66}"/>
+              </ns1:ext>
+            </ns1:extLst>
+          </ns0:cNvPr>
+          <ns0:cNvSpPr>
+            <ns1:spLocks noGrp="1"/>
+          </ns0:cNvSpPr>
+          <ns0:nvPr/>
+        </ns0:nvSpPr>
+        <ns0:spPr>
+          <ns1:xfrm>
+            <ns1:off x="15725203" y="4333875"/>
+            <ns1:ext cx="561975" cy="693896"/>
+          </ns1:xfrm>
+          <ns1:prstGeom prst="rect">
+            <ns1:avLst/>
+          </ns1:prstGeom>
+          <ns1:noFill/>
+          <ns1:ln w="0">
+            <ns1:noFill/>
+          </ns1:ln>
+        </ns0:spPr>
+        <ns0:txBody>
+          <ns1:bodyPr wrap="none" lIns="0" tIns="0" rIns="0" bIns="0" anchor="t">
+            <ns1:noAutofit/>
+          </ns1:bodyPr>
+          <ns1:lstStyle/>
+          <ns1:p>
+            <ns1:pPr algn="ctr">
+              <ns1:defRPr sz="3525" b="0">
+                <ns1:solidFill>
+                  <ns1:srgbClr val="12183F"/>
+                </ns1:solidFill>
+                <ns1:latin typeface="Arial"/>
+                <ns1:ea typeface="Arial"/>
+                <ns1:cs typeface="Arial"/>
+              </ns1:defRPr>
+            </ns1:pPr>
+            <ns1:r>
+              <ns1:rPr sz="3525" b="0">
+                <ns1:solidFill>
+                  <ns1:srgbClr val="12183F"/>
+                </ns1:solidFill>
+                <ns1:latin typeface="Arial"/>
+                <ns1:ea typeface="Arial"/>
+                <ns1:cs typeface="Arial"/>
+              </ns1:rPr>
+              <ns1:t>12</ns1:t>
+            </ns1:r>
+          </ns1:p>
+        </ns0:txBody>
+      </ns0:sp>
+      <ns0:sp>
+        <ns0:nvSpPr>
+          <ns0:cNvPr id="21" name="">
+            <ns1:extLst>
+              <ns1:ext uri="{FF2B5EF4-FFF2-40B4-BE49-F238E27FC236}">
+                <ns2:creationId id="{E82A7E24-0C04-4F20-82A4-DBBC6119C2F5}"/>
+              </ns1:ext>
+            </ns1:extLst>
+          </ns0:cNvPr>
+          <ns0:cNvSpPr>
+            <ns1:spLocks noGrp="1"/>
+          </ns0:cNvSpPr>
+          <ns0:nvPr/>
+        </ns0:nvSpPr>
+        <ns0:spPr>
+          <ns1:xfrm>
+            <ns1:off x="14353032" y="4333875"/>
+            <ns1:ext cx="1247775" cy="693896"/>
+          </ns1:xfrm>
+          <ns1:prstGeom prst="rect">
+            <ns1:avLst/>
+          </ns1:prstGeom>
+          <ns1:noFill/>
+          <ns1:ln w="0">
+            <ns1:noFill/>
+          </ns1:ln>
+        </ns0:spPr>
+        <ns0:txBody>
+          <ns1:bodyPr wrap="none" lIns="0" tIns="0" rIns="0" bIns="0" anchor="t">
+            <ns1:noAutofit/>
+          </ns1:bodyPr>
+          <ns1:lstStyle/>
+          <ns1:p>
+            <ns1:pPr algn="ctr">
+              <ns1:defRPr sz="3525" b="0">
+                <ns1:solidFill>
+                  <ns1:srgbClr val="12183F"/>
+                </ns1:solidFill>
+                <ns1:latin typeface="Arial"/>
+                <ns1:ea typeface="Arial"/>
+                <ns1:cs typeface="Arial"/>
+              </ns1:defRPr>
+            </ns1:pPr>
+            <ns1:r>
+              <ns1:rPr sz="3525" b="0">
+                <ns1:solidFill>
+                  <ns1:srgbClr val="12183F"/>
+                </ns1:solidFill>
+                <ns1:latin typeface="Arial"/>
+                <ns1:ea typeface="Arial"/>
+                <ns1:cs typeface="Arial"/>
+              </ns1:rPr>
+              <ns1:t>مجموعة</ns1:t>
+            </ns1:r>
+          </ns1:p>
+        </ns0:txBody>
+      </ns0:sp>
+      <ns0:sp>
+        <ns0:nvSpPr>
+          <ns0:cNvPr id="22" name="">
+            <ns1:extLst>
+              <ns1:ext uri="{FF2B5EF4-FFF2-40B4-BE49-F238E27FC236}">
+                <ns2:creationId id="{FAA50ECD-5AC5-4CF1-B710-C306204DC869}"/>
+              </ns1:ext>
+            </ns1:extLst>
+          </ns0:cNvPr>
+          <ns0:cNvSpPr>
+            <ns1:spLocks noGrp="1"/>
+          </ns0:cNvSpPr>
+          <ns0:nvPr/>
+        </ns0:nvSpPr>
+        <ns0:spPr>
+          <ns1:xfrm>
+            <ns1:off x="13218985" y="4333875"/>
+            <ns1:ext cx="1009650" cy="693896"/>
+          </ns1:xfrm>
+          <ns1:prstGeom prst="rect">
+            <ns1:avLst/>
+          </ns1:prstGeom>
+          <ns1:noFill/>
+          <ns1:ln w="0">
+            <ns1:noFill/>
+          </ns1:ln>
+        </ns0:spPr>
+        <ns0:txBody>
+          <ns1:bodyPr wrap="none" lIns="0" tIns="0" rIns="0" bIns="0" anchor="t">
+            <ns1:noAutofit/>
+          </ns1:bodyPr>
+          <ns1:lstStyle/>
+          <ns1:p>
+            <ns1:pPr algn="ctr">
+              <ns1:defRPr sz="3525" b="0">
+                <ns1:solidFill>
+                  <ns1:srgbClr val="12183F"/>
+                </ns1:solidFill>
+                <ns1:latin typeface="Arial"/>
+                <ns1:ea typeface="Arial"/>
+                <ns1:cs typeface="Arial"/>
+              </ns1:defRPr>
+            </ns1:pPr>
+            <ns1:r>
+              <ns1:rPr sz="3525" b="0">
+                <ns1:solidFill>
+                  <ns1:srgbClr val="12183F"/>
+                </ns1:solidFill>
+                <ns1:latin typeface="Arial"/>
+                <ns1:ea typeface="Arial"/>
+                <ns1:cs typeface="Arial"/>
+              </ns1:rPr>
+              <ns1:t>رئيسية</ns1:t>
+            </ns1:r>
+          </ns1:p>
+        </ns0:txBody>
+      </ns0:sp>
+      <ns0:sp>
+        <ns0:nvSpPr>
+          <ns0:cNvPr id="23" name="">
+            <ns1:extLst>
+              <ns1:ext uri="{FF2B5EF4-FFF2-40B4-BE49-F238E27FC236}">
+                <ns2:creationId id="{4A65F1AB-EDD9-4B89-8C63-FE09BBC6601A}"/>
+              </ns1:ext>
+            </ns1:extLst>
+          </ns0:cNvPr>
+          <ns0:cNvSpPr>
+            <ns1:spLocks noGrp="1"/>
+          </ns0:cNvSpPr>
+          <ns0:nvPr/>
+        </ns0:nvSpPr>
+        <ns0:spPr>
+          <ns1:xfrm>
+            <ns1:off x="12132564" y="4333875"/>
+            <ns1:ext cx="962025" cy="693896"/>
+          </ns1:xfrm>
+          <ns1:prstGeom prst="rect">
+            <ns1:avLst/>
+          </ns1:prstGeom>
+          <ns1:noFill/>
+          <ns1:ln w="0">
+            <ns1:noFill/>
+          </ns1:ln>
+        </ns0:spPr>
+        <ns0:txBody>
+          <ns1:bodyPr wrap="none" lIns="0" tIns="0" rIns="0" bIns="0" anchor="t">
+            <ns1:noAutofit/>
+          </ns1:bodyPr>
+          <ns1:lstStyle/>
+          <ns1:p>
+            <ns1:pPr algn="ctr">
+              <ns1:defRPr sz="3525" b="0">
+                <ns1:solidFill>
+                  <ns1:srgbClr val="12183F"/>
+                </ns1:solidFill>
+                <ns1:latin typeface="Arial"/>
+                <ns1:ea typeface="Arial"/>
+                <ns1:cs typeface="Arial"/>
+              </ns1:defRPr>
+            </ns1:pPr>
+            <ns1:r>
+              <ns1:rPr sz="3525" b="0">
+                <ns1:solidFill>
+                  <ns1:srgbClr val="12183F"/>
+                </ns1:solidFill>
+                <ns1:latin typeface="Arial"/>
+                <ns1:ea typeface="Arial"/>
+                <ns1:cs typeface="Arial"/>
+              </ns1:rPr>
+              <ns1:t>مكتملة</ns1:t>
+            </ns1:r>
+          </ns1:p>
+        </ns0:txBody>
+      </ns0:sp>
+      <ns0:sp>
+        <ns0:nvSpPr>
+          <ns0:cNvPr id="24" name="">
+            <ns1:extLst>
+              <ns1:ext uri="{FF2B5EF4-FFF2-40B4-BE49-F238E27FC236}">
+                <ns2:creationId id="{E3B8342D-8F27-4CBF-9182-8850EAA15A92}"/>
+              </ns1:ext>
+            </ns1:extLst>
+          </ns0:cNvPr>
+          <ns0:cNvSpPr>
+            <ns1:spLocks noGrp="1"/>
+          </ns0:cNvSpPr>
+          <ns0:nvPr/>
+        </ns0:nvSpPr>
+        <ns0:spPr>
+          <ns1:xfrm>
+            <ns1:off x="16002000" y="6334125"/>
+            <ns1:ext cx="857250" cy="634841"/>
+          </ns1:xfrm>
+          <ns1:prstGeom prst="rect">
+            <ns1:avLst/>
+          </ns1:prstGeom>
+          <ns1:noFill/>
+          <ns1:ln w="0">
+            <ns1:noFill/>
+          </ns1:ln>
+        </ns0:spPr>
+        <ns0:txBody>
+          <ns1:bodyPr wrap="none" lIns="0" tIns="0" rIns="0" bIns="0" anchor="t">
+            <ns1:noAutofit/>
+          </ns1:bodyPr>
+          <ns1:lstStyle/>
+          <ns1:p>
+            <ns1:pPr algn="ctr">
+              <ns1:defRPr sz="3225" b="1">
+                <ns1:solidFill>
+                  <ns1:srgbClr val="075642"/>
+                </ns1:solidFill>
+                <ns1:latin typeface="Arial"/>
+                <ns1:ea typeface="Arial"/>
+                <ns1:cs typeface="Arial"/>
+              </ns1:defRPr>
+            </ns1:pPr>
+            <ns1:r>
+              <ns1:rPr sz="3225" b="1">
+                <ns1:solidFill>
+                  <ns1:srgbClr val="075642"/>
+                </ns1:solidFill>
+                <ns1:latin typeface="Arial"/>
+                <ns1:ea typeface="Arial"/>
+                <ns1:cs typeface="Arial"/>
+              </ns1:rPr>
+              <ns1:t>إضافة</ns1:t>
+            </ns1:r>
+          </ns1:p>
+        </ns0:txBody>
+      </ns0:sp>
+      <ns0:sp>
+        <ns0:nvSpPr>
+          <ns0:cNvPr id="25" name="">
+            <ns1:extLst>
+              <ns1:ext uri="{FF2B5EF4-FFF2-40B4-BE49-F238E27FC236}">
+                <ns2:creationId id="{D1805187-D5DA-44E3-86C0-3129D56D0DFC}"/>
+              </ns1:ext>
+            </ns1:extLst>
+          </ns0:cNvPr>
+          <ns0:cNvSpPr>
+            <ns1:spLocks noGrp="1"/>
+          </ns0:cNvSpPr>
+          <ns0:nvPr/>
+        </ns0:nvSpPr>
+        <ns0:spPr>
+          <ns1:xfrm>
+            <ns1:off x="15411926" y="6334125"/>
+            <ns1:ext cx="476250" cy="634841"/>
+          </ns1:xfrm>
+          <ns1:prstGeom prst="rect">
+            <ns1:avLst/>
+          </ns1:prstGeom>
+          <ns1:noFill/>
+          <ns1:ln w="0">
+            <ns1:noFill/>
+          </ns1:ln>
+        </ns0:spPr>
+        <ns0:txBody>
+          <ns1:bodyPr wrap="none" lIns="0" tIns="0" rIns="0" bIns="0" anchor="t">
+            <ns1:noAutofit/>
+          </ns1:bodyPr>
+          <ns1:lstStyle/>
+          <ns1:p>
+            <ns1:pPr algn="ctr">
+              <ns1:defRPr sz="3225" b="1">
+                <ns1:solidFill>
+                  <ns1:srgbClr val="075642"/>
+                </ns1:solidFill>
+                <ns1:latin typeface="Arial"/>
+                <ns1:ea typeface="Arial"/>
+                <ns1:cs typeface="Arial"/>
+              </ns1:defRPr>
+            </ns1:pPr>
+            <ns1:r>
+              <ns1:rPr sz="3225" b="1">
+                <ns1:solidFill>
+                  <ns1:srgbClr val="075642"/>
+                </ns1:solidFill>
+                <ns1:latin typeface="Arial"/>
+                <ns1:ea typeface="Arial"/>
+                <ns1:cs typeface="Arial"/>
+              </ns1:rPr>
+              <ns1:t>إلى</ns1:t>
+            </ns1:r>
+          </ns1:p>
+        </ns0:txBody>
+      </ns0:sp>
+      <ns0:sp>
+        <ns0:nvSpPr>
+          <ns0:cNvPr id="26" name="">
+            <ns1:extLst>
+              <ns1:ext uri="{FF2B5EF4-FFF2-40B4-BE49-F238E27FC236}">
+                <ns2:creationId id="{407BDD6A-5084-4AD4-8988-1EFAD80A98E1}"/>
+              </ns1:ext>
+            </ns1:extLst>
+          </ns0:cNvPr>
+          <ns0:cNvSpPr>
+            <ns1:spLocks noGrp="1"/>
+          </ns0:cNvSpPr>
+          <ns0:nvPr/>
+        </ns0:nvSpPr>
+        <ns0:spPr>
+          <ns1:xfrm>
+            <ns1:off x="14212253" y="6334125"/>
+            <ns1:ext cx="1085850" cy="634841"/>
+          </ns1:xfrm>
+          <ns1:prstGeom prst="rect">
+            <ns1:avLst/>
+          </ns1:prstGeom>
+          <ns1:noFill/>
+          <ns1:ln w="0">
+            <ns1:noFill/>
+          </ns1:ln>
+        </ns0:spPr>
+        <ns0:txBody>
+          <ns1:bodyPr wrap="none" lIns="0" tIns="0" rIns="0" bIns="0" anchor="t">
+            <ns1:noAutofit/>
+          </ns1:bodyPr>
+          <ns1:lstStyle/>
+          <ns1:p>
+            <ns1:pPr algn="ctr">
+              <ns1:defRPr sz="3225" b="1">
+                <ns1:solidFill>
+                  <ns1:srgbClr val="075642"/>
+                </ns1:solidFill>
+                <ns1:latin typeface="Arial"/>
+                <ns1:ea typeface="Arial"/>
+                <ns1:cs typeface="Arial"/>
+              </ns1:defRPr>
+            </ns1:pPr>
+            <ns1:r>
+              <ns1:rPr sz="3225" b="1">
+                <ns1:solidFill>
+                  <ns1:srgbClr val="075642"/>
+                </ns1:solidFill>
+                <ns1:latin typeface="Arial"/>
+                <ns1:ea typeface="Arial"/>
+                <ns1:cs typeface="Arial"/>
+              </ns1:rPr>
+              <ns1:t>2,924</ns1:t>
+            </ns1:r>
+          </ns1:p>
+        </ns0:txBody>
+      </ns0:sp>
+      <ns0:sp>
+        <ns0:nvSpPr>
+          <ns0:cNvPr id="27" name="">
+            <ns1:extLst>
+              <ns1:ext uri="{FF2B5EF4-FFF2-40B4-BE49-F238E27FC236}">
+                <ns2:creationId id="{2580B79E-C2CA-4299-B8DC-86DDD20DEE49}"/>
+              </ns1:ext>
+            </ns1:extLst>
+          </ns0:cNvPr>
+          <ns0:cNvSpPr>
+            <ns1:spLocks noGrp="1"/>
+          </ns0:cNvSpPr>
+          <ns0:nvPr/>
+        </ns0:nvSpPr>
+        <ns0:spPr>
+          <ns1:xfrm>
+            <ns1:off x="13288804" y="6334125"/>
+            <ns1:ext cx="809625" cy="634841"/>
+          </ns1:xfrm>
+          <ns1:prstGeom prst="rect">
+            <ns1:avLst/>
+          </ns1:prstGeom>
+          <ns1:noFill/>
+          <ns1:ln w="0">
+            <ns1:noFill/>
+          </ns1:ln>
+        </ns0:spPr>
+        <ns0:txBody>
+          <ns1:bodyPr wrap="none" lIns="0" tIns="0" rIns="0" bIns="0" anchor="t">
+            <ns1:noAutofit/>
+          </ns1:bodyPr>
+          <ns1:lstStyle/>
+          <ns1:p>
+            <ns1:pPr algn="ctr">
+              <ns1:defRPr sz="3225" b="1">
+                <ns1:solidFill>
+                  <ns1:srgbClr val="075642"/>
+                </ns1:solidFill>
+                <ns1:latin typeface="Arial"/>
+                <ns1:ea typeface="Arial"/>
+                <ns1:cs typeface="Arial"/>
+              </ns1:defRPr>
+            </ns1:pPr>
+            <ns1:r>
+              <ns1:rPr sz="3225" b="1">
+                <ns1:solidFill>
+                  <ns1:srgbClr val="075642"/>
+                </ns1:solidFill>
+                <ns1:latin typeface="Arial"/>
+                <ns1:ea typeface="Arial"/>
+                <ns1:cs typeface="Arial"/>
+              </ns1:rPr>
+              <ns1:t>فحصاً</ns1:t>
+            </ns1:r>
+          </ns1:p>
+        </ns0:txBody>
+      </ns0:sp>
+      <ns0:sp>
+        <ns0:nvSpPr>
+          <ns0:cNvPr id="28" name="">
+            <ns1:extLst>
+              <ns1:ext uri="{FF2B5EF4-FFF2-40B4-BE49-F238E27FC236}">
+                <ns2:creationId id="{112750CD-ED65-4AF7-91B7-236F3E116547}"/>
+              </ns1:ext>
+            </ns1:extLst>
+          </ns0:cNvPr>
+          <ns0:cNvSpPr>
+            <ns1:spLocks noGrp="1"/>
+          </ns0:cNvSpPr>
+          <ns0:nvPr/>
+        </ns0:nvSpPr>
+        <ns0:spPr>
+          <ns1:xfrm>
+            <ns1:off x="12232005" y="6334125"/>
+            <ns1:ext cx="942975" cy="634841"/>
+          </ns1:xfrm>
+          <ns1:prstGeom prst="rect">
+            <ns1:avLst/>
+          </ns1:prstGeom>
+          <ns1:noFill/>
+          <ns1:ln w="0">
+            <ns1:noFill/>
+          </ns1:ln>
+        </ns0:spPr>
+        <ns0:txBody>
+          <ns1:bodyPr wrap="none" lIns="0" tIns="0" rIns="0" bIns="0" anchor="t">
+            <ns1:noAutofit/>
+          </ns1:bodyPr>
+          <ns1:lstStyle/>
+          <ns1:p>
+            <ns1:pPr algn="ctr">
+              <ns1:defRPr sz="3225" b="1">
+                <ns1:solidFill>
+                  <ns1:srgbClr val="075642"/>
+                </ns1:solidFill>
+                <ns1:latin typeface="Arial"/>
+                <ns1:ea typeface="Arial"/>
+                <ns1:cs typeface="Arial"/>
+              </ns1:defRPr>
+            </ns1:pPr>
+            <ns1:r>
+              <ns1:rPr sz="3225" b="1">
+                <ns1:solidFill>
+                  <ns1:srgbClr val="075642"/>
+                </ns1:solidFill>
+                <ns1:latin typeface="Arial"/>
+                <ns1:ea typeface="Arial"/>
+                <ns1:cs typeface="Arial"/>
+              </ns1:rPr>
+              <ns1:t>برمجياً</ns1:t>
+            </ns1:r>
+          </ns1:p>
+        </ns0:txBody>
+      </ns0:sp>
+      <ns0:sp>
+        <ns0:nvSpPr>
+          <ns0:cNvPr id="29" name="">
+            <ns1:extLst>
+              <ns1:ext uri="{FF2B5EF4-FFF2-40B4-BE49-F238E27FC236}">
+                <ns2:creationId id="{BDDC8597-AA25-401F-A139-E67E9C68D4AC}"/>
+              </ns1:ext>
+            </ns1:extLst>
+          </ns0:cNvPr>
+          <ns0:cNvSpPr>
+            <ns1:spLocks noGrp="1"/>
+          </ns0:cNvSpPr>
+          <ns0:nvPr/>
+        </ns0:nvSpPr>
+        <ns0:spPr>
+          <ns1:xfrm>
+            <ns1:off x="11508581" y="6334125"/>
+            <ns1:ext cx="609600" cy="634841"/>
+          </ns1:xfrm>
+          <ns1:prstGeom prst="rect">
+            <ns1:avLst/>
+          </ns1:prstGeom>
+          <ns1:noFill/>
+          <ns1:ln w="0">
+            <ns1:noFill/>
+          </ns1:ln>
+        </ns0:spPr>
+        <ns0:txBody>
+          <ns1:bodyPr wrap="none" lIns="0" tIns="0" rIns="0" bIns="0" anchor="t">
+            <ns1:noAutofit/>
+          </ns1:bodyPr>
+          <ns1:lstStyle/>
+          <ns1:p>
+            <ns1:pPr algn="ctr">
+              <ns1:defRPr sz="3225" b="1">
+                <ns1:solidFill>
+                  <ns1:srgbClr val="075642"/>
+                </ns1:solidFill>
+                <ns1:latin typeface="Arial"/>
+                <ns1:ea typeface="Arial"/>
+                <ns1:cs typeface="Arial"/>
+              </ns1:defRPr>
+            </ns1:pPr>
+            <ns1:r>
+              <ns1:rPr sz="3225" b="1">
+                <ns1:solidFill>
+                  <ns1:srgbClr val="075642"/>
+                </ns1:solidFill>
+                <ns1:latin typeface="Arial"/>
+                <ns1:ea typeface="Arial"/>
+                <ns1:cs typeface="Arial"/>
+              </ns1:rPr>
+              <ns1:t>دون</ns1:t>
+            </ns1:r>
+          </ns1:p>
+        </ns0:txBody>
+      </ns0:sp>
+      <ns0:sp>
+        <ns0:nvSpPr>
+          <ns0:cNvPr id="30" name="">
+            <ns1:extLst>
+              <ns1:ext uri="{FF2B5EF4-FFF2-40B4-BE49-F238E27FC236}">
+                <ns2:creationId id="{BB36937F-DC40-43A3-9AA3-880955C5ECBB}"/>
+              </ns1:ext>
+            </ns1:extLst>
+          </ns0:cNvPr>
+          <ns0:cNvSpPr>
+            <ns1:spLocks noGrp="1"/>
+          </ns0:cNvSpPr>
+          <ns0:nvPr/>
+        </ns0:nvSpPr>
+        <ns0:spPr>
+          <ns1:xfrm>
+            <ns1:off x="10537508" y="6334125"/>
+            <ns1:ext cx="857250" cy="634841"/>
+          </ns1:xfrm>
+          <ns1:prstGeom prst="rect">
+            <ns1:avLst/>
+          </ns1:prstGeom>
+          <ns1:noFill/>
+          <ns1:ln w="0">
+            <ns1:noFill/>
+          </ns1:ln>
+        </ns0:spPr>
+        <ns0:txBody>
+          <ns1:bodyPr wrap="none" lIns="0" tIns="0" rIns="0" bIns="0" anchor="t">
+            <ns1:noAutofit/>
+          </ns1:bodyPr>
+          <ns1:lstStyle/>
+          <ns1:p>
+            <ns1:pPr algn="ctr">
+              <ns1:defRPr sz="3225" b="1">
+                <ns1:solidFill>
+                  <ns1:srgbClr val="075642"/>
+                </ns1:solidFill>
+                <ns1:latin typeface="Arial"/>
+                <ns1:ea typeface="Arial"/>
+                <ns1:cs typeface="Arial"/>
+              </ns1:defRPr>
+            </ns1:pPr>
+            <ns1:r>
+              <ns1:rPr sz="3225" b="1">
+                <ns1:solidFill>
+                  <ns1:srgbClr val="075642"/>
+                </ns1:solidFill>
+                <ns1:latin typeface="Arial"/>
+                <ns1:ea typeface="Arial"/>
+                <ns1:cs typeface="Arial"/>
+              </ns1:rPr>
+              <ns1:t>اتصال</ns1:t>
+            </ns1:r>
+          </ns1:p>
+        </ns0:txBody>
+      </ns0:sp>
+      <ns0:sp>
+        <ns0:nvSpPr>
+          <ns0:cNvPr id="31" name="">
+            <ns1:extLst>
+              <ns1:ext uri="{FF2B5EF4-FFF2-40B4-BE49-F238E27FC236}">
+                <ns2:creationId id="{42729036-6A23-4579-A345-73261081CAD2}"/>
+              </ns1:ext>
+            </ns1:extLst>
+          </ns0:cNvPr>
+          <ns0:cNvSpPr>
+            <ns1:spLocks noGrp="1"/>
+          </ns0:cNvSpPr>
+          <ns0:nvPr/>
+        </ns0:nvSpPr>
+        <ns0:spPr>
+          <ns1:xfrm>
+            <ns1:off x="9366409" y="6334125"/>
+            <ns1:ext cx="1057275" cy="634841"/>
+          </ns1:xfrm>
+          <ns1:prstGeom prst="rect">
+            <ns1:avLst/>
+          </ns1:prstGeom>
+          <ns1:noFill/>
+          <ns1:ln w="0">
+            <ns1:noFill/>
+          </ns1:ln>
+        </ns0:spPr>
+        <ns0:txBody>
+          <ns1:bodyPr wrap="none" lIns="0" tIns="0" rIns="0" bIns="0" anchor="t">
+            <ns1:noAutofit/>
+          </ns1:bodyPr>
+          <ns1:lstStyle/>
+          <ns1:p>
+            <ns1:pPr algn="ctr">
+              <ns1:defRPr sz="3225" b="1">
+                <ns1:solidFill>
+                  <ns1:srgbClr val="075642"/>
+                </ns1:solidFill>
+                <ns1:latin typeface="Arial"/>
+                <ns1:ea typeface="Arial"/>
+                <ns1:cs typeface="Arial"/>
+              </ns1:defRPr>
+            </ns1:pPr>
+            <ns1:r>
+              <ns1:rPr sz="3225" b="1">
+                <ns1:solidFill>
+                  <ns1:srgbClr val="075642"/>
+                </ns1:solidFill>
+                <ns1:latin typeface="Arial"/>
+                <ns1:ea typeface="Arial"/>
+                <ns1:cs typeface="Arial"/>
+              </ns1:rPr>
+              <ns1:t>بخدمات</ns1:t>
+            </ns1:r>
+          </ns1:p>
+        </ns0:txBody>
+      </ns0:sp>
+      <ns0:sp>
+        <ns0:nvSpPr>
+          <ns0:cNvPr id="32" name="">
+            <ns1:extLst>
+              <ns1:ext uri="{FF2B5EF4-FFF2-40B4-BE49-F238E27FC236}">
+                <ns2:creationId id="{AF9D2BCC-BE32-4C1A-81B7-304C337F17BA}"/>
+              </ns1:ext>
+            </ns1:extLst>
+          </ns0:cNvPr>
+          <ns0:cNvSpPr>
+            <ns1:spLocks noGrp="1"/>
+          </ns0:cNvSpPr>
+          <ns0:nvPr/>
+        </ns0:nvSpPr>
+        <ns0:spPr>
+          <ns1:xfrm>
+            <ns1:off x="8252460" y="6334125"/>
+            <ns1:ext cx="1000125" cy="634841"/>
+          </ns1:xfrm>
+          <ns1:prstGeom prst="rect">
+            <ns1:avLst/>
+          </ns1:prstGeom>
+          <ns1:noFill/>
+          <ns1:ln w="0">
+            <ns1:noFill/>
+          </ns1:ln>
+        </ns0:spPr>
+        <ns0:txBody>
+          <ns1:bodyPr wrap="none" lIns="0" tIns="0" rIns="0" bIns="0" anchor="t">
+            <ns1:noAutofit/>
+          </ns1:bodyPr>
+          <ns1:lstStyle/>
+          <ns1:p>
+            <ns1:pPr algn="ctr">
+              <ns1:defRPr sz="3225" b="1">
+                <ns1:solidFill>
+                  <ns1:srgbClr val="075642"/>
+                </ns1:solidFill>
+                <ns1:latin typeface="Arial"/>
+                <ns1:ea typeface="Arial"/>
+                <ns1:cs typeface="Arial"/>
+              </ns1:defRPr>
+            </ns1:pPr>
+            <ns1:r>
+              <ns1:rPr sz="3225" b="1">
+                <ns1:solidFill>
+                  <ns1:srgbClr val="075642"/>
+                </ns1:solidFill>
+                <ns1:latin typeface="Arial"/>
+                <ns1:ea typeface="Arial"/>
+                <ns1:cs typeface="Arial"/>
+              </ns1:rPr>
+              <ns1:t>النماذج</ns1:t>
+            </ns1:r>
+          </ns1:p>
+        </ns0:txBody>
+      </ns0:sp>
+      <ns0:sp>
+        <ns0:nvSpPr>
+          <ns0:cNvPr id="33" name="">
+            <ns1:extLst>
+              <ns1:ext uri="{FF2B5EF4-FFF2-40B4-BE49-F238E27FC236}">
+                <ns2:creationId id="{BEFFD903-D55D-4B3A-98F8-2B51BD55FFBF}"/>
+              </ns1:ext>
+            </ns1:extLst>
+          </ns0:cNvPr>
+          <ns0:cNvSpPr>
+            <ns1:spLocks noGrp="1"/>
+          </ns0:cNvSpPr>
+          <ns0:nvPr/>
+        </ns0:nvSpPr>
+        <ns0:spPr>
+          <ns1:xfrm>
+            <ns1:off x="15535275" y="7315200"/>
+            <ns1:ext cx="1323975" cy="634841"/>
+          </ns1:xfrm>
+          <ns1:prstGeom prst="rect">
+            <ns1:avLst/>
+          </ns1:prstGeom>
+          <ns1:noFill/>
+          <ns1:ln w="0">
+            <ns1:noFill/>
+          </ns1:ln>
+        </ns0:spPr>
+        <ns0:txBody>
+          <ns1:bodyPr wrap="none" lIns="0" tIns="0" rIns="0" bIns="0" anchor="t">
+            <ns1:noAutofit/>
+          </ns1:bodyPr>
+          <ns1:lstStyle/>
+          <ns1:p>
+            <ns1:pPr algn="ctr">
+              <ns1:defRPr sz="3225" b="0">
+                <ns1:solidFill>
+                  <ns1:srgbClr val="12183F"/>
+                </ns1:solidFill>
+                <ns1:latin typeface="Arial"/>
+                <ns1:ea typeface="Arial"/>
+                <ns1:cs typeface="Arial"/>
+              </ns1:defRPr>
+            </ns1:pPr>
+            <ns1:r>
+              <ns1:rPr sz="3225" b="0">
+                <ns1:solidFill>
+                  <ns1:srgbClr val="12183F"/>
+                </ns1:solidFill>
+                <ns1:latin typeface="Arial"/>
+                <ns1:ea typeface="Arial"/>
+                <ns1:cs typeface="Arial"/>
+              </ns1:rPr>
+              <ns1:t>ومجموعة</ns1:t>
+            </ns1:r>
+          </ns1:p>
+        </ns0:txBody>
+      </ns0:sp>
+      <ns0:sp>
+        <ns0:nvSpPr>
+          <ns0:cNvPr id="34" name="">
+            <ns1:extLst>
+              <ns1:ext uri="{FF2B5EF4-FFF2-40B4-BE49-F238E27FC236}">
+                <ns2:creationId id="{40FA43B9-F43A-4A35-A28E-E028734D6AB5}"/>
+              </ns1:ext>
+            </ns1:extLst>
+          </ns0:cNvPr>
+          <ns0:cNvSpPr>
+            <ns1:spLocks noGrp="1"/>
+          </ns0:cNvSpPr>
+          <ns0:nvPr/>
+        </ns0:nvSpPr>
+        <ns0:spPr>
+          <ns1:xfrm>
+            <ns1:off x="14535626" y="7315200"/>
+            <ns1:ext cx="885825" cy="634841"/>
+          </ns1:xfrm>
+          <ns1:prstGeom prst="rect">
+            <ns1:avLst/>
+          </ns1:prstGeom>
+          <ns1:noFill/>
+          <ns1:ln w="0">
+            <ns1:noFill/>
+          </ns1:ln>
+        </ns0:spPr>
+        <ns0:txBody>
+          <ns1:bodyPr wrap="none" lIns="0" tIns="0" rIns="0" bIns="0" anchor="t">
+            <ns1:noAutofit/>
+          </ns1:bodyPr>
+          <ns1:lstStyle/>
+          <ns1:p>
+            <ns1:pPr algn="ctr">
+              <ns1:defRPr sz="3225" b="0">
+                <ns1:solidFill>
+                  <ns1:srgbClr val="12183F"/>
+                </ns1:solidFill>
+                <ns1:latin typeface="Arial"/>
+                <ns1:ea typeface="Arial"/>
+                <ns1:cs typeface="Arial"/>
+              </ns1:defRPr>
+            </ns1:pPr>
+            <ns1:r>
+              <ns1:rPr sz="3225" b="0">
+                <ns1:solidFill>
+                  <ns1:srgbClr val="12183F"/>
+                </ns1:solidFill>
+                <ns1:latin typeface="Arial"/>
+                <ns1:ea typeface="Arial"/>
+                <ns1:cs typeface="Arial"/>
+              </ns1:rPr>
+              <ns1:t>انحدار</ns1:t>
+            </ns1:r>
+          </ns1:p>
+        </ns0:txBody>
+      </ns0:sp>
+      <ns0:sp>
+        <ns0:nvSpPr>
+          <ns0:cNvPr id="35" name="">
+            <ns1:extLst>
+              <ns1:ext uri="{FF2B5EF4-FFF2-40B4-BE49-F238E27FC236}">
+                <ns2:creationId id="{8FCB2938-E918-4F25-B5A3-681E038EE14C}"/>
+              </ns1:ext>
+            </ns1:extLst>
+          </ns0:cNvPr>
+          <ns0:cNvSpPr>
+            <ns1:spLocks noGrp="1"/>
+          </ns0:cNvSpPr>
+          <ns0:nvPr/>
+        </ns0:nvSpPr>
+        <ns0:spPr>
+          <ns1:xfrm>
+            <ns1:off x="13659803" y="7315200"/>
+            <ns1:ext cx="762000" cy="634841"/>
+          </ns1:xfrm>
+          <ns1:prstGeom prst="rect">
+            <ns1:avLst/>
+          </ns1:prstGeom>
+          <ns1:noFill/>
+          <ns1:ln w="0">
+            <ns1:noFill/>
+          </ns1:ln>
+        </ns0:spPr>
+        <ns0:txBody>
+          <ns1:bodyPr wrap="none" lIns="0" tIns="0" rIns="0" bIns="0" anchor="t">
+            <ns1:noAutofit/>
+          </ns1:bodyPr>
+          <ns1:lstStyle/>
+          <ns1:p>
+            <ns1:pPr algn="ctr">
+              <ns1:defRPr sz="3225" b="0">
+                <ns1:solidFill>
+                  <ns1:srgbClr val="12183F"/>
+                </ns1:solidFill>
+                <ns1:latin typeface="Arial"/>
+                <ns1:ea typeface="Arial"/>
+                <ns1:cs typeface="Arial"/>
+              </ns1:defRPr>
+            </ns1:pPr>
+            <ns1:r>
+              <ns1:rPr sz="3225" b="0">
+                <ns1:solidFill>
+                  <ns1:srgbClr val="12183F"/>
+                </ns1:solidFill>
+                <ns1:latin typeface="Arial"/>
+                <ns1:ea typeface="Arial"/>
+                <ns1:cs typeface="Arial"/>
+              </ns1:rPr>
+              <ns1:t>لاحقة</ns1:t>
+            </ns1:r>
+          </ns1:p>
+        </ns0:txBody>
+      </ns0:sp>
+      <ns0:sp>
+        <ns0:nvSpPr>
+          <ns0:cNvPr id="36" name="">
+            <ns1:extLst>
+              <ns1:ext uri="{FF2B5EF4-FFF2-40B4-BE49-F238E27FC236}">
+                <ns2:creationId id="{EDCDADBC-7001-409A-B046-BB8F14CD3E6E}"/>
+              </ns1:ext>
+            </ns1:extLst>
+          </ns0:cNvPr>
+          <ns0:cNvSpPr>
+            <ns1:spLocks noGrp="1"/>
+          </ns0:cNvSpPr>
+          <ns0:nvPr/>
+        </ns0:nvSpPr>
+        <ns0:spPr>
+          <ns1:xfrm>
+            <ns1:off x="13107829" y="7315200"/>
+            <ns1:ext cx="438150" cy="634841"/>
+          </ns1:xfrm>
+          <ns1:prstGeom prst="rect">
+            <ns1:avLst/>
+          </ns1:prstGeom>
+          <ns1:noFill/>
+          <ns1:ln w="0">
+            <ns1:noFill/>
+          </ns1:ln>
+        </ns0:spPr>
+        <ns0:txBody>
+          <ns1:bodyPr wrap="none" lIns="0" tIns="0" rIns="0" bIns="0" anchor="t">
+            <ns1:noAutofit/>
+          </ns1:bodyPr>
+          <ns1:lstStyle/>
+          <ns1:p>
+            <ns1:pPr algn="ctr">
+              <ns1:defRPr sz="3225" b="0">
+                <ns1:solidFill>
+                  <ns1:srgbClr val="12183F"/>
+                </ns1:solidFill>
+                <ns1:latin typeface="Arial"/>
+                <ns1:ea typeface="Arial"/>
+                <ns1:cs typeface="Arial"/>
+              </ns1:defRPr>
+            </ns1:pPr>
+            <ns1:r>
+              <ns1:rPr sz="3225" b="0">
+                <ns1:solidFill>
+                  <ns1:srgbClr val="12183F"/>
+                </ns1:solidFill>
+                <ns1:latin typeface="Arial"/>
+                <ns1:ea typeface="Arial"/>
+                <ns1:cs typeface="Arial"/>
+              </ns1:rPr>
+              <ns1:t>من</ns1:t>
+            </ns1:r>
+          </ns1:p>
+        </ns0:txBody>
+      </ns0:sp>
+      <ns0:sp>
+        <ns0:nvSpPr>
+          <ns0:cNvPr id="37" name="">
+            <ns1:extLst>
+              <ns1:ext uri="{FF2B5EF4-FFF2-40B4-BE49-F238E27FC236}">
+                <ns2:creationId id="{0C618684-C047-4242-A944-6757AD401878}"/>
+              </ns1:ext>
+            </ns1:extLst>
+          </ns0:cNvPr>
+          <ns0:cNvSpPr>
+            <ns1:spLocks noGrp="1"/>
+          </ns0:cNvSpPr>
+          <ns0:nvPr/>
+        </ns0:nvSpPr>
+        <ns0:spPr>
+          <ns1:xfrm>
+            <ns1:off x="12251055" y="7315200"/>
+            <ns1:ext cx="742950" cy="634841"/>
+          </ns1:xfrm>
+          <ns1:prstGeom prst="rect">
+            <ns1:avLst/>
+          </ns1:prstGeom>
+          <ns1:noFill/>
+          <ns1:ln w="0">
+            <ns1:noFill/>
+          </ns1:ln>
+        </ns0:spPr>
+        <ns0:txBody>
+          <ns1:bodyPr wrap="none" lIns="0" tIns="0" rIns="0" bIns="0" anchor="t">
+            <ns1:noAutofit/>
+          </ns1:bodyPr>
+          <ns1:lstStyle/>
+          <ns1:p>
+            <ns1:pPr algn="ctr">
+              <ns1:defRPr sz="3225" b="0">
+                <ns1:solidFill>
+                  <ns1:srgbClr val="12183F"/>
+                </ns1:solidFill>
+                <ns1:latin typeface="Arial"/>
+                <ns1:ea typeface="Arial"/>
+                <ns1:cs typeface="Arial"/>
+              </ns1:defRPr>
+            </ns1:pPr>
+            <ns1:r>
+              <ns1:rPr sz="3225" b="0">
+                <ns1:solidFill>
+                  <ns1:srgbClr val="12183F"/>
+                </ns1:solidFill>
+                <ns1:latin typeface="Arial"/>
+                <ns1:ea typeface="Arial"/>
+                <ns1:cs typeface="Arial"/>
+              </ns1:rPr>
+              <ns1:t>542</ns1:t>
+            </ns1:r>
+          </ns1:p>
+        </ns0:txBody>
+      </ns0:sp>
+      <ns0:sp>
+        <ns0:nvSpPr>
+          <ns0:cNvPr id="38" name="">
+            <ns1:extLst>
+              <ns1:ext uri="{FF2B5EF4-FFF2-40B4-BE49-F238E27FC236}">
+                <ns2:creationId id="{23C2BE11-E0A2-419A-BDFE-C3F4A8481099}"/>
+              </ns1:ext>
+            </ns1:extLst>
+          </ns0:cNvPr>
+          <ns0:cNvSpPr>
+            <ns1:spLocks noGrp="1"/>
+          </ns0:cNvSpPr>
+          <ns0:nvPr/>
+        </ns0:nvSpPr>
+        <ns0:spPr>
+          <ns1:xfrm>
+            <ns1:off x="11194256" y="7315200"/>
+            <ns1:ext cx="942975" cy="634841"/>
+          </ns1:xfrm>
+          <ns1:prstGeom prst="rect">
+            <ns1:avLst/>
+          </ns1:prstGeom>
+          <ns1:noFill/>
+          <ns1:ln w="0">
+            <ns1:noFill/>
+          </ns1:ln>
+        </ns0:spPr>
+        <ns0:txBody>
+          <ns1:bodyPr wrap="none" lIns="0" tIns="0" rIns="0" bIns="0" anchor="t">
+            <ns1:noAutofit/>
+          </ns1:bodyPr>
+          <ns1:lstStyle/>
+          <ns1:p>
+            <ns1:pPr algn="ctr">
+              <ns1:defRPr sz="3225" b="0">
+                <ns1:solidFill>
+                  <ns1:srgbClr val="12183F"/>
+                </ns1:solidFill>
+                <ns1:latin typeface="Arial"/>
+                <ns1:ea typeface="Arial"/>
+                <ns1:cs typeface="Arial"/>
+              </ns1:defRPr>
+            </ns1:pPr>
+            <ns1:r>
+              <ns1:rPr sz="3225" b="0">
+                <ns1:solidFill>
+                  <ns1:srgbClr val="12183F"/>
+                </ns1:solidFill>
+                <ns1:latin typeface="Arial"/>
+                <ns1:ea typeface="Arial"/>
+                <ns1:cs typeface="Arial"/>
+              </ns1:rPr>
+              <ns1:t>اختباراً</ns1:t>
+            </ns1:r>
+          </ns1:p>
+        </ns0:txBody>
+      </ns0:sp>
+      <ns0:sp>
+        <ns0:nvSpPr>
+          <ns0:cNvPr id="39" name="">
+            <ns1:extLst>
+              <ns1:ext uri="{FF2B5EF4-FFF2-40B4-BE49-F238E27FC236}">
+                <ns2:creationId id="{199762A6-BC6B-42EE-B255-7C7D7651C02A}"/>
+              </ns1:ext>
+            </ns1:extLst>
+          </ns0:cNvPr>
+          <ns0:cNvSpPr>
+            <ns1:spLocks noGrp="1"/>
+          </ns0:cNvSpPr>
+          <ns0:nvPr/>
+        </ns0:nvSpPr>
+        <ns0:spPr>
+          <ns1:xfrm>
+            <ns1:off x="10670858" y="7315200"/>
+            <ns1:ext cx="409575" cy="634841"/>
+          </ns1:xfrm>
+          <ns1:prstGeom prst="rect">
+            <ns1:avLst/>
+          </ns1:prstGeom>
+          <ns1:noFill/>
+          <ns1:ln w="0">
+            <ns1:noFill/>
+          </ns1:ln>
+        </ns0:spPr>
+        <ns0:txBody>
+          <ns1:bodyPr wrap="none" lIns="0" tIns="0" rIns="0" bIns="0" anchor="t">
+            <ns1:noAutofit/>
+          </ns1:bodyPr>
+          <ns1:lstStyle/>
+          <ns1:p>
+            <ns1:pPr algn="ctr">
+              <ns1:defRPr sz="3225" b="0">
+                <ns1:solidFill>
+                  <ns1:srgbClr val="12183F"/>
+                </ns1:solidFill>
+                <ns1:latin typeface="Arial"/>
+                <ns1:ea typeface="Arial"/>
+                <ns1:cs typeface="Arial"/>
+              </ns1:defRPr>
+            </ns1:pPr>
+            <ns1:r>
+              <ns1:rPr sz="3225" b="0">
+                <ns1:solidFill>
+                  <ns1:srgbClr val="12183F"/>
+                </ns1:solidFill>
+                <ns1:latin typeface="Arial"/>
+                <ns1:ea typeface="Arial"/>
+                <ns1:cs typeface="Arial"/>
+              </ns1:rPr>
+              <ns1:t>في</ns1:t>
+            </ns1:r>
+          </ns1:p>
+        </ns0:txBody>
+      </ns0:sp>
+      <ns0:sp>
+        <ns0:nvSpPr>
+          <ns0:cNvPr id="40" name="">
+            <ns1:extLst>
+              <ns1:ext uri="{FF2B5EF4-FFF2-40B4-BE49-F238E27FC236}">
+                <ns2:creationId id="{7E302D3E-5CA6-4386-832A-570CF761022C}"/>
+              </ns1:ext>
+            </ns1:extLst>
+          </ns0:cNvPr>
+          <ns0:cNvSpPr>
+            <ns1:spLocks noGrp="1"/>
+          </ns0:cNvSpPr>
+          <ns0:nvPr/>
+        </ns0:nvSpPr>
+        <ns0:spPr>
+          <ns1:xfrm>
+            <ns1:off x="10042684" y="7315200"/>
+            <ns1:ext cx="514350" cy="634841"/>
+          </ns1:xfrm>
+          <ns1:prstGeom prst="rect">
+            <ns1:avLst/>
+          </ns1:prstGeom>
+          <ns1:noFill/>
+          <ns1:ln w="0">
+            <ns1:noFill/>
+          </ns1:ln>
+        </ns0:spPr>
+        <ns0:txBody>
+          <ns1:bodyPr wrap="none" lIns="0" tIns="0" rIns="0" bIns="0" anchor="t">
+            <ns1:noAutofit/>
+          </ns1:bodyPr>
+          <ns1:lstStyle/>
+          <ns1:p>
+            <ns1:pPr algn="ctr">
+              <ns1:defRPr sz="3225" b="0">
+                <ns1:solidFill>
+                  <ns1:srgbClr val="12183F"/>
+                </ns1:solidFill>
+                <ns1:latin typeface="Arial"/>
+                <ns1:ea typeface="Arial"/>
+                <ns1:cs typeface="Arial"/>
+              </ns1:defRPr>
+            </ns1:pPr>
+            <ns1:r>
+              <ns1:rPr sz="3225" b="0">
+                <ns1:solidFill>
+                  <ns1:srgbClr val="12183F"/>
+                </ns1:solidFill>
+                <ns1:latin typeface="Arial"/>
+                <ns1:ea typeface="Arial"/>
+                <ns1:cs typeface="Arial"/>
+              </ns1:rPr>
+              <ns1:t>51</ns1:t>
+            </ns1:r>
+          </ns1:p>
+        </ns0:txBody>
+      </ns0:sp>
+      <ns0:sp>
+        <ns0:nvSpPr>
+          <ns0:cNvPr id="41" name="">
+            <ns1:extLst>
+              <ns1:ext uri="{FF2B5EF4-FFF2-40B4-BE49-F238E27FC236}">
+                <ns2:creationId id="{951435A3-7C14-4736-A5A9-F0B80483473C}"/>
+              </ns1:ext>
+            </ns1:extLst>
+          </ns0:cNvPr>
+          <ns0:cNvSpPr>
+            <ns1:spLocks noGrp="1"/>
+          </ns0:cNvSpPr>
+          <ns0:nvPr/>
+        </ns0:nvSpPr>
+        <ns0:spPr>
+          <ns1:xfrm>
+            <ns1:off x="9414510" y="7315200"/>
+            <ns1:ext cx="514350" cy="634841"/>
+          </ns1:xfrm>
+          <ns1:prstGeom prst="rect">
+            <ns1:avLst/>
+          </ns1:prstGeom>
+          <ns1:noFill/>
+          <ns1:ln w="0">
+            <ns1:noFill/>
+          </ns1:ln>
+        </ns0:spPr>
+        <ns0:txBody>
+          <ns1:bodyPr wrap="none" lIns="0" tIns="0" rIns="0" bIns="0" anchor="t">
+            <ns1:noAutofit/>
+          </ns1:bodyPr>
+          <ns1:lstStyle/>
+          <ns1:p>
+            <ns1:pPr algn="ctr">
+              <ns1:defRPr sz="3225" b="0">
+                <ns1:solidFill>
+                  <ns1:srgbClr val="12183F"/>
+                </ns1:solidFill>
+                <ns1:latin typeface="Arial"/>
+                <ns1:ea typeface="Arial"/>
+                <ns1:cs typeface="Arial"/>
+              </ns1:defRPr>
+            </ns1:pPr>
+            <ns1:r>
+              <ns1:rPr sz="3225" b="0">
+                <ns1:solidFill>
+                  <ns1:srgbClr val="12183F"/>
+                </ns1:solidFill>
+                <ns1:latin typeface="Arial"/>
+                <ns1:ea typeface="Arial"/>
+                <ns1:cs typeface="Arial"/>
+              </ns1:rPr>
+              <ns1:t>ملفاً</ns1:t>
+            </ns1:r>
+          </ns1:p>
+        </ns0:txBody>
+      </ns0:sp>
+      <ns0:sp>
+        <ns0:nvSpPr>
+          <ns0:cNvPr id="42" name="">
+            <ns1:extLst>
+              <ns1:ext uri="{FF2B5EF4-FFF2-40B4-BE49-F238E27FC236}">
+                <ns2:creationId id="{380898C8-C309-4CEC-A6A0-44B9A12F6871}"/>
+              </ns1:ext>
+            </ns1:extLst>
+          </ns0:cNvPr>
+          <ns0:cNvSpPr>
+            <ns1:spLocks noGrp="1"/>
+          </ns0:cNvSpPr>
+          <ns0:nvPr/>
+        </ns0:nvSpPr>
+        <ns0:spPr>
+          <ns1:xfrm>
+            <ns1:off x="16040100" y="8582025"/>
+            <ns1:ext cx="819150" cy="428149"/>
+          </ns1:xfrm>
+          <ns1:prstGeom prst="rect">
+            <ns1:avLst/>
+          </ns1:prstGeom>
+          <ns1:noFill/>
+          <ns1:ln w="0">
+            <ns1:noFill/>
+          </ns1:ln>
+        </ns0:spPr>
+        <ns0:txBody>
+          <ns1:bodyPr wrap="none" lIns="0" tIns="0" rIns="0" bIns="0" anchor="t">
+            <ns1:noAutofit/>
+          </ns1:bodyPr>
+          <ns1:lstStyle/>
+          <ns1:p>
+            <ns1:pPr algn="ctr">
+              <ns1:defRPr sz="2175" b="0">
+                <ns1:solidFill>
+                  <ns1:srgbClr val="586277"/>
+                </ns1:solidFill>
+                <ns1:latin typeface="Arial"/>
+                <ns1:ea typeface="Arial"/>
+                <ns1:cs typeface="Arial"/>
+              </ns1:defRPr>
+            </ns1:pPr>
+            <ns1:r>
+              <ns1:rPr sz="2175" b="0">
+                <ns1:solidFill>
+                  <ns1:srgbClr val="586277"/>
+                </ns1:solidFill>
+                <ns1:latin typeface="Arial"/>
+                <ns1:ea typeface="Arial"/>
+                <ns1:cs typeface="Arial"/>
+              </ns1:rPr>
+              <ns1:t>الفحوص</ns1:t>
+            </ns1:r>
+          </ns1:p>
+        </ns0:txBody>
+      </ns0:sp>
+      <ns0:sp>
+        <ns0:nvSpPr>
+          <ns0:cNvPr id="43" name="">
+            <ns1:extLst>
+              <ns1:ext uri="{FF2B5EF4-FFF2-40B4-BE49-F238E27FC236}">
+                <ns2:creationId id="{87D187F5-BF49-46F6-862A-C0DF9D3398FF}"/>
+              </ns1:ext>
+            </ns1:extLst>
+          </ns0:cNvPr>
+          <ns0:cNvSpPr>
+            <ns1:spLocks noGrp="1"/>
+          </ns0:cNvSpPr>
+          <ns0:nvPr/>
+        </ns0:nvSpPr>
+        <ns0:spPr>
+          <ns1:xfrm>
+            <ns1:off x="15144750" y="8582025"/>
+            <ns1:ext cx="809625" cy="428149"/>
+          </ns1:xfrm>
+          <ns1:prstGeom prst="rect">
+            <ns1:avLst/>
+          </ns1:prstGeom>
+          <ns1:noFill/>
+          <ns1:ln w="0">
+            <ns1:noFill/>
+          </ns1:ln>
+        </ns0:spPr>
+        <ns0:txBody>
+          <ns1:bodyPr wrap="none" lIns="0" tIns="0" rIns="0" bIns="0" anchor="t">
+            <ns1:noAutofit/>
+          </ns1:bodyPr>
+          <ns1:lstStyle/>
+          <ns1:p>
+            <ns1:pPr algn="ctr">
+              <ns1:defRPr sz="2175" b="0">
+                <ns1:solidFill>
+                  <ns1:srgbClr val="586277"/>
+                </ns1:solidFill>
+                <ns1:latin typeface="Arial"/>
+                <ns1:ea typeface="Arial"/>
+                <ns1:cs typeface="Arial"/>
+              </ns1:defRPr>
+            </ns1:pPr>
+            <ns1:r>
+              <ns1:rPr sz="2175" b="0">
+                <ns1:solidFill>
+                  <ns1:srgbClr val="586277"/>
+                </ns1:solidFill>
+                <ns1:latin typeface="Arial"/>
+                <ns1:ea typeface="Arial"/>
+                <ns1:cs typeface="Arial"/>
+              </ns1:rPr>
+              <ns1:t>البرمجية</ns1:t>
+            </ns1:r>
+          </ns1:p>
+        </ns0:txBody>
+      </ns0:sp>
+      <ns0:sp>
+        <ns0:nvSpPr>
+          <ns0:cNvPr id="44" name="">
+            <ns1:extLst>
+              <ns1:ext uri="{FF2B5EF4-FFF2-40B4-BE49-F238E27FC236}">
+                <ns2:creationId id="{4AAD7091-FEA7-45DC-AECC-D0D0F6D2789A}"/>
+              </ns1:ext>
+            </ns1:extLst>
+          </ns0:cNvPr>
+          <ns0:cNvSpPr>
+            <ns1:spLocks noGrp="1"/>
+          </ns0:cNvSpPr>
+          <ns0:nvPr/>
+        </ns0:nvSpPr>
+        <ns0:spPr>
+          <ns1:xfrm>
+            <ns1:off x="14525625" y="8582025"/>
+            <ns1:ext cx="533400" cy="428149"/>
+          </ns1:xfrm>
+          <ns1:prstGeom prst="rect">
+            <ns1:avLst/>
+          </ns1:prstGeom>
+          <ns1:noFill/>
+          <ns1:ln w="0">
+            <ns1:noFill/>
+          </ns1:ln>
+        </ns0:spPr>
+        <ns0:txBody>
+          <ns1:bodyPr wrap="none" lIns="0" tIns="0" rIns="0" bIns="0" anchor="t">
+            <ns1:noAutofit/>
+          </ns1:bodyPr>
+          <ns1:lstStyle/>
+          <ns1:p>
+            <ns1:pPr algn="ctr">
+              <ns1:defRPr sz="2175" b="0">
+                <ns1:solidFill>
+                  <ns1:srgbClr val="586277"/>
+                </ns1:solidFill>
+                <ns1:latin typeface="Arial"/>
+                <ns1:ea typeface="Arial"/>
+                <ns1:cs typeface="Arial"/>
+              </ns1:defRPr>
+            </ns1:pPr>
+            <ns1:r>
+              <ns1:rPr sz="2175" b="0">
+                <ns1:solidFill>
+                  <ns1:srgbClr val="586277"/>
+                </ns1:solidFill>
+                <ns1:latin typeface="Arial"/>
+                <ns1:ea typeface="Arial"/>
+                <ns1:cs typeface="Arial"/>
+              </ns1:rPr>
+              <ns1:t>ليست</ns1:t>
+            </ns1:r>
+          </ns1:p>
+        </ns0:txBody>
+      </ns0:sp>
+      <ns0:sp>
+        <ns0:nvSpPr>
+          <ns0:cNvPr id="45" name="">
+            <ns1:extLst>
+              <ns1:ext uri="{FF2B5EF4-FFF2-40B4-BE49-F238E27FC236}">
+                <ns2:creationId id="{9F172ACC-080D-468B-9254-0B9055076917}"/>
+              </ns1:ext>
+            </ns1:extLst>
+          </ns0:cNvPr>
+          <ns0:cNvSpPr>
+            <ns1:spLocks noGrp="1"/>
+          </ns0:cNvSpPr>
+          <ns0:nvPr/>
+        </ns0:nvSpPr>
+        <ns0:spPr>
+          <ns1:xfrm>
+            <ns1:off x="13944600" y="8582025"/>
+            <ns1:ext cx="495300" cy="428149"/>
+          </ns1:xfrm>
+          <ns1:prstGeom prst="rect">
+            <ns1:avLst/>
+          </ns1:prstGeom>
+          <ns1:noFill/>
+          <ns1:ln w="0">
+            <ns1:noFill/>
+          </ns1:ln>
+        </ns0:spPr>
+        <ns0:txBody>
+          <ns1:bodyPr wrap="none" lIns="0" tIns="0" rIns="0" bIns="0" anchor="t">
+            <ns1:noAutofit/>
+          </ns1:bodyPr>
+          <ns1:lstStyle/>
+          <ns1:p>
+            <ns1:pPr algn="ctr">
+              <ns1:defRPr sz="2175" b="0">
+                <ns1:solidFill>
+                  <ns1:srgbClr val="586277"/>
+                </ns1:solidFill>
+                <ns1:latin typeface="Arial"/>
+                <ns1:ea typeface="Arial"/>
+                <ns1:cs typeface="Arial"/>
+              </ns1:defRPr>
+            </ns1:pPr>
+            <ns1:r>
+              <ns1:rPr sz="2175" b="0">
+                <ns1:solidFill>
+                  <ns1:srgbClr val="586277"/>
+                </ns1:solidFill>
+                <ns1:latin typeface="Arial"/>
+                <ns1:ea typeface="Arial"/>
+                <ns1:cs typeface="Arial"/>
+              </ns1:rPr>
+              <ns1:t>أسئلة</ns1:t>
+            </ns1:r>
+          </ns1:p>
+        </ns0:txBody>
+      </ns0:sp>
+      <ns0:sp>
+        <ns0:nvSpPr>
+          <ns0:cNvPr id="46" name="">
+            <ns1:extLst>
+              <ns1:ext uri="{FF2B5EF4-FFF2-40B4-BE49-F238E27FC236}">
+                <ns2:creationId id="{5540E26D-D592-46AB-9B7C-A814F1AA0C8E}"/>
+              </ns1:ext>
+            </ns1:extLst>
+          </ns0:cNvPr>
+          <ns0:cNvSpPr>
+            <ns1:spLocks noGrp="1"/>
+          </ns0:cNvSpPr>
+          <ns0:nvPr/>
+        </ns0:nvSpPr>
+        <ns0:spPr>
+          <ns1:xfrm>
+            <ns1:off x="13477875" y="8582025"/>
+            <ns1:ext cx="381000" cy="428149"/>
+          </ns1:xfrm>
+          <ns1:prstGeom prst="rect">
+            <ns1:avLst/>
+          </ns1:prstGeom>
+          <ns1:noFill/>
+          <ns1:ln w="0">
+            <ns1:noFill/>
+          </ns1:ln>
+        </ns0:spPr>
+        <ns0:txBody>
+          <ns1:bodyPr wrap="none" lIns="0" tIns="0" rIns="0" bIns="0" anchor="t">
+            <ns1:noAutofit/>
+          </ns1:bodyPr>
+          <ns1:lstStyle/>
+          <ns1:p>
+            <ns1:pPr algn="ctr">
+              <ns1:defRPr sz="2175" b="0">
+                <ns1:solidFill>
+                  <ns1:srgbClr val="586277"/>
+                </ns1:solidFill>
+                <ns1:latin typeface="Arial"/>
+                <ns1:ea typeface="Arial"/>
+                <ns1:cs typeface="Arial"/>
+              </ns1:defRPr>
+            </ns1:pPr>
+            <ns1:r>
+              <ns1:rPr sz="2175" b="0">
+                <ns1:solidFill>
+                  <ns1:srgbClr val="586277"/>
+                </ns1:solidFill>
+                <ns1:latin typeface="Arial"/>
+                <ns1:ea typeface="Arial"/>
+                <ns1:cs typeface="Arial"/>
+              </ns1:rPr>
+              <ns1:t>حية</ns1:t>
+            </ns1:r>
+          </ns1:p>
+        </ns0:txBody>
+      </ns0:sp>
+      <ns0:sp>
+        <ns0:nvSpPr>
+          <ns0:cNvPr id="47" name="">
+            <ns1:extLst>
+              <ns1:ext uri="{FF2B5EF4-FFF2-40B4-BE49-F238E27FC236}">
+                <ns2:creationId id="{375947AE-09AB-4BB5-8F6E-FDF9EF9F65E9}"/>
+              </ns1:ext>
+            </ns1:extLst>
+          </ns0:cNvPr>
+          <ns0:cNvSpPr>
+            <ns1:spLocks noGrp="1"/>
+          </ns0:cNvSpPr>
+          <ns0:nvPr/>
+        </ns0:nvSpPr>
+        <ns0:spPr>
+          <ns1:xfrm>
+            <ns1:off x="12734925" y="8582025"/>
+            <ns1:ext cx="657225" cy="428149"/>
+          </ns1:xfrm>
+          <ns1:prstGeom prst="rect">
+            <ns1:avLst/>
+          </ns1:prstGeom>
+          <ns1:noFill/>
+          <ns1:ln w="0">
+            <ns1:noFill/>
+          </ns1:ln>
+        </ns0:spPr>
+        <ns0:txBody>
+          <ns1:bodyPr wrap="none" lIns="0" tIns="0" rIns="0" bIns="0" anchor="t">
+            <ns1:noAutofit/>
+          </ns1:bodyPr>
+          <ns1:lstStyle/>
+          <ns1:p>
+            <ns1:pPr algn="ctr">
+              <ns1:defRPr sz="2175" b="0">
+                <ns1:solidFill>
+                  <ns1:srgbClr val="586277"/>
+                </ns1:solidFill>
+                <ns1:latin typeface="Arial"/>
+                <ns1:ea typeface="Arial"/>
+                <ns1:cs typeface="Arial"/>
+              </ns1:defRPr>
+            </ns1:pPr>
+            <ns1:r>
+              <ns1:rPr sz="2175" b="0">
+                <ns1:solidFill>
+                  <ns1:srgbClr val="586277"/>
+                </ns1:solidFill>
+                <ns1:latin typeface="Arial"/>
+                <ns1:ea typeface="Arial"/>
+                <ns1:cs typeface="Arial"/>
+              </ns1:rPr>
+              <ns1:t>إضافية</ns1:t>
+            </ns1:r>
+          </ns1:p>
+        </ns0:txBody>
+      </ns0:sp>
+      <ns0:sp>
+        <ns0:nvSpPr>
+          <ns0:cNvPr id="48" name="">
+            <ns1:extLst>
+              <ns1:ext uri="{FF2B5EF4-FFF2-40B4-BE49-F238E27FC236}">
+                <ns2:creationId id="{498C6310-7E03-40C1-9D66-55CE0E626B64}"/>
+              </ns1:ext>
+            </ns1:extLst>
+          </ns0:cNvPr>
+          <ns0:cNvSpPr>
+            <ns1:spLocks noGrp="1"/>
+          </ns0:cNvSpPr>
+          <ns0:nvPr/>
+        </ns0:nvSpPr>
+        <ns0:spPr>
+          <ns1:xfrm>
+            <ns1:off x="11820525" y="8582025"/>
+            <ns1:ext cx="828675" cy="428149"/>
+          </ns1:xfrm>
+          <ns1:prstGeom prst="rect">
+            <ns1:avLst/>
+          </ns1:prstGeom>
+          <ns1:noFill/>
+          <ns1:ln w="0">
+            <ns1:noFill/>
+          </ns1:ln>
+        </ns0:spPr>
+        <ns0:txBody>
+          <ns1:bodyPr wrap="none" lIns="0" tIns="0" rIns="0" bIns="0" anchor="t">
+            <ns1:noAutofit/>
+          </ns1:bodyPr>
+          <ns1:lstStyle/>
+          <ns1:p>
+            <ns1:pPr algn="ctr">
+              <ns1:defRPr sz="2175" b="0">
+                <ns1:solidFill>
+                  <ns1:srgbClr val="586277"/>
+                </ns1:solidFill>
+                <ns1:latin typeface="Arial"/>
+                <ns1:ea typeface="Arial"/>
+                <ns1:cs typeface="Arial"/>
+              </ns1:defRPr>
+            </ns1:pPr>
+            <ns1:r>
+              <ns1:rPr sz="2175" b="0">
+                <ns1:solidFill>
+                  <ns1:srgbClr val="586277"/>
+                </ns1:solidFill>
+                <ns1:latin typeface="Arial"/>
+                <ns1:ea typeface="Arial"/>
+                <ns1:cs typeface="Arial"/>
+              </ns1:rPr>
+              <ns1:t>الإعادات</ns1:t>
+            </ns1:r>
+          </ns1:p>
+        </ns0:txBody>
+      </ns0:sp>
+      <ns0:sp>
+        <ns0:nvSpPr>
+          <ns0:cNvPr id="49" name="">
+            <ns1:extLst>
+              <ns1:ext uri="{FF2B5EF4-FFF2-40B4-BE49-F238E27FC236}">
+                <ns2:creationId id="{335FA853-C6B5-452E-B49A-8224E850CDEE}"/>
+              </ns1:ext>
+            </ns1:extLst>
+          </ns0:cNvPr>
+          <ns0:cNvSpPr>
+            <ns1:spLocks noGrp="1"/>
+          </ns0:cNvSpPr>
+          <ns0:nvPr/>
+        </ns0:nvSpPr>
+        <ns0:spPr>
+          <ns1:xfrm>
+            <ns1:off x="10972800" y="8582025"/>
+            <ns1:ext cx="762000" cy="428149"/>
+          </ns1:xfrm>
+          <ns1:prstGeom prst="rect">
+            <ns1:avLst/>
+          </ns1:prstGeom>
+          <ns1:noFill/>
+          <ns1:ln w="0">
+            <ns1:noFill/>
+          </ns1:ln>
+        </ns0:spPr>
+        <ns0:txBody>
+          <ns1:bodyPr wrap="none" lIns="0" tIns="0" rIns="0" bIns="0" anchor="t">
+            <ns1:noAutofit/>
+          </ns1:bodyPr>
+          <ns1:lstStyle/>
+          <ns1:p>
+            <ns1:pPr algn="ctr">
+              <ns1:defRPr sz="2175" b="0">
+                <ns1:solidFill>
+                  <ns1:srgbClr val="586277"/>
+                </ns1:solidFill>
+                <ns1:latin typeface="Arial"/>
+                <ns1:ea typeface="Arial"/>
+                <ns1:cs typeface="Arial"/>
+              </ns1:defRPr>
+            </ns1:pPr>
+            <ns1:r>
+              <ns1:rPr sz="2175" b="0">
+                <ns1:solidFill>
+                  <ns1:srgbClr val="586277"/>
+                </ns1:solidFill>
+                <ns1:latin typeface="Arial"/>
+                <ns1:ea typeface="Arial"/>
+                <ns1:cs typeface="Arial"/>
+              </ns1:rPr>
+              <ns1:t>الموجهة</ns1:t>
+            </ns1:r>
+          </ns1:p>
+        </ns0:txBody>
+      </ns0:sp>
+      <ns0:sp>
+        <ns0:nvSpPr>
+          <ns0:cNvPr id="50" name="">
+            <ns1:extLst>
+              <ns1:ext uri="{FF2B5EF4-FFF2-40B4-BE49-F238E27FC236}">
+                <ns2:creationId id="{874AA287-4EE2-4D0E-9BBB-0A0129037862}"/>
+              </ns1:ext>
+            </ns1:extLst>
+          </ns0:cNvPr>
+          <ns0:cNvSpPr>
+            <ns1:spLocks noGrp="1"/>
+          </ns0:cNvSpPr>
+          <ns0:nvPr/>
+        </ns0:nvSpPr>
+        <ns0:spPr>
+          <ns1:xfrm>
+            <ns1:off x="10325100" y="8582025"/>
+            <ns1:ext cx="561975" cy="428149"/>
+          </ns1:xfrm>
+          <ns1:prstGeom prst="rect">
+            <ns1:avLst/>
+          </ns1:prstGeom>
+          <ns1:noFill/>
+          <ns1:ln w="0">
+            <ns1:noFill/>
+          </ns1:ln>
+        </ns0:spPr>
+        <ns0:txBody>
+          <ns1:bodyPr wrap="none" lIns="0" tIns="0" rIns="0" bIns="0" anchor="t">
+            <ns1:noAutofit/>
+          </ns1:bodyPr>
+          <ns1:lstStyle/>
+          <ns1:p>
+            <ns1:pPr algn="ctr">
+              <ns1:defRPr sz="2175" b="0">
+                <ns1:solidFill>
+                  <ns1:srgbClr val="586277"/>
+                </ns1:solidFill>
+                <ns1:latin typeface="Arial"/>
+                <ns1:ea typeface="Arial"/>
+                <ns1:cs typeface="Arial"/>
+              </ns1:defRPr>
+            </ns1:pPr>
+            <ns1:r>
+              <ns1:rPr sz="2175" b="0">
+                <ns1:solidFill>
+                  <ns1:srgbClr val="586277"/>
+                </ns1:solidFill>
+                <ns1:latin typeface="Arial"/>
+                <ns1:ea typeface="Arial"/>
+                <ns1:cs typeface="Arial"/>
+              </ns1:rPr>
+              <ns1:t>خارج</ns1:t>
+            </ns1:r>
+          </ns1:p>
+        </ns0:txBody>
+      </ns0:sp>
+      <ns0:sp>
+        <ns0:nvSpPr>
+          <ns0:cNvPr id="51" name="">
+            <ns1:extLst>
+              <ns1:ext uri="{FF2B5EF4-FFF2-40B4-BE49-F238E27FC236}">
+                <ns2:creationId id="{7EB9D926-91E9-4AD8-91D9-D6808C52D681}"/>
+              </ns1:ext>
+            </ns1:extLst>
+          </ns0:cNvPr>
+          <ns0:cNvSpPr>
+            <ns1:spLocks noGrp="1"/>
+          </ns0:cNvSpPr>
+          <ns0:nvPr/>
+        </ns0:nvSpPr>
+        <ns0:spPr>
+          <ns1:xfrm>
+            <ns1:off x="9582150" y="8582025"/>
+            <ns1:ext cx="657225" cy="428149"/>
+          </ns1:xfrm>
+          <ns1:prstGeom prst="rect">
+            <ns1:avLst/>
+          </ns1:prstGeom>
+          <ns1:noFill/>
+          <ns1:ln w="0">
+            <ns1:noFill/>
+          </ns1:ln>
+        </ns0:spPr>
+        <ns0:txBody>
+          <ns1:bodyPr wrap="none" lIns="0" tIns="0" rIns="0" bIns="0" anchor="t">
+            <ns1:noAutofit/>
+          </ns1:bodyPr>
+          <ns1:lstStyle/>
+          <ns1:p>
+            <ns1:pPr algn="ctr">
+              <ns1:defRPr sz="2175" b="0">
+                <ns1:solidFill>
+                  <ns1:srgbClr val="586277"/>
+                </ns1:solidFill>
+                <ns1:latin typeface="Arial"/>
+                <ns1:ea typeface="Arial"/>
+                <ns1:cs typeface="Arial"/>
+              </ns1:defRPr>
+            </ns1:pPr>
+            <ns1:r>
+              <ns1:rPr sz="2175" b="0">
+                <ns1:solidFill>
+                  <ns1:srgbClr val="586277"/>
+                </ns1:solidFill>
+                <ns1:latin typeface="Arial"/>
+                <ns1:ea typeface="Arial"/>
+                <ns1:cs typeface="Arial"/>
+              </ns1:rPr>
+              <ns1:t>إجمالي</ns1:t>
+            </ns1:r>
+          </ns1:p>
+        </ns0:txBody>
+      </ns0:sp>
+      <ns0:sp>
+        <ns0:nvSpPr>
+          <ns0:cNvPr id="52" name="">
+            <ns1:extLst>
+              <ns1:ext uri="{FF2B5EF4-FFF2-40B4-BE49-F238E27FC236}">
+                <ns2:creationId id="{6908D019-8693-45A8-88AD-64BDAB1192E7}"/>
+              </ns1:ext>
+            </ns1:extLst>
+          </ns0:cNvPr>
+          <ns0:cNvSpPr>
+            <ns1:spLocks noGrp="1"/>
+          </ns0:cNvSpPr>
+          <ns0:nvPr/>
+        </ns0:nvSpPr>
+        <ns0:spPr>
+          <ns1:xfrm>
+            <ns1:off x="8896350" y="8582025"/>
+            <ns1:ext cx="600075" cy="428149"/>
+          </ns1:xfrm>
+          <ns1:prstGeom prst="rect">
+            <ns1:avLst/>
+          </ns1:prstGeom>
+          <ns1:noFill/>
+          <ns1:ln w="0">
+            <ns1:noFill/>
+          </ns1:ln>
+        </ns0:spPr>
+        <ns0:txBody>
+          <ns1:bodyPr wrap="none" lIns="0" tIns="0" rIns="0" bIns="0" anchor="t">
+            <ns1:noAutofit/>
+          </ns1:bodyPr>
+          <ns1:lstStyle/>
+          <ns1:p>
+            <ns1:pPr algn="ctr">
+              <ns1:defRPr sz="2175" b="0">
+                <ns1:solidFill>
+                  <ns1:srgbClr val="586277"/>
+                </ns1:solidFill>
+                <ns1:latin typeface="Arial"/>
+                <ns1:ea typeface="Arial"/>
+                <ns1:cs typeface="Arial"/>
+              </ns1:defRPr>
+            </ns1:pPr>
+            <ns1:r>
+              <ns1:rPr sz="2175" b="0">
+                <ns1:solidFill>
+                  <ns1:srgbClr val="586277"/>
+                </ns1:solidFill>
+                <ns1:latin typeface="Arial"/>
+                <ns1:ea typeface="Arial"/>
+                <ns1:cs typeface="Arial"/>
+              </ns1:rPr>
+              <ns1:t>425.</ns1:t>
+            </ns1:r>
+          </ns1:p>
+        </ns0:txBody>
+      </ns0:sp>
+    </ns0:spTree>
+    <ns0:extLst>
+      <ns0:ext uri="{BB962C8B-B14F-4D97-AF65-F5344CB8AC3E}">
+        <ns3:creationId val="741905010"/>
+      </ns0:ext>
+    </ns0:extLst>
+  </ns0:cSld>
+</ns0:sld>
 </file>
 
 <file path=ppt/slides/slide8.xml><?xml version="1.0" encoding="utf-8"?>
